--- a/outputs/produkte/instagram-startklar/06-praesentation/startklar-modul-1.pptx
+++ b/outputs/produkte/instagram-startklar/06-praesentation/startklar-modul-1.pptx
@@ -39,9 +39,10 @@
     <p:sldId id="287" r:id="rId33"/>
     <p:sldId id="288" r:id="rId34"/>
     <p:sldId id="289" r:id="rId35"/>
+    <p:sldId id="290" r:id="rId36"/>
   </p:sldIdLst>
   <p:notesMasterIdLst>
-    <p:notesMasterId r:id="rId36"/>
+    <p:notesMasterId r:id="rId37"/>
   </p:notesMasterIdLst>
   <p:sldSz cx="12161520" cy="6858000"/>
   <p:notesSz cx="6858000" cy="12161520"/>
@@ -711,7 +712,7 @@
           <a:p>
             <a:r>
               <a:rPr lang="en-US" dirty="0"/>
-              <a:t>Beim Profilbild bitte kein Produktbild und kein Firmenlogo. Menschen kaufen bei Menschen. Nimm ein Bild, auf dem man dein Gesicht erkennt, wenn man das Handy auf Armlänge hält.</a:t>
+              <a:t>Zeig es an deinem eigenen Profil. Der @username oben ist deine Adresse — den tippt man ein, um dich direkt zu finden. Das fette Name-Feld darunter ist der Suchbegriff: Instagram durchsucht genau dieses Feld. Wenn da nur dein Name steht, findet dich niemand, der dich nicht schon kennt. Deshalb gehört dein Thema hier rein.</a:t>
             </a:r>
             <a:endParaRPr lang="en-US" dirty="0"/>
           </a:p>
@@ -799,7 +800,7 @@
           <a:p>
             <a:r>
               <a:rPr lang="en-US" dirty="0"/>
-              <a:t/>
+              <a:t>Beim Profilbild bitte kein Produktbild und kein Firmenlogo. Menschen kaufen bei Menschen. Nimm ein Bild, auf dem man dein Gesicht erkennt, wenn man das Handy auf Armlänge hält.</a:t>
             </a:r>
             <a:endParaRPr lang="en-US" dirty="0"/>
           </a:p>
@@ -975,7 +976,7 @@
           <a:p>
             <a:r>
               <a:rPr lang="en-US" dirty="0"/>
-              <a:t>Du hast zwei bis drei Sekunden. In der Zeit entscheidet jemand, ob er dir folgt oder weiterwischt. Diese zwei bis drei Sekunden sind deine Bio.</a:t>
+              <a:t/>
             </a:r>
             <a:endParaRPr lang="en-US" dirty="0"/>
           </a:p>
@@ -1063,7 +1064,7 @@
           <a:p>
             <a:r>
               <a:rPr lang="en-US" dirty="0"/>
-              <a:t/>
+              <a:t>Du hast zwei bis drei Sekunden. In der Zeit entscheidet jemand, ob er dir folgt oder weiterwischt. Diese zwei bis drei Sekunden sind deine Bio.</a:t>
             </a:r>
             <a:endParaRPr lang="en-US" dirty="0"/>
           </a:p>
@@ -1151,7 +1152,7 @@
           <a:p>
             <a:r>
               <a:rPr lang="en-US" dirty="0"/>
-              <a:t>Wenn du den Starter-Guide gelesen hast, kennst du diese vier Zeilen schon. Jetzt tippen wir sie wirklich ein, in der Version, die du heute hast, und nicht in der perfekten Version in drei Monaten.</a:t>
+              <a:t/>
             </a:r>
             <a:endParaRPr lang="en-US" dirty="0"/>
           </a:p>
@@ -1239,7 +1240,7 @@
           <a:p>
             <a:r>
               <a:rPr lang="en-US" dirty="0"/>
-              <a:t>Und jetzt mal ganz ehrlich: dein Thema wird sich noch verschieben. Meins hat sich auch verschoben, von Mental Load zu dem, was ich heute mache. Deshalb halten wir uns hier nicht auf. Wenn du bei diesem Satz wirklich feststeckst, ist das ein eigenes Thema — dafür hab ich einen eigenen kurzen Kurs. Für heute reicht die grobe Version.</a:t>
+              <a:t>Wenn du den Starter-Guide gelesen hast, kennst du diese vier Zeilen schon. Jetzt tippen wir sie wirklich ein, in der Version, die du heute hast, und nicht in der perfekten Version in drei Monaten.</a:t>
             </a:r>
             <a:endParaRPr lang="en-US" dirty="0"/>
           </a:p>
@@ -1327,7 +1328,7 @@
           <a:p>
             <a:r>
               <a:rPr lang="en-US" dirty="0"/>
-              <a:t>Der Notizen-Trick spart dir eine halbe Stunde Fluchen. Ich hab damals ewig gebraucht, bis mir das jemand gesagt hat.</a:t>
+              <a:t>Und jetzt mal ganz ehrlich: dein Thema wird sich noch verschieben. Meins hat sich auch verschoben, von Mental Load zu dem, was ich heute mache. Deshalb halten wir uns hier nicht auf. Wenn du bei diesem Satz wirklich feststeckst, ist das ein eigenes Thema — dafür hab ich einen eigenen kurzen Kurs. Für heute reicht die grobe Version.</a:t>
             </a:r>
             <a:endParaRPr lang="en-US" dirty="0"/>
           </a:p>
@@ -1415,8 +1416,7 @@
           <a:p>
             <a:r>
               <a:rPr lang="en-US" dirty="0"/>
-              <a:t>AUFNAHME-HINWEIS: nur die automatisierte Version nennen — KEINEN persönlichen Profilcheck per Sprachnachricht versprechen (der gehört zu „Expertin statt Verkäuferin“).
-Sprechtext: Den Bio-Check hab ich sowieso für alle offen — du kriegst ihn hier gleich mit dazu. Schick deine Bio durch und schau, was zurückkommt. Und wenn was schwammig bleibt, liegt das fast immer am Thema, nicht an den Worten.</a:t>
+              <a:t>Der Notizen-Trick spart dir eine halbe Stunde Fluchen. Ich hab damals ewig gebraucht, bis mir das jemand gesagt hat.</a:t>
             </a:r>
             <a:endParaRPr lang="en-US" dirty="0"/>
           </a:p>
@@ -1592,7 +1592,8 @@
           <a:p>
             <a:r>
               <a:rPr lang="en-US" dirty="0"/>
-              <a:t/>
+              <a:t>AUFNAHME-HINWEIS: nur die automatisierte Version nennen — KEINEN persönlichen Profilcheck per Sprachnachricht versprechen (der gehört zu „Expertin statt Verkäuferin“).
+Sprechtext: Den Bio-Check hab ich sowieso für alle offen — du kriegst ihn hier gleich mit dazu. Schick deine Bio durch und schau, was zurückkommt. Und wenn was schwammig bleibt, liegt das fast immer am Thema, nicht an den Worten.</a:t>
             </a:r>
             <a:endParaRPr lang="en-US" dirty="0"/>
           </a:p>
@@ -1768,7 +1769,7 @@
           <a:p>
             <a:r>
               <a:rPr lang="en-US" dirty="0"/>
-              <a:t>Highlights sind die kleinen Kreise unter deiner Bio. Die meisten Networkerinnen haben da nichts drin oder ihren letzten Urlaub. Dabei ist das die Stelle, an der jemand nachschaut, ob du echt bist.</a:t>
+              <a:t/>
             </a:r>
             <a:endParaRPr lang="en-US" dirty="0"/>
           </a:p>
@@ -1856,7 +1857,7 @@
           <a:p>
             <a:r>
               <a:rPr lang="en-US" dirty="0"/>
-              <a:t/>
+              <a:t>Highlights sind die kleinen Kreise unter deiner Bio. Die meisten Networkerinnen haben da nichts drin oder ihren letzten Urlaub. Dabei ist das die Stelle, an der jemand nachschaut, ob du echt bist.</a:t>
             </a:r>
             <a:endParaRPr lang="en-US" dirty="0"/>
           </a:p>
@@ -1944,7 +1945,7 @@
           <a:p>
             <a:r>
               <a:rPr lang="en-US" dirty="0"/>
-              <a:t>Feedback ist am Anfang leer, und das ist völlig in Ordnung. Du legst den Ordner trotzdem an, damit du weisst, wo die erste Rückmeldung hingehört, wenn sie kommt. Und sie kommt.</a:t>
+              <a:t/>
             </a:r>
             <a:endParaRPr lang="en-US" dirty="0"/>
           </a:p>
@@ -2032,7 +2033,7 @@
           <a:p>
             <a:r>
               <a:rPr lang="en-US" dirty="0"/>
-              <a:t>Du kannst eine Story posten und sie in dem Moment ins Highlight legen, in dem sie noch keine drei Leute gesehen haben. Niemand merkt, dass du das an einem Nachmittag gemacht hast.</a:t>
+              <a:t>Feedback ist am Anfang leer, und das ist völlig in Ordnung. Du legst den Ordner trotzdem an, damit du weisst, wo die erste Rückmeldung hingehört, wenn sie kommt. Und sie kommt.</a:t>
             </a:r>
             <a:endParaRPr lang="en-US" dirty="0"/>
           </a:p>
@@ -2120,7 +2121,7 @@
           <a:p>
             <a:r>
               <a:rPr lang="en-US" dirty="0"/>
-              <a:t>Du brauchst am Anfang kein Linktree und nichts, was monatlich Geld kostet. Instagram lässt dich mehrere Links direkt eintragen. Fang damit an.</a:t>
+              <a:t>Du kannst eine Story posten und sie in dem Moment ins Highlight legen, in dem sie noch keine drei Leute gesehen haben. Niemand merkt, dass du das an einem Nachmittag gemacht hast.</a:t>
             </a:r>
             <a:endParaRPr lang="en-US" dirty="0"/>
           </a:p>
@@ -2208,7 +2209,7 @@
           <a:p>
             <a:r>
               <a:rPr lang="en-US" dirty="0"/>
-              <a:t/>
+              <a:t>Du brauchst am Anfang kein Linktree und nichts, was monatlich Geld kostet. Instagram lässt dich mehrere Links direkt eintragen. Fang damit an.</a:t>
             </a:r>
             <a:endParaRPr lang="en-US" dirty="0"/>
           </a:p>
@@ -2384,7 +2385,7 @@
           <a:p>
             <a:r>
               <a:rPr lang="en-US" dirty="0"/>
-              <a:t>Ich weiss, das ist der langweiligste Punkt im ganzen Kurs. Mach ihn trotzdem. Ich kenne mehrere Frauen, denen das Konto weggenommen wurde, und eine davon hatte tausend Followerinnen und kam nie wieder rein.</a:t>
+              <a:t/>
             </a:r>
             <a:endParaRPr lang="en-US" dirty="0"/>
           </a:p>
@@ -2560,7 +2561,7 @@
           <a:p>
             <a:r>
               <a:rPr lang="en-US" dirty="0"/>
-              <a:t/>
+              <a:t>Ich weiss, das ist der langweiligste Punkt im ganzen Kurs. Mach ihn trotzdem. Ich kenne mehrere Frauen, denen das Konto weggenommen wurde, und eine davon hatte tausend Followerinnen und kam nie wieder rein.</a:t>
             </a:r>
             <a:endParaRPr lang="en-US" dirty="0"/>
           </a:p>
@@ -2648,7 +2649,7 @@
           <a:p>
             <a:r>
               <a:rPr lang="en-US" dirty="0"/>
-              <a:t>Diese DMs sehen echt aus. Da steht: dein Konto verstösst gegen die Richtlinien, klick hier zur Prüfung. Du klickst nichts. Du meldest es und blockierst.</a:t>
+              <a:t/>
             </a:r>
             <a:endParaRPr lang="en-US" dirty="0"/>
           </a:p>
@@ -2736,7 +2737,7 @@
           <a:p>
             <a:r>
               <a:rPr lang="en-US" dirty="0"/>
-              <a:t>Nimm die App-Variante, wenn du die Wahl hast — sie ist sicherer als SMS.</a:t>
+              <a:t>Diese DMs sehen echt aus. Da steht: dein Konto verstösst gegen die Richtlinien, klick hier zur Prüfung. Du klickst nichts. Du meldest es und blockierst.</a:t>
             </a:r>
             <a:endParaRPr lang="en-US" dirty="0"/>
           </a:p>
@@ -2824,7 +2825,7 @@
           <a:p>
             <a:r>
               <a:rPr lang="en-US" dirty="0"/>
-              <a:t>Geh raus aus deinem Profil, such dich selber über die Suche und schau dich an wie eine Fremde. Was siehst du in zwei bis drei Sekunden? Wenn du die Frage beantworten kannst, ist Modul eins erledigt.</a:t>
+              <a:t>Nimm die App-Variante, wenn du die Wahl hast — sie ist sicherer als SMS.</a:t>
             </a:r>
             <a:endParaRPr lang="en-US" dirty="0"/>
           </a:p>
@@ -2912,7 +2913,7 @@
           <a:p>
             <a:r>
               <a:rPr lang="en-US" dirty="0"/>
-              <a:t/>
+              <a:t>Geh raus aus deinem Profil, such dich selber über die Suche und schau dich an wie eine Fremde. Was siehst du in zwei bis drei Sekunden? Wenn du die Frage beantworten kannst, ist Modul eins erledigt.</a:t>
             </a:r>
             <a:endParaRPr lang="en-US" dirty="0"/>
           </a:p>
@@ -2936,6 +2937,94 @@
             <a:fld id="{F7021451-1387-4CA6-816F-3879F97B5CBC}" type="slidenum">
               <a:rPr lang="en-US"/>
               <a:t>34</a:t>
+            </a:fld>
+            <a:endParaRPr lang="en-US"/>
+          </a:p>
+        </p:txBody>
+      </p:sp>
+    </p:spTree>
+    <p:extLst>
+      <p:ext uri="{BB962C8B-B14F-4D97-AF65-F5344CB8AC3E}">
+        <p14:creationId xmlns:p14="http://schemas.microsoft.com/office/powerpoint/2010/main" val="1024086991"/>
+      </p:ext>
+    </p:extLst>
+  </p:cSld>
+  <p:clrMapOvr>
+    <a:masterClrMapping/>
+  </p:clrMapOvr>
+</p:notes>
+</file>
+
+<file path=ppt/notesSlides/notesSlide35.xml><?xml version="1.0" encoding="utf-8"?>
+<p:notes xmlns:a="http://schemas.openxmlformats.org/drawingml/2006/main" xmlns:r="http://schemas.openxmlformats.org/officeDocument/2006/relationships" xmlns:p="http://schemas.openxmlformats.org/presentationml/2006/main">
+  <p:cSld>
+    <p:spTree>
+      <p:nvGrpSpPr>
+        <p:cNvPr id="1" name=""/>
+        <p:cNvGrpSpPr/>
+        <p:nvPr/>
+      </p:nvGrpSpPr>
+      <p:grpSpPr>
+        <a:xfrm>
+          <a:off x="0" y="0"/>
+          <a:ext cx="0" cy="0"/>
+          <a:chOff x="0" y="0"/>
+          <a:chExt cx="0" cy="0"/>
+        </a:xfrm>
+      </p:grpSpPr>
+      <p:sp>
+        <p:nvSpPr>
+          <p:cNvPr id="2" name="Slide Image Placeholder 1"/>
+          <p:cNvSpPr>
+            <a:spLocks noGrp="1" noRot="1" noChangeAspect="1"/>
+          </p:cNvSpPr>
+          <p:nvPr>
+            <p:ph type="sldImg"/>
+          </p:nvPr>
+        </p:nvSpPr>
+        <p:spPr/>
+      </p:sp>
+      <p:sp>
+        <p:nvSpPr>
+          <p:cNvPr id="3" name="Notes Placeholder 2"/>
+          <p:cNvSpPr>
+            <a:spLocks noGrp="1"/>
+          </p:cNvSpPr>
+          <p:nvPr>
+            <p:ph type="body" idx="1"/>
+          </p:nvPr>
+        </p:nvSpPr>
+        <p:spPr/>
+        <p:txBody>
+          <a:bodyPr/>
+          <a:lstStyle/>
+          <a:p>
+            <a:r>
+              <a:rPr lang="en-US" dirty="0"/>
+              <a:t/>
+            </a:r>
+            <a:endParaRPr lang="en-US" dirty="0"/>
+          </a:p>
+        </p:txBody>
+      </p:sp>
+      <p:sp>
+        <p:nvSpPr>
+          <p:cNvPr id="4" name="Slide Number Placeholder 3"/>
+          <p:cNvSpPr>
+            <a:spLocks noGrp="1"/>
+          </p:cNvSpPr>
+          <p:nvPr>
+            <p:ph type="sldNum" sz="quarter" idx="10"/>
+          </p:nvPr>
+        </p:nvSpPr>
+        <p:spPr/>
+        <p:txBody>
+          <a:bodyPr/>
+          <a:lstStyle/>
+          <a:p>
+            <a:fld id="{F7021451-1387-4CA6-816F-3879F97B5CBC}" type="slidenum">
+              <a:rPr lang="en-US"/>
+              <a:t>35</a:t>
             </a:fld>
             <a:endParaRPr lang="en-US"/>
           </a:p>
@@ -4174,6 +4263,476 @@
     <p:bg>
       <p:bgPr>
         <a:solidFill>
+          <a:srgbClr val="FFFFFF"/>
+        </a:solidFill>
+      </p:bgPr>
+    </p:bg>
+    <p:spTree>
+      <p:nvGrpSpPr>
+        <p:cNvPr id="1" name=""/>
+        <p:cNvGrpSpPr/>
+        <p:nvPr/>
+      </p:nvGrpSpPr>
+      <p:grpSpPr>
+        <a:xfrm>
+          <a:off x="0" y="0"/>
+          <a:ext cx="0" cy="0"/>
+          <a:chOff x="0" y="0"/>
+          <a:chExt cx="0" cy="0"/>
+        </a:xfrm>
+      </p:grpSpPr>
+      <p:sp>
+        <p:nvSpPr>
+          <p:cNvPr id="2" name="Text 0"/>
+          <p:cNvSpPr txBox="1"/>
+          <p:nvPr/>
+        </p:nvSpPr>
+        <p:spPr>
+          <a:xfrm>
+            <a:off x="685800" y="502920"/>
+            <a:ext cx="10789920" cy="457200"/>
+          </a:xfrm>
+          <a:prstGeom prst="rect">
+            <a:avLst/>
+          </a:prstGeom>
+          <a:noFill/>
+          <a:ln/>
+        </p:spPr>
+        <p:txBody>
+          <a:bodyPr wrap="square" rtlCol="0" anchor="ctr"/>
+          <a:lstStyle/>
+          <a:p>
+            <a:pPr indent="0" marL="0">
+              <a:buNone/>
+            </a:pPr>
+            <a:r>
+              <a:rPr lang="en-US" sz="1600" b="1" spc="300" kern="0" dirty="0">
+                <a:solidFill>
+                  <a:srgbClr val="2F6F6F"/>
+                </a:solidFill>
+                <a:latin typeface="Calibri" pitchFamily="34" charset="0"/>
+                <a:ea typeface="Calibri" pitchFamily="34" charset="-122"/>
+                <a:cs typeface="Calibri" pitchFamily="34" charset="-120"/>
+              </a:rPr>
+              <a:t>SO SIEHT DAS AN MEINEM PROFIL AUS</a:t>
+            </a:r>
+            <a:endParaRPr lang="en-US" sz="1600" dirty="0"/>
+          </a:p>
+        </p:txBody>
+      </p:sp>
+      <p:pic>
+        <p:nvPicPr>
+          <p:cNvPr id="3" name="Image 0" descr="outputs/produkte/instagram-startklar/06-praesentation/assets/mein-profil.jpg">    </p:cNvPr>
+          <p:cNvPicPr>
+            <a:picLocks noChangeAspect="1"/>
+          </p:cNvPicPr>
+          <p:nvPr/>
+        </p:nvPicPr>
+        <p:blipFill>
+          <a:blip r:embed="rId1"/>
+          <a:stretch>
+            <a:fillRect/>
+          </a:stretch>
+        </p:blipFill>
+        <p:spPr>
+          <a:xfrm>
+            <a:off x="594360" y="1234440"/>
+            <a:ext cx="6126480" cy="5088382"/>
+          </a:xfrm>
+          <a:prstGeom prst="rect">
+            <a:avLst/>
+          </a:prstGeom>
+        </p:spPr>
+      </p:pic>
+      <p:sp>
+        <p:nvSpPr>
+          <p:cNvPr id="4" name="Shape 1"/>
+          <p:cNvSpPr/>
+          <p:nvPr/>
+        </p:nvSpPr>
+        <p:spPr>
+          <a:xfrm>
+            <a:off x="594360" y="1234440"/>
+            <a:ext cx="6126480" cy="5088382"/>
+          </a:xfrm>
+          <a:prstGeom prst="roundRect">
+            <a:avLst>
+              <a:gd name="adj" fmla="val 539"/>
+            </a:avLst>
+          </a:prstGeom>
+          <a:solidFill>
+            <a:srgbClr val="FFFFFF">
+              <a:alpha val="0"/>
+            </a:srgbClr>
+          </a:solidFill>
+          <a:ln w="12700">
+            <a:solidFill>
+              <a:srgbClr val="D9D9D9"/>
+            </a:solidFill>
+            <a:prstDash val="solid"/>
+          </a:ln>
+        </p:spPr>
+      </p:sp>
+      <p:sp>
+        <p:nvSpPr>
+          <p:cNvPr id="5" name="Shape 2"/>
+          <p:cNvSpPr/>
+          <p:nvPr/>
+        </p:nvSpPr>
+        <p:spPr>
+          <a:xfrm>
+            <a:off x="2284815" y="1461347"/>
+            <a:ext cx="2183977" cy="397087"/>
+          </a:xfrm>
+          <a:prstGeom prst="roundRect">
+            <a:avLst>
+              <a:gd name="adj" fmla="val 11514"/>
+            </a:avLst>
+          </a:prstGeom>
+          <a:solidFill>
+            <a:srgbClr val="FFFFFF">
+              <a:alpha val="0"/>
+            </a:srgbClr>
+          </a:solidFill>
+          <a:ln w="38100">
+            <a:solidFill>
+              <a:srgbClr val="2F6F6F"/>
+            </a:solidFill>
+            <a:prstDash val="solid"/>
+          </a:ln>
+        </p:spPr>
+      </p:sp>
+      <p:sp>
+        <p:nvSpPr>
+          <p:cNvPr id="6" name="Text 3"/>
+          <p:cNvSpPr txBox="1"/>
+          <p:nvPr/>
+        </p:nvSpPr>
+        <p:spPr>
+          <a:xfrm>
+            <a:off x="2138511" y="1315043"/>
+            <a:ext cx="365760" cy="365760"/>
+          </a:xfrm>
+          <a:prstGeom prst="ellipse">
+            <a:avLst/>
+          </a:prstGeom>
+          <a:solidFill>
+            <a:srgbClr val="2F6F6F"/>
+          </a:solidFill>
+          <a:ln/>
+        </p:spPr>
+        <p:txBody>
+          <a:bodyPr wrap="square" lIns="0" tIns="0" rIns="0" bIns="0" rtlCol="0" anchor="ctr"/>
+          <a:lstStyle/>
+          <a:p>
+            <a:pPr algn="ctr" indent="0" marL="0">
+              <a:buNone/>
+            </a:pPr>
+            <a:r>
+              <a:rPr lang="en-US" sz="1600" b="1" dirty="0">
+                <a:solidFill>
+                  <a:srgbClr val="FFFFFF"/>
+                </a:solidFill>
+                <a:latin typeface="Cambria" pitchFamily="34" charset="0"/>
+                <a:ea typeface="Cambria" pitchFamily="34" charset="-122"/>
+                <a:cs typeface="Cambria" pitchFamily="34" charset="-120"/>
+              </a:rPr>
+              <a:t>1</a:t>
+            </a:r>
+            <a:endParaRPr lang="en-US" sz="1600" dirty="0"/>
+          </a:p>
+        </p:txBody>
+      </p:sp>
+      <p:sp>
+        <p:nvSpPr>
+          <p:cNvPr id="7" name="Shape 4"/>
+          <p:cNvSpPr/>
+          <p:nvPr/>
+        </p:nvSpPr>
+        <p:spPr>
+          <a:xfrm>
+            <a:off x="2454995" y="2346283"/>
+            <a:ext cx="3942503" cy="635339"/>
+          </a:xfrm>
+          <a:prstGeom prst="roundRect">
+            <a:avLst>
+              <a:gd name="adj" fmla="val 7196"/>
+            </a:avLst>
+          </a:prstGeom>
+          <a:solidFill>
+            <a:srgbClr val="FFFFFF">
+              <a:alpha val="0"/>
+            </a:srgbClr>
+          </a:solidFill>
+          <a:ln w="38100">
+            <a:solidFill>
+              <a:srgbClr val="D6832F"/>
+            </a:solidFill>
+            <a:prstDash val="solid"/>
+          </a:ln>
+        </p:spPr>
+      </p:sp>
+      <p:sp>
+        <p:nvSpPr>
+          <p:cNvPr id="8" name="Text 5"/>
+          <p:cNvSpPr txBox="1"/>
+          <p:nvPr/>
+        </p:nvSpPr>
+        <p:spPr>
+          <a:xfrm>
+            <a:off x="2308691" y="2199979"/>
+            <a:ext cx="365760" cy="365760"/>
+          </a:xfrm>
+          <a:prstGeom prst="ellipse">
+            <a:avLst/>
+          </a:prstGeom>
+          <a:solidFill>
+            <a:srgbClr val="D6832F"/>
+          </a:solidFill>
+          <a:ln/>
+        </p:spPr>
+        <p:txBody>
+          <a:bodyPr wrap="square" lIns="0" tIns="0" rIns="0" bIns="0" rtlCol="0" anchor="ctr"/>
+          <a:lstStyle/>
+          <a:p>
+            <a:pPr algn="ctr" indent="0" marL="0">
+              <a:buNone/>
+            </a:pPr>
+            <a:r>
+              <a:rPr lang="en-US" sz="1600" b="1" dirty="0">
+                <a:solidFill>
+                  <a:srgbClr val="FFFFFF"/>
+                </a:solidFill>
+                <a:latin typeface="Cambria" pitchFamily="34" charset="0"/>
+                <a:ea typeface="Cambria" pitchFamily="34" charset="-122"/>
+                <a:cs typeface="Cambria" pitchFamily="34" charset="-120"/>
+              </a:rPr>
+              <a:t>2</a:t>
+            </a:r>
+            <a:endParaRPr lang="en-US" sz="1600" dirty="0"/>
+          </a:p>
+        </p:txBody>
+      </p:sp>
+      <p:sp>
+        <p:nvSpPr>
+          <p:cNvPr id="9" name="Shape 6"/>
+          <p:cNvSpPr/>
+          <p:nvPr/>
+        </p:nvSpPr>
+        <p:spPr>
+          <a:xfrm>
+            <a:off x="7086600" y="1417320"/>
+            <a:ext cx="4389120" cy="1965960"/>
+          </a:xfrm>
+          <a:prstGeom prst="roundRect">
+            <a:avLst>
+              <a:gd name="adj" fmla="val 4651"/>
+            </a:avLst>
+          </a:prstGeom>
+          <a:solidFill>
+            <a:srgbClr val="EAF1F0"/>
+          </a:solidFill>
+          <a:ln/>
+        </p:spPr>
+      </p:sp>
+      <p:sp>
+        <p:nvSpPr>
+          <p:cNvPr id="10" name="Text 7"/>
+          <p:cNvSpPr txBox="1"/>
+          <p:nvPr/>
+        </p:nvSpPr>
+        <p:spPr>
+          <a:xfrm>
+            <a:off x="7406640" y="1673352"/>
+            <a:ext cx="3749040" cy="502920"/>
+          </a:xfrm>
+          <a:prstGeom prst="rect">
+            <a:avLst/>
+          </a:prstGeom>
+          <a:noFill/>
+          <a:ln/>
+        </p:spPr>
+        <p:txBody>
+          <a:bodyPr wrap="square" rtlCol="0" anchor="ctr"/>
+          <a:lstStyle/>
+          <a:p>
+            <a:pPr indent="0" marL="0">
+              <a:buNone/>
+            </a:pPr>
+            <a:r>
+              <a:rPr lang="en-US" sz="2200" b="1" dirty="0">
+                <a:solidFill>
+                  <a:srgbClr val="2F6F6F"/>
+                </a:solidFill>
+                <a:latin typeface="Cambria" pitchFamily="34" charset="0"/>
+                <a:ea typeface="Cambria" pitchFamily="34" charset="-122"/>
+                <a:cs typeface="Cambria" pitchFamily="34" charset="-120"/>
+              </a:rPr>
+              <a:t>① @username</a:t>
+            </a:r>
+            <a:endParaRPr lang="en-US" sz="2200" dirty="0"/>
+          </a:p>
+        </p:txBody>
+      </p:sp>
+      <p:sp>
+        <p:nvSpPr>
+          <p:cNvPr id="11" name="Text 8"/>
+          <p:cNvSpPr txBox="1"/>
+          <p:nvPr/>
+        </p:nvSpPr>
+        <p:spPr>
+          <a:xfrm>
+            <a:off x="7406640" y="2286000"/>
+            <a:ext cx="3749040" cy="868680"/>
+          </a:xfrm>
+          <a:prstGeom prst="rect">
+            <a:avLst/>
+          </a:prstGeom>
+          <a:noFill/>
+          <a:ln/>
+        </p:spPr>
+        <p:txBody>
+          <a:bodyPr wrap="square" rtlCol="0" anchor="t"/>
+          <a:lstStyle/>
+          <a:p>
+            <a:pPr indent="0" marL="0">
+              <a:lnSpc>
+                <a:spcPct val="105000"/>
+              </a:lnSpc>
+              <a:buNone/>
+            </a:pPr>
+            <a:r>
+              <a:rPr lang="en-US" sz="1650" dirty="0">
+                <a:solidFill>
+                  <a:srgbClr val="33413F"/>
+                </a:solidFill>
+                <a:latin typeface="Calibri" pitchFamily="34" charset="0"/>
+                <a:ea typeface="Calibri" pitchFamily="34" charset="-122"/>
+                <a:cs typeface="Calibri" pitchFamily="34" charset="-120"/>
+              </a:rPr>
+              <a:t>Deine feste Adresse: @mumlifebalance. Kurz, merkbar, ohne Zahlenwüste — steht ganz oben in der Leiste und in der URL.</a:t>
+            </a:r>
+            <a:endParaRPr lang="en-US" sz="1650" dirty="0"/>
+          </a:p>
+        </p:txBody>
+      </p:sp>
+      <p:sp>
+        <p:nvSpPr>
+          <p:cNvPr id="12" name="Shape 9"/>
+          <p:cNvSpPr/>
+          <p:nvPr/>
+        </p:nvSpPr>
+        <p:spPr>
+          <a:xfrm>
+            <a:off x="7086600" y="3611880"/>
+            <a:ext cx="4389120" cy="2468880"/>
+          </a:xfrm>
+          <a:prstGeom prst="roundRect">
+            <a:avLst>
+              <a:gd name="adj" fmla="val 3704"/>
+            </a:avLst>
+          </a:prstGeom>
+          <a:solidFill>
+            <a:srgbClr val="FBEEDD"/>
+          </a:solidFill>
+          <a:ln/>
+        </p:spPr>
+      </p:sp>
+      <p:sp>
+        <p:nvSpPr>
+          <p:cNvPr id="13" name="Text 10"/>
+          <p:cNvSpPr txBox="1"/>
+          <p:nvPr/>
+        </p:nvSpPr>
+        <p:spPr>
+          <a:xfrm>
+            <a:off x="7406640" y="3867912"/>
+            <a:ext cx="3749040" cy="502920"/>
+          </a:xfrm>
+          <a:prstGeom prst="rect">
+            <a:avLst/>
+          </a:prstGeom>
+          <a:noFill/>
+          <a:ln/>
+        </p:spPr>
+        <p:txBody>
+          <a:bodyPr wrap="square" rtlCol="0" anchor="ctr"/>
+          <a:lstStyle/>
+          <a:p>
+            <a:pPr indent="0" marL="0">
+              <a:buNone/>
+            </a:pPr>
+            <a:r>
+              <a:rPr lang="en-US" sz="2200" b="1" dirty="0">
+                <a:solidFill>
+                  <a:srgbClr val="D6832F"/>
+                </a:solidFill>
+                <a:latin typeface="Cambria" pitchFamily="34" charset="0"/>
+                <a:ea typeface="Cambria" pitchFamily="34" charset="-122"/>
+                <a:cs typeface="Cambria" pitchFamily="34" charset="-120"/>
+              </a:rPr>
+              <a:t>② Name-Feld</a:t>
+            </a:r>
+            <a:endParaRPr lang="en-US" sz="2200" dirty="0"/>
+          </a:p>
+        </p:txBody>
+      </p:sp>
+      <p:sp>
+        <p:nvSpPr>
+          <p:cNvPr id="14" name="Text 11"/>
+          <p:cNvSpPr txBox="1"/>
+          <p:nvPr/>
+        </p:nvSpPr>
+        <p:spPr>
+          <a:xfrm>
+            <a:off x="7406640" y="4480560"/>
+            <a:ext cx="3749040" cy="1371600"/>
+          </a:xfrm>
+          <a:prstGeom prst="rect">
+            <a:avLst/>
+          </a:prstGeom>
+          <a:noFill/>
+          <a:ln/>
+        </p:spPr>
+        <p:txBody>
+          <a:bodyPr wrap="square" rtlCol="0" anchor="t"/>
+          <a:lstStyle/>
+          <a:p>
+            <a:pPr indent="0" marL="0">
+              <a:lnSpc>
+                <a:spcPct val="105000"/>
+              </a:lnSpc>
+              <a:buNone/>
+            </a:pPr>
+            <a:r>
+              <a:rPr lang="en-US" sz="1650" dirty="0">
+                <a:solidFill>
+                  <a:srgbClr val="33413F"/>
+                </a:solidFill>
+                <a:latin typeface="Calibri" pitchFamily="34" charset="0"/>
+                <a:ea typeface="Calibri" pitchFamily="34" charset="-122"/>
+                <a:cs typeface="Calibri" pitchFamily="34" charset="-120"/>
+              </a:rPr>
+              <a:t>Die fette Zeile darunter: „Patricia Ulmann I mehr verdienen als Networkerin“. Das ist dein Suchbegriff — Instagram durchsucht GENAU dieses Feld. Hier gehört dein Thema rein, nicht nur dein Name.</a:t>
+            </a:r>
+            <a:endParaRPr lang="en-US" sz="1650" dirty="0"/>
+          </a:p>
+        </p:txBody>
+      </p:sp>
+    </p:spTree>
+  </p:cSld>
+  <p:clrMapOvr>
+    <a:masterClrMapping/>
+  </p:clrMapOvr>
+</p:sld>
+</file>
+
+<file path=ppt/slides/slide12.xml><?xml version="1.0" encoding="utf-8"?>
+<p:sld xmlns:a="http://schemas.openxmlformats.org/drawingml/2006/main" xmlns:r="http://schemas.openxmlformats.org/officeDocument/2006/relationships" xmlns:p="http://schemas.openxmlformats.org/presentationml/2006/main">
+  <p:cSld name="Slide 12">
+    <p:bg>
+      <p:bgPr>
+        <a:solidFill>
           <a:srgbClr val="1E3A4C"/>
         </a:solidFill>
       </p:bgPr>
@@ -4651,181 +5210,6 @@
               <a:t>Profilbild ändern: helles Bild, Gesicht gross genug (klein wie ein Daumennagel)</a:t>
             </a:r>
             <a:endParaRPr lang="en-US" sz="1650" dirty="0"/>
-          </a:p>
-        </p:txBody>
-      </p:sp>
-    </p:spTree>
-  </p:cSld>
-  <p:clrMapOvr>
-    <a:masterClrMapping/>
-  </p:clrMapOvr>
-</p:sld>
-</file>
-
-<file path=ppt/slides/slide12.xml><?xml version="1.0" encoding="utf-8"?>
-<p:sld xmlns:a="http://schemas.openxmlformats.org/drawingml/2006/main" xmlns:r="http://schemas.openxmlformats.org/officeDocument/2006/relationships" xmlns:p="http://schemas.openxmlformats.org/presentationml/2006/main">
-  <p:cSld name="Slide 12">
-    <p:bg>
-      <p:bgPr>
-        <a:solidFill>
-          <a:srgbClr val="FFFFFF"/>
-        </a:solidFill>
-      </p:bgPr>
-    </p:bg>
-    <p:spTree>
-      <p:nvGrpSpPr>
-        <p:cNvPr id="1" name=""/>
-        <p:cNvGrpSpPr/>
-        <p:nvPr/>
-      </p:nvGrpSpPr>
-      <p:grpSpPr>
-        <a:xfrm>
-          <a:off x="0" y="0"/>
-          <a:ext cx="0" cy="0"/>
-          <a:chOff x="0" y="0"/>
-          <a:chExt cx="0" cy="0"/>
-        </a:xfrm>
-      </p:grpSpPr>
-      <p:sp>
-        <p:nvSpPr>
-          <p:cNvPr id="2" name="Shape 0"/>
-          <p:cNvSpPr/>
-          <p:nvPr/>
-        </p:nvSpPr>
-        <p:spPr>
-          <a:xfrm>
-            <a:off x="685800" y="1371600"/>
-            <a:ext cx="10789920" cy="3931920"/>
-          </a:xfrm>
-          <a:prstGeom prst="roundRect">
-            <a:avLst>
-              <a:gd name="adj" fmla="val 2791"/>
-            </a:avLst>
-          </a:prstGeom>
-          <a:solidFill>
-            <a:srgbClr val="EAF1F0"/>
-          </a:solidFill>
-          <a:ln/>
-        </p:spPr>
-      </p:sp>
-      <p:sp>
-        <p:nvSpPr>
-          <p:cNvPr id="3" name="Text 1"/>
-          <p:cNvSpPr txBox="1"/>
-          <p:nvPr/>
-        </p:nvSpPr>
-        <p:spPr>
-          <a:xfrm>
-            <a:off x="1234440" y="1828800"/>
-            <a:ext cx="9692640" cy="457200"/>
-          </a:xfrm>
-          <a:prstGeom prst="rect">
-            <a:avLst/>
-          </a:prstGeom>
-          <a:noFill/>
-          <a:ln/>
-        </p:spPr>
-        <p:txBody>
-          <a:bodyPr wrap="square" rtlCol="0" anchor="ctr"/>
-          <a:lstStyle/>
-          <a:p>
-            <a:pPr indent="0" marL="0">
-              <a:buNone/>
-            </a:pPr>
-            <a:r>
-              <a:rPr lang="en-US" sz="1700" b="1" spc="300" kern="0" dirty="0">
-                <a:solidFill>
-                  <a:srgbClr val="D6832F"/>
-                </a:solidFill>
-                <a:latin typeface="Calibri" pitchFamily="34" charset="0"/>
-                <a:ea typeface="Calibri" pitchFamily="34" charset="-122"/>
-                <a:cs typeface="Calibri" pitchFamily="34" charset="-120"/>
-              </a:rPr>
-              <a:t>DEINE AUFGABE</a:t>
-            </a:r>
-            <a:endParaRPr lang="en-US" sz="1700" dirty="0"/>
-          </a:p>
-        </p:txBody>
-      </p:sp>
-      <p:sp>
-        <p:nvSpPr>
-          <p:cNvPr id="4" name="Text 2"/>
-          <p:cNvSpPr txBox="1"/>
-          <p:nvPr/>
-        </p:nvSpPr>
-        <p:spPr>
-          <a:xfrm>
-            <a:off x="1234440" y="2377440"/>
-            <a:ext cx="9692640" cy="1645920"/>
-          </a:xfrm>
-          <a:prstGeom prst="rect">
-            <a:avLst/>
-          </a:prstGeom>
-          <a:noFill/>
-          <a:ln/>
-        </p:spPr>
-        <p:txBody>
-          <a:bodyPr wrap="square" rtlCol="0" anchor="t"/>
-          <a:lstStyle/>
-          <a:p>
-            <a:pPr indent="0" marL="0">
-              <a:buNone/>
-            </a:pPr>
-            <a:r>
-              <a:rPr lang="en-US" sz="2600" b="1" dirty="0">
-                <a:solidFill>
-                  <a:srgbClr val="1E3A4C"/>
-                </a:solidFill>
-                <a:latin typeface="Cambria" pitchFamily="34" charset="0"/>
-                <a:ea typeface="Cambria" pitchFamily="34" charset="-122"/>
-                <a:cs typeface="Cambria" pitchFamily="34" charset="-120"/>
-              </a:rPr>
-              <a:t>Trag beides ein — Name-Feld und Username.</a:t>
-            </a:r>
-            <a:endParaRPr lang="en-US" sz="2600" dirty="0"/>
-          </a:p>
-        </p:txBody>
-      </p:sp>
-      <p:sp>
-        <p:nvSpPr>
-          <p:cNvPr id="5" name="Text 3"/>
-          <p:cNvSpPr txBox="1"/>
-          <p:nvPr/>
-        </p:nvSpPr>
-        <p:spPr>
-          <a:xfrm>
-            <a:off x="1234440" y="4434840"/>
-            <a:ext cx="4206240" cy="384048"/>
-          </a:xfrm>
-          <a:prstGeom prst="roundRect">
-            <a:avLst>
-              <a:gd name="adj" fmla="val 21429"/>
-            </a:avLst>
-          </a:prstGeom>
-          <a:solidFill>
-            <a:srgbClr val="D6832F"/>
-          </a:solidFill>
-          <a:ln/>
-        </p:spPr>
-        <p:txBody>
-          <a:bodyPr wrap="square" lIns="0" tIns="0" rIns="0" bIns="0" rtlCol="0" anchor="ctr"/>
-          <a:lstStyle/>
-          <a:p>
-            <a:pPr algn="ctr" indent="0" marL="0">
-              <a:buNone/>
-            </a:pPr>
-            <a:r>
-              <a:rPr lang="en-US" sz="1200" b="1" spc="200" kern="0" dirty="0">
-                <a:solidFill>
-                  <a:srgbClr val="FFFFFF"/>
-                </a:solidFill>
-                <a:latin typeface="Calibri" pitchFamily="34" charset="0"/>
-                <a:ea typeface="Calibri" pitchFamily="34" charset="-122"/>
-                <a:cs typeface="Calibri" pitchFamily="34" charset="-120"/>
-              </a:rPr>
-              <a:t>WERKSTATT · Station „Namensfelder“</a:t>
-            </a:r>
-            <a:endParaRPr lang="en-US" sz="1200" dirty="0"/>
           </a:p>
         </p:txBody>
       </p:sp>
@@ -4863,14 +5247,36 @@
       </p:grpSpPr>
       <p:sp>
         <p:nvSpPr>
-          <p:cNvPr id="2" name="Text 0"/>
-          <p:cNvSpPr txBox="1"/>
-          <p:nvPr/>
-        </p:nvSpPr>
-        <p:spPr>
-          <a:xfrm>
-            <a:off x="685800" y="2468880"/>
-            <a:ext cx="10789920" cy="457200"/>
+          <p:cNvPr id="2" name="Shape 0"/>
+          <p:cNvSpPr/>
+          <p:nvPr/>
+        </p:nvSpPr>
+        <p:spPr>
+          <a:xfrm>
+            <a:off x="685800" y="1371600"/>
+            <a:ext cx="10789920" cy="3931920"/>
+          </a:xfrm>
+          <a:prstGeom prst="roundRect">
+            <a:avLst>
+              <a:gd name="adj" fmla="val 2791"/>
+            </a:avLst>
+          </a:prstGeom>
+          <a:solidFill>
+            <a:srgbClr val="EAF1F0"/>
+          </a:solidFill>
+          <a:ln/>
+        </p:spPr>
+      </p:sp>
+      <p:sp>
+        <p:nvSpPr>
+          <p:cNvPr id="3" name="Text 1"/>
+          <p:cNvSpPr txBox="1"/>
+          <p:nvPr/>
+        </p:nvSpPr>
+        <p:spPr>
+          <a:xfrm>
+            <a:off x="1234440" y="1828800"/>
+            <a:ext cx="9692640" cy="457200"/>
           </a:xfrm>
           <a:prstGeom prst="rect">
             <a:avLst/>
@@ -4886,30 +5292,30 @@
               <a:buNone/>
             </a:pPr>
             <a:r>
-              <a:rPr lang="en-US" sz="1600" b="1" spc="300" kern="0" dirty="0">
-                <a:solidFill>
-                  <a:srgbClr val="2F6F6F"/>
+              <a:rPr lang="en-US" sz="1700" b="1" spc="300" kern="0" dirty="0">
+                <a:solidFill>
+                  <a:srgbClr val="D6832F"/>
                 </a:solidFill>
                 <a:latin typeface="Calibri" pitchFamily="34" charset="0"/>
                 <a:ea typeface="Calibri" pitchFamily="34" charset="-122"/>
                 <a:cs typeface="Calibri" pitchFamily="34" charset="-120"/>
               </a:rPr>
-              <a:t>ALS NÄCHSTES</a:t>
-            </a:r>
-            <a:endParaRPr lang="en-US" sz="1600" dirty="0"/>
-          </a:p>
-        </p:txBody>
-      </p:sp>
-      <p:sp>
-        <p:nvSpPr>
-          <p:cNvPr id="3" name="Text 1"/>
-          <p:cNvSpPr txBox="1"/>
-          <p:nvPr/>
-        </p:nvSpPr>
-        <p:spPr>
-          <a:xfrm>
-            <a:off x="685800" y="2971800"/>
-            <a:ext cx="10789920" cy="1463040"/>
+              <a:t>DEINE AUFGABE</a:t>
+            </a:r>
+            <a:endParaRPr lang="en-US" sz="1700" dirty="0"/>
+          </a:p>
+        </p:txBody>
+      </p:sp>
+      <p:sp>
+        <p:nvSpPr>
+          <p:cNvPr id="4" name="Text 2"/>
+          <p:cNvSpPr txBox="1"/>
+          <p:nvPr/>
+        </p:nvSpPr>
+        <p:spPr>
+          <a:xfrm>
+            <a:off x="1234440" y="2377440"/>
+            <a:ext cx="9692640" cy="1645920"/>
           </a:xfrm>
           <a:prstGeom prst="rect">
             <a:avLst/>
@@ -4925,7 +5331,7 @@
               <a:buNone/>
             </a:pPr>
             <a:r>
-              <a:rPr lang="en-US" sz="3000" b="1" dirty="0">
+              <a:rPr lang="en-US" sz="2600" b="1" dirty="0">
                 <a:solidFill>
                   <a:srgbClr val="1E3A4C"/>
                 </a:solidFill>
@@ -4933,9 +5339,52 @@
                 <a:ea typeface="Cambria" pitchFamily="34" charset="-122"/>
                 <a:cs typeface="Cambria" pitchFamily="34" charset="-120"/>
               </a:rPr>
-              <a:t>Jetzt kommt der Teil, vor dem sich alle drücken: die Bio.</a:t>
-            </a:r>
-            <a:endParaRPr lang="en-US" sz="3000" dirty="0"/>
+              <a:t>Trag beides ein — Name-Feld und Username.</a:t>
+            </a:r>
+            <a:endParaRPr lang="en-US" sz="2600" dirty="0"/>
+          </a:p>
+        </p:txBody>
+      </p:sp>
+      <p:sp>
+        <p:nvSpPr>
+          <p:cNvPr id="5" name="Text 3"/>
+          <p:cNvSpPr txBox="1"/>
+          <p:nvPr/>
+        </p:nvSpPr>
+        <p:spPr>
+          <a:xfrm>
+            <a:off x="1234440" y="4434840"/>
+            <a:ext cx="4206240" cy="384048"/>
+          </a:xfrm>
+          <a:prstGeom prst="roundRect">
+            <a:avLst>
+              <a:gd name="adj" fmla="val 21429"/>
+            </a:avLst>
+          </a:prstGeom>
+          <a:solidFill>
+            <a:srgbClr val="D6832F"/>
+          </a:solidFill>
+          <a:ln/>
+        </p:spPr>
+        <p:txBody>
+          <a:bodyPr wrap="square" lIns="0" tIns="0" rIns="0" bIns="0" rtlCol="0" anchor="ctr"/>
+          <a:lstStyle/>
+          <a:p>
+            <a:pPr algn="ctr" indent="0" marL="0">
+              <a:buNone/>
+            </a:pPr>
+            <a:r>
+              <a:rPr lang="en-US" sz="1200" b="1" spc="200" kern="0" dirty="0">
+                <a:solidFill>
+                  <a:srgbClr val="FFFFFF"/>
+                </a:solidFill>
+                <a:latin typeface="Calibri" pitchFamily="34" charset="0"/>
+                <a:ea typeface="Calibri" pitchFamily="34" charset="-122"/>
+                <a:cs typeface="Calibri" pitchFamily="34" charset="-120"/>
+              </a:rPr>
+              <a:t>WERKSTATT · Station „Namensfelder“</a:t>
+            </a:r>
+            <a:endParaRPr lang="en-US" sz="1200" dirty="0"/>
           </a:p>
         </p:txBody>
       </p:sp>
@@ -4979,116 +5428,73 @@
         </p:nvSpPr>
         <p:spPr>
           <a:xfrm>
-            <a:off x="8412480" y="365760"/>
-            <a:ext cx="3291840" cy="2926080"/>
-          </a:xfrm>
-          <a:prstGeom prst="rect">
-            <a:avLst/>
-          </a:prstGeom>
-          <a:noFill/>
-          <a:ln/>
-        </p:spPr>
-        <p:txBody>
-          <a:bodyPr wrap="square" lIns="0" tIns="0" rIns="0" bIns="0" rtlCol="0" anchor="t"/>
-          <a:lstStyle/>
-          <a:p>
-            <a:pPr algn="r" indent="0" marL="0">
-              <a:buNone/>
-            </a:pPr>
-            <a:r>
-              <a:rPr lang="en-US" sz="20000" b="1" dirty="0">
-                <a:solidFill>
-                  <a:srgbClr val="EAF1F0"/>
+            <a:off x="685800" y="2468880"/>
+            <a:ext cx="10789920" cy="457200"/>
+          </a:xfrm>
+          <a:prstGeom prst="rect">
+            <a:avLst/>
+          </a:prstGeom>
+          <a:noFill/>
+          <a:ln/>
+        </p:spPr>
+        <p:txBody>
+          <a:bodyPr wrap="square" rtlCol="0" anchor="ctr"/>
+          <a:lstStyle/>
+          <a:p>
+            <a:pPr indent="0" marL="0">
+              <a:buNone/>
+            </a:pPr>
+            <a:r>
+              <a:rPr lang="en-US" sz="1600" b="1" spc="300" kern="0" dirty="0">
+                <a:solidFill>
+                  <a:srgbClr val="2F6F6F"/>
+                </a:solidFill>
+                <a:latin typeface="Calibri" pitchFamily="34" charset="0"/>
+                <a:ea typeface="Calibri" pitchFamily="34" charset="-122"/>
+                <a:cs typeface="Calibri" pitchFamily="34" charset="-120"/>
+              </a:rPr>
+              <a:t>ALS NÄCHSTES</a:t>
+            </a:r>
+            <a:endParaRPr lang="en-US" sz="1600" dirty="0"/>
+          </a:p>
+        </p:txBody>
+      </p:sp>
+      <p:sp>
+        <p:nvSpPr>
+          <p:cNvPr id="3" name="Text 1"/>
+          <p:cNvSpPr txBox="1"/>
+          <p:nvPr/>
+        </p:nvSpPr>
+        <p:spPr>
+          <a:xfrm>
+            <a:off x="685800" y="2971800"/>
+            <a:ext cx="10789920" cy="1463040"/>
+          </a:xfrm>
+          <a:prstGeom prst="rect">
+            <a:avLst/>
+          </a:prstGeom>
+          <a:noFill/>
+          <a:ln/>
+        </p:spPr>
+        <p:txBody>
+          <a:bodyPr wrap="square" rtlCol="0" anchor="t"/>
+          <a:lstStyle/>
+          <a:p>
+            <a:pPr indent="0" marL="0">
+              <a:buNone/>
+            </a:pPr>
+            <a:r>
+              <a:rPr lang="en-US" sz="3000" b="1" dirty="0">
+                <a:solidFill>
+                  <a:srgbClr val="1E3A4C"/>
                 </a:solidFill>
                 <a:latin typeface="Cambria" pitchFamily="34" charset="0"/>
                 <a:ea typeface="Cambria" pitchFamily="34" charset="-122"/>
                 <a:cs typeface="Cambria" pitchFamily="34" charset="-120"/>
               </a:rPr>
-              <a:t>1.3</a:t>
-            </a:r>
-            <a:endParaRPr lang="en-US" sz="20000" dirty="0"/>
-          </a:p>
-        </p:txBody>
-      </p:sp>
-      <p:sp>
-        <p:nvSpPr>
-          <p:cNvPr id="3" name="Text 1"/>
-          <p:cNvSpPr txBox="1"/>
-          <p:nvPr/>
-        </p:nvSpPr>
-        <p:spPr>
-          <a:xfrm>
-            <a:off x="685800" y="777240"/>
-            <a:ext cx="1920240" cy="384048"/>
-          </a:xfrm>
-          <a:prstGeom prst="roundRect">
-            <a:avLst>
-              <a:gd name="adj" fmla="val 21429"/>
-            </a:avLst>
-          </a:prstGeom>
-          <a:solidFill>
-            <a:srgbClr val="2F6F6F"/>
-          </a:solidFill>
-          <a:ln/>
-        </p:spPr>
-        <p:txBody>
-          <a:bodyPr wrap="square" lIns="0" tIns="0" rIns="0" bIns="0" rtlCol="0" anchor="ctr"/>
-          <a:lstStyle/>
-          <a:p>
-            <a:pPr algn="ctr" indent="0" marL="0">
-              <a:buNone/>
-            </a:pPr>
-            <a:r>
-              <a:rPr lang="en-US" sz="1200" b="1" spc="200" kern="0" dirty="0">
-                <a:solidFill>
-                  <a:srgbClr val="FFFFFF"/>
-                </a:solidFill>
-                <a:latin typeface="Calibri" pitchFamily="34" charset="0"/>
-                <a:ea typeface="Calibri" pitchFamily="34" charset="-122"/>
-                <a:cs typeface="Calibri" pitchFamily="34" charset="-120"/>
-              </a:rPr>
-              <a:t>LEKTION 1.3</a:t>
-            </a:r>
-            <a:endParaRPr lang="en-US" sz="1200" dirty="0"/>
-          </a:p>
-        </p:txBody>
-      </p:sp>
-      <p:sp>
-        <p:nvSpPr>
-          <p:cNvPr id="4" name="Text 2"/>
-          <p:cNvSpPr txBox="1"/>
-          <p:nvPr/>
-        </p:nvSpPr>
-        <p:spPr>
-          <a:xfrm>
-            <a:off x="685800" y="1554480"/>
-            <a:ext cx="7863840" cy="2377440"/>
-          </a:xfrm>
-          <a:prstGeom prst="rect">
-            <a:avLst/>
-          </a:prstGeom>
-          <a:noFill/>
-          <a:ln/>
-        </p:spPr>
-        <p:txBody>
-          <a:bodyPr wrap="square" rtlCol="0" anchor="t"/>
-          <a:lstStyle/>
-          <a:p>
-            <a:pPr indent="0" marL="0">
-              <a:buNone/>
-            </a:pPr>
-            <a:r>
-              <a:rPr lang="en-US" sz="3800" b="1" dirty="0">
-                <a:solidFill>
-                  <a:srgbClr val="1E3A4C"/>
-                </a:solidFill>
-                <a:latin typeface="Cambria" pitchFamily="34" charset="0"/>
-                <a:ea typeface="Cambria" pitchFamily="34" charset="-122"/>
-                <a:cs typeface="Cambria" pitchFamily="34" charset="-120"/>
-              </a:rPr>
-              <a:t>Vier Zeilen, die in zwei bis drei Sekunden entscheiden, ob jemand bleibt</a:t>
-            </a:r>
-            <a:endParaRPr lang="en-US" sz="3800" dirty="0"/>
+              <a:t>Jetzt kommt der Teil, vor dem sich alle drücken: die Bio.</a:t>
+            </a:r>
+            <a:endParaRPr lang="en-US" sz="3000" dirty="0"/>
           </a:p>
         </p:txBody>
       </p:sp>
@@ -5132,56 +5538,79 @@
         </p:nvSpPr>
         <p:spPr>
           <a:xfrm>
-            <a:off x="685800" y="685800"/>
-            <a:ext cx="10789920" cy="457200"/>
-          </a:xfrm>
-          <a:prstGeom prst="rect">
-            <a:avLst/>
-          </a:prstGeom>
-          <a:noFill/>
-          <a:ln/>
-        </p:spPr>
-        <p:txBody>
-          <a:bodyPr wrap="square" rtlCol="0" anchor="ctr"/>
-          <a:lstStyle/>
-          <a:p>
-            <a:pPr indent="0" marL="0">
-              <a:buNone/>
-            </a:pPr>
-            <a:r>
-              <a:rPr lang="en-US" sz="1600" b="1" spc="300" kern="0" dirty="0">
-                <a:solidFill>
-                  <a:srgbClr val="2F6F6F"/>
+            <a:off x="8412480" y="365760"/>
+            <a:ext cx="3291840" cy="2926080"/>
+          </a:xfrm>
+          <a:prstGeom prst="rect">
+            <a:avLst/>
+          </a:prstGeom>
+          <a:noFill/>
+          <a:ln/>
+        </p:spPr>
+        <p:txBody>
+          <a:bodyPr wrap="square" lIns="0" tIns="0" rIns="0" bIns="0" rtlCol="0" anchor="t"/>
+          <a:lstStyle/>
+          <a:p>
+            <a:pPr algn="r" indent="0" marL="0">
+              <a:buNone/>
+            </a:pPr>
+            <a:r>
+              <a:rPr lang="en-US" sz="20000" b="1" dirty="0">
+                <a:solidFill>
+                  <a:srgbClr val="EAF1F0"/>
+                </a:solidFill>
+                <a:latin typeface="Cambria" pitchFamily="34" charset="0"/>
+                <a:ea typeface="Cambria" pitchFamily="34" charset="-122"/>
+                <a:cs typeface="Cambria" pitchFamily="34" charset="-120"/>
+              </a:rPr>
+              <a:t>1.3</a:t>
+            </a:r>
+            <a:endParaRPr lang="en-US" sz="20000" dirty="0"/>
+          </a:p>
+        </p:txBody>
+      </p:sp>
+      <p:sp>
+        <p:nvSpPr>
+          <p:cNvPr id="3" name="Text 1"/>
+          <p:cNvSpPr txBox="1"/>
+          <p:nvPr/>
+        </p:nvSpPr>
+        <p:spPr>
+          <a:xfrm>
+            <a:off x="685800" y="777240"/>
+            <a:ext cx="1920240" cy="384048"/>
+          </a:xfrm>
+          <a:prstGeom prst="roundRect">
+            <a:avLst>
+              <a:gd name="adj" fmla="val 21429"/>
+            </a:avLst>
+          </a:prstGeom>
+          <a:solidFill>
+            <a:srgbClr val="2F6F6F"/>
+          </a:solidFill>
+          <a:ln/>
+        </p:spPr>
+        <p:txBody>
+          <a:bodyPr wrap="square" lIns="0" tIns="0" rIns="0" bIns="0" rtlCol="0" anchor="ctr"/>
+          <a:lstStyle/>
+          <a:p>
+            <a:pPr algn="ctr" indent="0" marL="0">
+              <a:buNone/>
+            </a:pPr>
+            <a:r>
+              <a:rPr lang="en-US" sz="1200" b="1" spc="200" kern="0" dirty="0">
+                <a:solidFill>
+                  <a:srgbClr val="FFFFFF"/>
                 </a:solidFill>
                 <a:latin typeface="Calibri" pitchFamily="34" charset="0"/>
                 <a:ea typeface="Calibri" pitchFamily="34" charset="-122"/>
                 <a:cs typeface="Calibri" pitchFamily="34" charset="-120"/>
               </a:rPr>
-              <a:t>WAS DU LERNEN WIRST</a:t>
-            </a:r>
-            <a:endParaRPr lang="en-US" sz="1600" dirty="0"/>
-          </a:p>
-        </p:txBody>
-      </p:sp>
-      <p:sp>
-        <p:nvSpPr>
-          <p:cNvPr id="3" name="Shape 1"/>
-          <p:cNvSpPr/>
-          <p:nvPr/>
-        </p:nvSpPr>
-        <p:spPr>
-          <a:xfrm>
-            <a:off x="685800" y="1828800"/>
-            <a:ext cx="566928" cy="566928"/>
-          </a:xfrm>
-          <a:prstGeom prst="ellipse">
-            <a:avLst/>
-          </a:prstGeom>
-          <a:solidFill>
-            <a:srgbClr val="D6832F"/>
-          </a:solidFill>
-          <a:ln/>
-        </p:spPr>
+              <a:t>LEKTION 1.3</a:t>
+            </a:r>
+            <a:endParaRPr lang="en-US" sz="1200" dirty="0"/>
+          </a:p>
+        </p:txBody>
       </p:sp>
       <p:sp>
         <p:nvSpPr>
@@ -5191,269 +5620,34 @@
         </p:nvSpPr>
         <p:spPr>
           <a:xfrm>
-            <a:off x="685800" y="1828800"/>
-            <a:ext cx="566928" cy="566928"/>
-          </a:xfrm>
-          <a:prstGeom prst="rect">
-            <a:avLst/>
-          </a:prstGeom>
-          <a:noFill/>
-          <a:ln/>
-        </p:spPr>
-        <p:txBody>
-          <a:bodyPr wrap="square" lIns="0" tIns="0" rIns="0" bIns="0" rtlCol="0" anchor="ctr"/>
-          <a:lstStyle/>
-          <a:p>
-            <a:pPr algn="ctr" indent="0" marL="0">
-              <a:buNone/>
-            </a:pPr>
-            <a:r>
-              <a:rPr lang="en-US" sz="2200" b="1" dirty="0">
-                <a:solidFill>
-                  <a:srgbClr val="FFFFFF"/>
+            <a:off x="685800" y="1554480"/>
+            <a:ext cx="7863840" cy="2377440"/>
+          </a:xfrm>
+          <a:prstGeom prst="rect">
+            <a:avLst/>
+          </a:prstGeom>
+          <a:noFill/>
+          <a:ln/>
+        </p:spPr>
+        <p:txBody>
+          <a:bodyPr wrap="square" rtlCol="0" anchor="t"/>
+          <a:lstStyle/>
+          <a:p>
+            <a:pPr indent="0" marL="0">
+              <a:buNone/>
+            </a:pPr>
+            <a:r>
+              <a:rPr lang="en-US" sz="3800" b="1" dirty="0">
+                <a:solidFill>
+                  <a:srgbClr val="1E3A4C"/>
                 </a:solidFill>
                 <a:latin typeface="Cambria" pitchFamily="34" charset="0"/>
                 <a:ea typeface="Cambria" pitchFamily="34" charset="-122"/>
                 <a:cs typeface="Cambria" pitchFamily="34" charset="-120"/>
               </a:rPr>
-              <a:t>1</a:t>
-            </a:r>
-            <a:endParaRPr lang="en-US" sz="2200" dirty="0"/>
-          </a:p>
-        </p:txBody>
-      </p:sp>
-      <p:sp>
-        <p:nvSpPr>
-          <p:cNvPr id="5" name="Text 3"/>
-          <p:cNvSpPr txBox="1"/>
-          <p:nvPr/>
-        </p:nvSpPr>
-        <p:spPr>
-          <a:xfrm>
-            <a:off x="1554480" y="1783080"/>
-            <a:ext cx="9784080" cy="822960"/>
-          </a:xfrm>
-          <a:prstGeom prst="rect">
-            <a:avLst/>
-          </a:prstGeom>
-          <a:noFill/>
-          <a:ln/>
-        </p:spPr>
-        <p:txBody>
-          <a:bodyPr wrap="square" rtlCol="0" anchor="ctr"/>
-          <a:lstStyle/>
-          <a:p>
-            <a:pPr indent="0" marL="0">
-              <a:buNone/>
-            </a:pPr>
-            <a:r>
-              <a:rPr lang="en-US" sz="2000" dirty="0">
-                <a:solidFill>
-                  <a:srgbClr val="33413F"/>
-                </a:solidFill>
-                <a:latin typeface="Calibri" pitchFamily="34" charset="0"/>
-                <a:ea typeface="Calibri" pitchFamily="34" charset="-122"/>
-                <a:cs typeface="Calibri" pitchFamily="34" charset="-120"/>
-              </a:rPr>
-              <a:t>Die vier Zeilen und was in jede gehört</a:t>
-            </a:r>
-            <a:endParaRPr lang="en-US" sz="2000" dirty="0"/>
-          </a:p>
-        </p:txBody>
-      </p:sp>
-      <p:sp>
-        <p:nvSpPr>
-          <p:cNvPr id="6" name="Shape 4"/>
-          <p:cNvSpPr/>
-          <p:nvPr/>
-        </p:nvSpPr>
-        <p:spPr>
-          <a:xfrm>
-            <a:off x="685800" y="2971800"/>
-            <a:ext cx="566928" cy="566928"/>
-          </a:xfrm>
-          <a:prstGeom prst="ellipse">
-            <a:avLst/>
-          </a:prstGeom>
-          <a:solidFill>
-            <a:srgbClr val="D6832F"/>
-          </a:solidFill>
-          <a:ln/>
-        </p:spPr>
-      </p:sp>
-      <p:sp>
-        <p:nvSpPr>
-          <p:cNvPr id="7" name="Text 5"/>
-          <p:cNvSpPr txBox="1"/>
-          <p:nvPr/>
-        </p:nvSpPr>
-        <p:spPr>
-          <a:xfrm>
-            <a:off x="685800" y="2971800"/>
-            <a:ext cx="566928" cy="566928"/>
-          </a:xfrm>
-          <a:prstGeom prst="rect">
-            <a:avLst/>
-          </a:prstGeom>
-          <a:noFill/>
-          <a:ln/>
-        </p:spPr>
-        <p:txBody>
-          <a:bodyPr wrap="square" lIns="0" tIns="0" rIns="0" bIns="0" rtlCol="0" anchor="ctr"/>
-          <a:lstStyle/>
-          <a:p>
-            <a:pPr algn="ctr" indent="0" marL="0">
-              <a:buNone/>
-            </a:pPr>
-            <a:r>
-              <a:rPr lang="en-US" sz="2200" b="1" dirty="0">
-                <a:solidFill>
-                  <a:srgbClr val="FFFFFF"/>
-                </a:solidFill>
-                <a:latin typeface="Cambria" pitchFamily="34" charset="0"/>
-                <a:ea typeface="Cambria" pitchFamily="34" charset="-122"/>
-                <a:cs typeface="Cambria" pitchFamily="34" charset="-120"/>
-              </a:rPr>
-              <a:t>2</a:t>
-            </a:r>
-            <a:endParaRPr lang="en-US" sz="2200" dirty="0"/>
-          </a:p>
-        </p:txBody>
-      </p:sp>
-      <p:sp>
-        <p:nvSpPr>
-          <p:cNvPr id="8" name="Text 6"/>
-          <p:cNvSpPr txBox="1"/>
-          <p:nvPr/>
-        </p:nvSpPr>
-        <p:spPr>
-          <a:xfrm>
-            <a:off x="1554480" y="2926080"/>
-            <a:ext cx="9784080" cy="822960"/>
-          </a:xfrm>
-          <a:prstGeom prst="rect">
-            <a:avLst/>
-          </a:prstGeom>
-          <a:noFill/>
-          <a:ln/>
-        </p:spPr>
-        <p:txBody>
-          <a:bodyPr wrap="square" rtlCol="0" anchor="ctr"/>
-          <a:lstStyle/>
-          <a:p>
-            <a:pPr indent="0" marL="0">
-              <a:buNone/>
-            </a:pPr>
-            <a:r>
-              <a:rPr lang="en-US" sz="2000" dirty="0">
-                <a:solidFill>
-                  <a:srgbClr val="33413F"/>
-                </a:solidFill>
-                <a:latin typeface="Calibri" pitchFamily="34" charset="0"/>
-                <a:ea typeface="Calibri" pitchFamily="34" charset="-122"/>
-                <a:cs typeface="Calibri" pitchFamily="34" charset="-120"/>
-              </a:rPr>
-              <a:t>Wie du einen Zeilenumbruch hinbekommst, der auf dem Handy funktioniert</a:t>
-            </a:r>
-            <a:endParaRPr lang="en-US" sz="2000" dirty="0"/>
-          </a:p>
-        </p:txBody>
-      </p:sp>
-      <p:sp>
-        <p:nvSpPr>
-          <p:cNvPr id="9" name="Shape 7"/>
-          <p:cNvSpPr/>
-          <p:nvPr/>
-        </p:nvSpPr>
-        <p:spPr>
-          <a:xfrm>
-            <a:off x="685800" y="4114800"/>
-            <a:ext cx="566928" cy="566928"/>
-          </a:xfrm>
-          <a:prstGeom prst="ellipse">
-            <a:avLst/>
-          </a:prstGeom>
-          <a:solidFill>
-            <a:srgbClr val="D6832F"/>
-          </a:solidFill>
-          <a:ln/>
-        </p:spPr>
-      </p:sp>
-      <p:sp>
-        <p:nvSpPr>
-          <p:cNvPr id="10" name="Text 8"/>
-          <p:cNvSpPr txBox="1"/>
-          <p:nvPr/>
-        </p:nvSpPr>
-        <p:spPr>
-          <a:xfrm>
-            <a:off x="685800" y="4114800"/>
-            <a:ext cx="566928" cy="566928"/>
-          </a:xfrm>
-          <a:prstGeom prst="rect">
-            <a:avLst/>
-          </a:prstGeom>
-          <a:noFill/>
-          <a:ln/>
-        </p:spPr>
-        <p:txBody>
-          <a:bodyPr wrap="square" lIns="0" tIns="0" rIns="0" bIns="0" rtlCol="0" anchor="ctr"/>
-          <a:lstStyle/>
-          <a:p>
-            <a:pPr algn="ctr" indent="0" marL="0">
-              <a:buNone/>
-            </a:pPr>
-            <a:r>
-              <a:rPr lang="en-US" sz="2200" b="1" dirty="0">
-                <a:solidFill>
-                  <a:srgbClr val="FFFFFF"/>
-                </a:solidFill>
-                <a:latin typeface="Cambria" pitchFamily="34" charset="0"/>
-                <a:ea typeface="Cambria" pitchFamily="34" charset="-122"/>
-                <a:cs typeface="Cambria" pitchFamily="34" charset="-120"/>
-              </a:rPr>
-              <a:t>3</a:t>
-            </a:r>
-            <a:endParaRPr lang="en-US" sz="2200" dirty="0"/>
-          </a:p>
-        </p:txBody>
-      </p:sp>
-      <p:sp>
-        <p:nvSpPr>
-          <p:cNvPr id="11" name="Text 9"/>
-          <p:cNvSpPr txBox="1"/>
-          <p:nvPr/>
-        </p:nvSpPr>
-        <p:spPr>
-          <a:xfrm>
-            <a:off x="1554480" y="4069080"/>
-            <a:ext cx="9784080" cy="822960"/>
-          </a:xfrm>
-          <a:prstGeom prst="rect">
-            <a:avLst/>
-          </a:prstGeom>
-          <a:noFill/>
-          <a:ln/>
-        </p:spPr>
-        <p:txBody>
-          <a:bodyPr wrap="square" rtlCol="0" anchor="ctr"/>
-          <a:lstStyle/>
-          <a:p>
-            <a:pPr indent="0" marL="0">
-              <a:buNone/>
-            </a:pPr>
-            <a:r>
-              <a:rPr lang="en-US" sz="2000" dirty="0">
-                <a:solidFill>
-                  <a:srgbClr val="33413F"/>
-                </a:solidFill>
-                <a:latin typeface="Calibri" pitchFamily="34" charset="0"/>
-                <a:ea typeface="Calibri" pitchFamily="34" charset="-122"/>
-                <a:cs typeface="Calibri" pitchFamily="34" charset="-120"/>
-              </a:rPr>
-              <a:t>Dein Platzhalter-Satz für heute</a:t>
-            </a:r>
-            <a:endParaRPr lang="en-US" sz="2000" dirty="0"/>
+              <a:t>Vier Zeilen, die in zwei bis drei Sekunden entscheiden, ob jemand bleibt</a:t>
+            </a:r>
+            <a:endParaRPr lang="en-US" sz="3800" dirty="0"/>
           </a:p>
         </p:txBody>
       </p:sp>
@@ -5522,7 +5716,7 @@
                 <a:ea typeface="Calibri" pitchFamily="34" charset="-122"/>
                 <a:cs typeface="Calibri" pitchFamily="34" charset="-120"/>
               </a:rPr>
-              <a:t>DIE VIER ZEILEN</a:t>
+              <a:t>WAS DU LERNEN WIRST</a:t>
             </a:r>
             <a:endParaRPr lang="en-US" sz="1600" dirty="0"/>
           </a:p>
@@ -5536,14 +5730,14 @@
         </p:nvSpPr>
         <p:spPr>
           <a:xfrm>
-            <a:off x="685800" y="1737360"/>
-            <a:ext cx="502920" cy="502920"/>
+            <a:off x="685800" y="1828800"/>
+            <a:ext cx="566928" cy="566928"/>
           </a:xfrm>
           <a:prstGeom prst="ellipse">
             <a:avLst/>
           </a:prstGeom>
           <a:solidFill>
-            <a:srgbClr val="2F6F6F"/>
+            <a:srgbClr val="D6832F"/>
           </a:solidFill>
           <a:ln/>
         </p:spPr>
@@ -5556,8 +5750,8 @@
         </p:nvSpPr>
         <p:spPr>
           <a:xfrm>
-            <a:off x="685800" y="1737360"/>
-            <a:ext cx="502920" cy="502920"/>
+            <a:off x="685800" y="1828800"/>
+            <a:ext cx="566928" cy="566928"/>
           </a:xfrm>
           <a:prstGeom prst="rect">
             <a:avLst/>
@@ -5573,7 +5767,7 @@
               <a:buNone/>
             </a:pPr>
             <a:r>
-              <a:rPr lang="en-US" sz="2000" b="1" dirty="0">
+              <a:rPr lang="en-US" sz="2200" b="1" dirty="0">
                 <a:solidFill>
                   <a:srgbClr val="FFFFFF"/>
                 </a:solidFill>
@@ -5583,7 +5777,7 @@
               </a:rPr>
               <a:t>1</a:t>
             </a:r>
-            <a:endParaRPr lang="en-US" sz="2000" dirty="0"/>
+            <a:endParaRPr lang="en-US" sz="2200" dirty="0"/>
           </a:p>
         </p:txBody>
       </p:sp>
@@ -5595,8 +5789,8 @@
         </p:nvSpPr>
         <p:spPr>
           <a:xfrm>
-            <a:off x="1508760" y="1691640"/>
-            <a:ext cx="9966960" cy="777240"/>
+            <a:off x="1554480" y="1783080"/>
+            <a:ext cx="9784080" cy="822960"/>
           </a:xfrm>
           <a:prstGeom prst="rect">
             <a:avLst/>
@@ -5612,7 +5806,7 @@
               <a:buNone/>
             </a:pPr>
             <a:r>
-              <a:rPr lang="en-US" sz="1900" dirty="0">
+              <a:rPr lang="en-US" sz="2000" dirty="0">
                 <a:solidFill>
                   <a:srgbClr val="33413F"/>
                 </a:solidFill>
@@ -5620,9 +5814,9 @@
                 <a:ea typeface="Calibri" pitchFamily="34" charset="-122"/>
                 <a:cs typeface="Calibri" pitchFamily="34" charset="-120"/>
               </a:rPr>
-              <a:t>Wem hilfst du wobei?</a:t>
-            </a:r>
-            <a:endParaRPr lang="en-US" sz="1900" dirty="0"/>
+              <a:t>Die vier Zeilen und was in jede gehört</a:t>
+            </a:r>
+            <a:endParaRPr lang="en-US" sz="2000" dirty="0"/>
           </a:p>
         </p:txBody>
       </p:sp>
@@ -5634,14 +5828,14 @@
         </p:nvSpPr>
         <p:spPr>
           <a:xfrm>
-            <a:off x="685800" y="2651760"/>
-            <a:ext cx="502920" cy="502920"/>
+            <a:off x="685800" y="2971800"/>
+            <a:ext cx="566928" cy="566928"/>
           </a:xfrm>
           <a:prstGeom prst="ellipse">
             <a:avLst/>
           </a:prstGeom>
           <a:solidFill>
-            <a:srgbClr val="2F6F6F"/>
+            <a:srgbClr val="D6832F"/>
           </a:solidFill>
           <a:ln/>
         </p:spPr>
@@ -5654,8 +5848,8 @@
         </p:nvSpPr>
         <p:spPr>
           <a:xfrm>
-            <a:off x="685800" y="2651760"/>
-            <a:ext cx="502920" cy="502920"/>
+            <a:off x="685800" y="2971800"/>
+            <a:ext cx="566928" cy="566928"/>
           </a:xfrm>
           <a:prstGeom prst="rect">
             <a:avLst/>
@@ -5671,7 +5865,7 @@
               <a:buNone/>
             </a:pPr>
             <a:r>
-              <a:rPr lang="en-US" sz="2000" b="1" dirty="0">
+              <a:rPr lang="en-US" sz="2200" b="1" dirty="0">
                 <a:solidFill>
                   <a:srgbClr val="FFFFFF"/>
                 </a:solidFill>
@@ -5681,7 +5875,7 @@
               </a:rPr>
               <a:t>2</a:t>
             </a:r>
-            <a:endParaRPr lang="en-US" sz="2000" dirty="0"/>
+            <a:endParaRPr lang="en-US" sz="2200" dirty="0"/>
           </a:p>
         </p:txBody>
       </p:sp>
@@ -5693,8 +5887,8 @@
         </p:nvSpPr>
         <p:spPr>
           <a:xfrm>
-            <a:off x="1508760" y="2606040"/>
-            <a:ext cx="9966960" cy="777240"/>
+            <a:off x="1554480" y="2926080"/>
+            <a:ext cx="9784080" cy="822960"/>
           </a:xfrm>
           <a:prstGeom prst="rect">
             <a:avLst/>
@@ -5710,7 +5904,7 @@
               <a:buNone/>
             </a:pPr>
             <a:r>
-              <a:rPr lang="en-US" sz="1900" dirty="0">
+              <a:rPr lang="en-US" sz="2000" dirty="0">
                 <a:solidFill>
                   <a:srgbClr val="33413F"/>
                 </a:solidFill>
@@ -5718,9 +5912,9 @@
                 <a:ea typeface="Calibri" pitchFamily="34" charset="-122"/>
                 <a:cs typeface="Calibri" pitchFamily="34" charset="-120"/>
               </a:rPr>
-              <a:t>Warum ausgerechnet du? (deine Erfahrung, eine Zahl, dein Leben)</a:t>
-            </a:r>
-            <a:endParaRPr lang="en-US" sz="1900" dirty="0"/>
+              <a:t>Wie du einen Zeilenumbruch hinbekommst, der auf dem Handy funktioniert</a:t>
+            </a:r>
+            <a:endParaRPr lang="en-US" sz="2000" dirty="0"/>
           </a:p>
         </p:txBody>
       </p:sp>
@@ -5732,14 +5926,14 @@
         </p:nvSpPr>
         <p:spPr>
           <a:xfrm>
-            <a:off x="685800" y="3566160"/>
-            <a:ext cx="502920" cy="502920"/>
+            <a:off x="685800" y="4114800"/>
+            <a:ext cx="566928" cy="566928"/>
           </a:xfrm>
           <a:prstGeom prst="ellipse">
             <a:avLst/>
           </a:prstGeom>
           <a:solidFill>
-            <a:srgbClr val="2F6F6F"/>
+            <a:srgbClr val="D6832F"/>
           </a:solidFill>
           <a:ln/>
         </p:spPr>
@@ -5752,8 +5946,8 @@
         </p:nvSpPr>
         <p:spPr>
           <a:xfrm>
-            <a:off x="685800" y="3566160"/>
-            <a:ext cx="502920" cy="502920"/>
+            <a:off x="685800" y="4114800"/>
+            <a:ext cx="566928" cy="566928"/>
           </a:xfrm>
           <a:prstGeom prst="rect">
             <a:avLst/>
@@ -5769,7 +5963,7 @@
               <a:buNone/>
             </a:pPr>
             <a:r>
-              <a:rPr lang="en-US" sz="2000" b="1" dirty="0">
+              <a:rPr lang="en-US" sz="2200" b="1" dirty="0">
                 <a:solidFill>
                   <a:srgbClr val="FFFFFF"/>
                 </a:solidFill>
@@ -5779,7 +5973,7 @@
               </a:rPr>
               <a:t>3</a:t>
             </a:r>
-            <a:endParaRPr lang="en-US" sz="2000" dirty="0"/>
+            <a:endParaRPr lang="en-US" sz="2200" dirty="0"/>
           </a:p>
         </p:txBody>
       </p:sp>
@@ -5791,8 +5985,8 @@
         </p:nvSpPr>
         <p:spPr>
           <a:xfrm>
-            <a:off x="1508760" y="3520440"/>
-            <a:ext cx="9966960" cy="777240"/>
+            <a:off x="1554480" y="4069080"/>
+            <a:ext cx="9784080" cy="822960"/>
           </a:xfrm>
           <a:prstGeom prst="rect">
             <a:avLst/>
@@ -5808,7 +6002,7 @@
               <a:buNone/>
             </a:pPr>
             <a:r>
-              <a:rPr lang="en-US" sz="1900" dirty="0">
+              <a:rPr lang="en-US" sz="2000" dirty="0">
                 <a:solidFill>
                   <a:srgbClr val="33413F"/>
                 </a:solidFill>
@@ -5816,107 +6010,9 @@
                 <a:ea typeface="Calibri" pitchFamily="34" charset="-122"/>
                 <a:cs typeface="Calibri" pitchFamily="34" charset="-120"/>
               </a:rPr>
-              <a:t>Was gibt es hier zu holen?</a:t>
-            </a:r>
-            <a:endParaRPr lang="en-US" sz="1900" dirty="0"/>
-          </a:p>
-        </p:txBody>
-      </p:sp>
-      <p:sp>
-        <p:nvSpPr>
-          <p:cNvPr id="12" name="Shape 10"/>
-          <p:cNvSpPr/>
-          <p:nvPr/>
-        </p:nvSpPr>
-        <p:spPr>
-          <a:xfrm>
-            <a:off x="685800" y="4480560"/>
-            <a:ext cx="502920" cy="502920"/>
-          </a:xfrm>
-          <a:prstGeom prst="ellipse">
-            <a:avLst/>
-          </a:prstGeom>
-          <a:solidFill>
-            <a:srgbClr val="2F6F6F"/>
-          </a:solidFill>
-          <a:ln/>
-        </p:spPr>
-      </p:sp>
-      <p:sp>
-        <p:nvSpPr>
-          <p:cNvPr id="13" name="Text 11"/>
-          <p:cNvSpPr txBox="1"/>
-          <p:nvPr/>
-        </p:nvSpPr>
-        <p:spPr>
-          <a:xfrm>
-            <a:off x="685800" y="4480560"/>
-            <a:ext cx="502920" cy="502920"/>
-          </a:xfrm>
-          <a:prstGeom prst="rect">
-            <a:avLst/>
-          </a:prstGeom>
-          <a:noFill/>
-          <a:ln/>
-        </p:spPr>
-        <p:txBody>
-          <a:bodyPr wrap="square" lIns="0" tIns="0" rIns="0" bIns="0" rtlCol="0" anchor="ctr"/>
-          <a:lstStyle/>
-          <a:p>
-            <a:pPr algn="ctr" indent="0" marL="0">
-              <a:buNone/>
-            </a:pPr>
-            <a:r>
-              <a:rPr lang="en-US" sz="2000" b="1" dirty="0">
-                <a:solidFill>
-                  <a:srgbClr val="FFFFFF"/>
-                </a:solidFill>
-                <a:latin typeface="Cambria" pitchFamily="34" charset="0"/>
-                <a:ea typeface="Cambria" pitchFamily="34" charset="-122"/>
-                <a:cs typeface="Cambria" pitchFamily="34" charset="-120"/>
-              </a:rPr>
-              <a:t>4</a:t>
+              <a:t>Dein Platzhalter-Satz für heute</a:t>
             </a:r>
             <a:endParaRPr lang="en-US" sz="2000" dirty="0"/>
-          </a:p>
-        </p:txBody>
-      </p:sp>
-      <p:sp>
-        <p:nvSpPr>
-          <p:cNvPr id="14" name="Text 12"/>
-          <p:cNvSpPr txBox="1"/>
-          <p:nvPr/>
-        </p:nvSpPr>
-        <p:spPr>
-          <a:xfrm>
-            <a:off x="1508760" y="4434840"/>
-            <a:ext cx="9966960" cy="777240"/>
-          </a:xfrm>
-          <a:prstGeom prst="rect">
-            <a:avLst/>
-          </a:prstGeom>
-          <a:noFill/>
-          <a:ln/>
-        </p:spPr>
-        <p:txBody>
-          <a:bodyPr wrap="square" rtlCol="0" anchor="ctr"/>
-          <a:lstStyle/>
-          <a:p>
-            <a:pPr indent="0" marL="0">
-              <a:buNone/>
-            </a:pPr>
-            <a:r>
-              <a:rPr lang="en-US" sz="1900" dirty="0">
-                <a:solidFill>
-                  <a:srgbClr val="33413F"/>
-                </a:solidFill>
-                <a:latin typeface="Calibri" pitchFamily="34" charset="0"/>
-                <a:ea typeface="Calibri" pitchFamily="34" charset="-122"/>
-                <a:cs typeface="Calibri" pitchFamily="34" charset="-120"/>
-              </a:rPr>
-              <a:t>Was soll sie jetzt tun? (ein Pfeil nach unten auf den Link)</a:t>
-            </a:r>
-            <a:endParaRPr lang="en-US" sz="1900" dirty="0"/>
           </a:p>
         </p:txBody>
       </p:sp>
@@ -5960,7 +6056,7 @@
         </p:nvSpPr>
         <p:spPr>
           <a:xfrm>
-            <a:off x="685800" y="777240"/>
+            <a:off x="685800" y="685800"/>
             <a:ext cx="10789920" cy="457200"/>
           </a:xfrm>
           <a:prstGeom prst="rect">
@@ -5985,7 +6081,7 @@
                 <a:ea typeface="Calibri" pitchFamily="34" charset="-122"/>
                 <a:cs typeface="Calibri" pitchFamily="34" charset="-120"/>
               </a:rPr>
-              <a:t>DEIN PLATZHALTER-SATZ</a:t>
+              <a:t>DIE VIER ZEILEN</a:t>
             </a:r>
             <a:endParaRPr lang="en-US" sz="1600" dirty="0"/>
           </a:p>
@@ -5993,62 +6089,82 @@
       </p:sp>
       <p:sp>
         <p:nvSpPr>
-          <p:cNvPr id="3" name="Text 1"/>
-          <p:cNvSpPr txBox="1"/>
-          <p:nvPr/>
-        </p:nvSpPr>
-        <p:spPr>
-          <a:xfrm>
-            <a:off x="685800" y="1920240"/>
-            <a:ext cx="10789920" cy="1828800"/>
-          </a:xfrm>
-          <a:prstGeom prst="rect">
-            <a:avLst/>
-          </a:prstGeom>
-          <a:noFill/>
-          <a:ln/>
-        </p:spPr>
-        <p:txBody>
-          <a:bodyPr wrap="square" rtlCol="0" anchor="t"/>
-          <a:lstStyle/>
-          <a:p>
-            <a:pPr indent="0" marL="0">
-              <a:buNone/>
-            </a:pPr>
-            <a:r>
-              <a:rPr lang="en-US" sz="3400" b="1" i="1" dirty="0">
-                <a:solidFill>
-                  <a:srgbClr val="1E3A4C"/>
+          <p:cNvPr id="3" name="Shape 1"/>
+          <p:cNvSpPr/>
+          <p:nvPr/>
+        </p:nvSpPr>
+        <p:spPr>
+          <a:xfrm>
+            <a:off x="685800" y="1737360"/>
+            <a:ext cx="502920" cy="502920"/>
+          </a:xfrm>
+          <a:prstGeom prst="ellipse">
+            <a:avLst/>
+          </a:prstGeom>
+          <a:solidFill>
+            <a:srgbClr val="2F6F6F"/>
+          </a:solidFill>
+          <a:ln/>
+        </p:spPr>
+      </p:sp>
+      <p:sp>
+        <p:nvSpPr>
+          <p:cNvPr id="4" name="Text 2"/>
+          <p:cNvSpPr txBox="1"/>
+          <p:nvPr/>
+        </p:nvSpPr>
+        <p:spPr>
+          <a:xfrm>
+            <a:off x="685800" y="1737360"/>
+            <a:ext cx="502920" cy="502920"/>
+          </a:xfrm>
+          <a:prstGeom prst="rect">
+            <a:avLst/>
+          </a:prstGeom>
+          <a:noFill/>
+          <a:ln/>
+        </p:spPr>
+        <p:txBody>
+          <a:bodyPr wrap="square" lIns="0" tIns="0" rIns="0" bIns="0" rtlCol="0" anchor="ctr"/>
+          <a:lstStyle/>
+          <a:p>
+            <a:pPr algn="ctr" indent="0" marL="0">
+              <a:buNone/>
+            </a:pPr>
+            <a:r>
+              <a:rPr lang="en-US" sz="2000" b="1" dirty="0">
+                <a:solidFill>
+                  <a:srgbClr val="FFFFFF"/>
                 </a:solidFill>
                 <a:latin typeface="Cambria" pitchFamily="34" charset="0"/>
                 <a:ea typeface="Cambria" pitchFamily="34" charset="-122"/>
                 <a:cs typeface="Cambria" pitchFamily="34" charset="-120"/>
               </a:rPr>
-              <a:t>„Ich helfe [wem] dabei, [was], damit [welches Gefühl].“</a:t>
-            </a:r>
-            <a:endParaRPr lang="en-US" sz="3400" dirty="0"/>
-          </a:p>
-        </p:txBody>
-      </p:sp>
-      <p:sp>
-        <p:nvSpPr>
-          <p:cNvPr id="4" name="Text 2"/>
-          <p:cNvSpPr txBox="1"/>
-          <p:nvPr/>
-        </p:nvSpPr>
-        <p:spPr>
-          <a:xfrm>
-            <a:off x="685800" y="4206240"/>
-            <a:ext cx="10789920" cy="1097280"/>
-          </a:xfrm>
-          <a:prstGeom prst="rect">
-            <a:avLst/>
-          </a:prstGeom>
-          <a:noFill/>
-          <a:ln/>
-        </p:spPr>
-        <p:txBody>
-          <a:bodyPr wrap="square" rtlCol="0" anchor="t"/>
+              <a:t>1</a:t>
+            </a:r>
+            <a:endParaRPr lang="en-US" sz="2000" dirty="0"/>
+          </a:p>
+        </p:txBody>
+      </p:sp>
+      <p:sp>
+        <p:nvSpPr>
+          <p:cNvPr id="5" name="Text 3"/>
+          <p:cNvSpPr txBox="1"/>
+          <p:nvPr/>
+        </p:nvSpPr>
+        <p:spPr>
+          <a:xfrm>
+            <a:off x="1508760" y="1691640"/>
+            <a:ext cx="9966960" cy="777240"/>
+          </a:xfrm>
+          <a:prstGeom prst="rect">
+            <a:avLst/>
+          </a:prstGeom>
+          <a:noFill/>
+          <a:ln/>
+        </p:spPr>
+        <p:txBody>
+          <a:bodyPr wrap="square" rtlCol="0" anchor="ctr"/>
           <a:lstStyle/>
           <a:p>
             <a:pPr indent="0" marL="0">
@@ -6063,7 +6179,301 @@
                 <a:ea typeface="Calibri" pitchFamily="34" charset="-122"/>
                 <a:cs typeface="Calibri" pitchFamily="34" charset="-120"/>
               </a:rPr>
-              <a:t>Nimm die Version, die dir in zehn Minuten einfällt. Sie wird sich ändern. Das ist so vorgesehen.</a:t>
+              <a:t>Wem hilfst du wobei?</a:t>
+            </a:r>
+            <a:endParaRPr lang="en-US" sz="1900" dirty="0"/>
+          </a:p>
+        </p:txBody>
+      </p:sp>
+      <p:sp>
+        <p:nvSpPr>
+          <p:cNvPr id="6" name="Shape 4"/>
+          <p:cNvSpPr/>
+          <p:nvPr/>
+        </p:nvSpPr>
+        <p:spPr>
+          <a:xfrm>
+            <a:off x="685800" y="2651760"/>
+            <a:ext cx="502920" cy="502920"/>
+          </a:xfrm>
+          <a:prstGeom prst="ellipse">
+            <a:avLst/>
+          </a:prstGeom>
+          <a:solidFill>
+            <a:srgbClr val="2F6F6F"/>
+          </a:solidFill>
+          <a:ln/>
+        </p:spPr>
+      </p:sp>
+      <p:sp>
+        <p:nvSpPr>
+          <p:cNvPr id="7" name="Text 5"/>
+          <p:cNvSpPr txBox="1"/>
+          <p:nvPr/>
+        </p:nvSpPr>
+        <p:spPr>
+          <a:xfrm>
+            <a:off x="685800" y="2651760"/>
+            <a:ext cx="502920" cy="502920"/>
+          </a:xfrm>
+          <a:prstGeom prst="rect">
+            <a:avLst/>
+          </a:prstGeom>
+          <a:noFill/>
+          <a:ln/>
+        </p:spPr>
+        <p:txBody>
+          <a:bodyPr wrap="square" lIns="0" tIns="0" rIns="0" bIns="0" rtlCol="0" anchor="ctr"/>
+          <a:lstStyle/>
+          <a:p>
+            <a:pPr algn="ctr" indent="0" marL="0">
+              <a:buNone/>
+            </a:pPr>
+            <a:r>
+              <a:rPr lang="en-US" sz="2000" b="1" dirty="0">
+                <a:solidFill>
+                  <a:srgbClr val="FFFFFF"/>
+                </a:solidFill>
+                <a:latin typeface="Cambria" pitchFamily="34" charset="0"/>
+                <a:ea typeface="Cambria" pitchFamily="34" charset="-122"/>
+                <a:cs typeface="Cambria" pitchFamily="34" charset="-120"/>
+              </a:rPr>
+              <a:t>2</a:t>
+            </a:r>
+            <a:endParaRPr lang="en-US" sz="2000" dirty="0"/>
+          </a:p>
+        </p:txBody>
+      </p:sp>
+      <p:sp>
+        <p:nvSpPr>
+          <p:cNvPr id="8" name="Text 6"/>
+          <p:cNvSpPr txBox="1"/>
+          <p:nvPr/>
+        </p:nvSpPr>
+        <p:spPr>
+          <a:xfrm>
+            <a:off x="1508760" y="2606040"/>
+            <a:ext cx="9966960" cy="777240"/>
+          </a:xfrm>
+          <a:prstGeom prst="rect">
+            <a:avLst/>
+          </a:prstGeom>
+          <a:noFill/>
+          <a:ln/>
+        </p:spPr>
+        <p:txBody>
+          <a:bodyPr wrap="square" rtlCol="0" anchor="ctr"/>
+          <a:lstStyle/>
+          <a:p>
+            <a:pPr indent="0" marL="0">
+              <a:buNone/>
+            </a:pPr>
+            <a:r>
+              <a:rPr lang="en-US" sz="1900" dirty="0">
+                <a:solidFill>
+                  <a:srgbClr val="33413F"/>
+                </a:solidFill>
+                <a:latin typeface="Calibri" pitchFamily="34" charset="0"/>
+                <a:ea typeface="Calibri" pitchFamily="34" charset="-122"/>
+                <a:cs typeface="Calibri" pitchFamily="34" charset="-120"/>
+              </a:rPr>
+              <a:t>Warum ausgerechnet du? (deine Erfahrung, eine Zahl, dein Leben)</a:t>
+            </a:r>
+            <a:endParaRPr lang="en-US" sz="1900" dirty="0"/>
+          </a:p>
+        </p:txBody>
+      </p:sp>
+      <p:sp>
+        <p:nvSpPr>
+          <p:cNvPr id="9" name="Shape 7"/>
+          <p:cNvSpPr/>
+          <p:nvPr/>
+        </p:nvSpPr>
+        <p:spPr>
+          <a:xfrm>
+            <a:off x="685800" y="3566160"/>
+            <a:ext cx="502920" cy="502920"/>
+          </a:xfrm>
+          <a:prstGeom prst="ellipse">
+            <a:avLst/>
+          </a:prstGeom>
+          <a:solidFill>
+            <a:srgbClr val="2F6F6F"/>
+          </a:solidFill>
+          <a:ln/>
+        </p:spPr>
+      </p:sp>
+      <p:sp>
+        <p:nvSpPr>
+          <p:cNvPr id="10" name="Text 8"/>
+          <p:cNvSpPr txBox="1"/>
+          <p:nvPr/>
+        </p:nvSpPr>
+        <p:spPr>
+          <a:xfrm>
+            <a:off x="685800" y="3566160"/>
+            <a:ext cx="502920" cy="502920"/>
+          </a:xfrm>
+          <a:prstGeom prst="rect">
+            <a:avLst/>
+          </a:prstGeom>
+          <a:noFill/>
+          <a:ln/>
+        </p:spPr>
+        <p:txBody>
+          <a:bodyPr wrap="square" lIns="0" tIns="0" rIns="0" bIns="0" rtlCol="0" anchor="ctr"/>
+          <a:lstStyle/>
+          <a:p>
+            <a:pPr algn="ctr" indent="0" marL="0">
+              <a:buNone/>
+            </a:pPr>
+            <a:r>
+              <a:rPr lang="en-US" sz="2000" b="1" dirty="0">
+                <a:solidFill>
+                  <a:srgbClr val="FFFFFF"/>
+                </a:solidFill>
+                <a:latin typeface="Cambria" pitchFamily="34" charset="0"/>
+                <a:ea typeface="Cambria" pitchFamily="34" charset="-122"/>
+                <a:cs typeface="Cambria" pitchFamily="34" charset="-120"/>
+              </a:rPr>
+              <a:t>3</a:t>
+            </a:r>
+            <a:endParaRPr lang="en-US" sz="2000" dirty="0"/>
+          </a:p>
+        </p:txBody>
+      </p:sp>
+      <p:sp>
+        <p:nvSpPr>
+          <p:cNvPr id="11" name="Text 9"/>
+          <p:cNvSpPr txBox="1"/>
+          <p:nvPr/>
+        </p:nvSpPr>
+        <p:spPr>
+          <a:xfrm>
+            <a:off x="1508760" y="3520440"/>
+            <a:ext cx="9966960" cy="777240"/>
+          </a:xfrm>
+          <a:prstGeom prst="rect">
+            <a:avLst/>
+          </a:prstGeom>
+          <a:noFill/>
+          <a:ln/>
+        </p:spPr>
+        <p:txBody>
+          <a:bodyPr wrap="square" rtlCol="0" anchor="ctr"/>
+          <a:lstStyle/>
+          <a:p>
+            <a:pPr indent="0" marL="0">
+              <a:buNone/>
+            </a:pPr>
+            <a:r>
+              <a:rPr lang="en-US" sz="1900" dirty="0">
+                <a:solidFill>
+                  <a:srgbClr val="33413F"/>
+                </a:solidFill>
+                <a:latin typeface="Calibri" pitchFamily="34" charset="0"/>
+                <a:ea typeface="Calibri" pitchFamily="34" charset="-122"/>
+                <a:cs typeface="Calibri" pitchFamily="34" charset="-120"/>
+              </a:rPr>
+              <a:t>Was gibt es hier zu holen?</a:t>
+            </a:r>
+            <a:endParaRPr lang="en-US" sz="1900" dirty="0"/>
+          </a:p>
+        </p:txBody>
+      </p:sp>
+      <p:sp>
+        <p:nvSpPr>
+          <p:cNvPr id="12" name="Shape 10"/>
+          <p:cNvSpPr/>
+          <p:nvPr/>
+        </p:nvSpPr>
+        <p:spPr>
+          <a:xfrm>
+            <a:off x="685800" y="4480560"/>
+            <a:ext cx="502920" cy="502920"/>
+          </a:xfrm>
+          <a:prstGeom prst="ellipse">
+            <a:avLst/>
+          </a:prstGeom>
+          <a:solidFill>
+            <a:srgbClr val="2F6F6F"/>
+          </a:solidFill>
+          <a:ln/>
+        </p:spPr>
+      </p:sp>
+      <p:sp>
+        <p:nvSpPr>
+          <p:cNvPr id="13" name="Text 11"/>
+          <p:cNvSpPr txBox="1"/>
+          <p:nvPr/>
+        </p:nvSpPr>
+        <p:spPr>
+          <a:xfrm>
+            <a:off x="685800" y="4480560"/>
+            <a:ext cx="502920" cy="502920"/>
+          </a:xfrm>
+          <a:prstGeom prst="rect">
+            <a:avLst/>
+          </a:prstGeom>
+          <a:noFill/>
+          <a:ln/>
+        </p:spPr>
+        <p:txBody>
+          <a:bodyPr wrap="square" lIns="0" tIns="0" rIns="0" bIns="0" rtlCol="0" anchor="ctr"/>
+          <a:lstStyle/>
+          <a:p>
+            <a:pPr algn="ctr" indent="0" marL="0">
+              <a:buNone/>
+            </a:pPr>
+            <a:r>
+              <a:rPr lang="en-US" sz="2000" b="1" dirty="0">
+                <a:solidFill>
+                  <a:srgbClr val="FFFFFF"/>
+                </a:solidFill>
+                <a:latin typeface="Cambria" pitchFamily="34" charset="0"/>
+                <a:ea typeface="Cambria" pitchFamily="34" charset="-122"/>
+                <a:cs typeface="Cambria" pitchFamily="34" charset="-120"/>
+              </a:rPr>
+              <a:t>4</a:t>
+            </a:r>
+            <a:endParaRPr lang="en-US" sz="2000" dirty="0"/>
+          </a:p>
+        </p:txBody>
+      </p:sp>
+      <p:sp>
+        <p:nvSpPr>
+          <p:cNvPr id="14" name="Text 12"/>
+          <p:cNvSpPr txBox="1"/>
+          <p:nvPr/>
+        </p:nvSpPr>
+        <p:spPr>
+          <a:xfrm>
+            <a:off x="1508760" y="4434840"/>
+            <a:ext cx="9966960" cy="777240"/>
+          </a:xfrm>
+          <a:prstGeom prst="rect">
+            <a:avLst/>
+          </a:prstGeom>
+          <a:noFill/>
+          <a:ln/>
+        </p:spPr>
+        <p:txBody>
+          <a:bodyPr wrap="square" rtlCol="0" anchor="ctr"/>
+          <a:lstStyle/>
+          <a:p>
+            <a:pPr indent="0" marL="0">
+              <a:buNone/>
+            </a:pPr>
+            <a:r>
+              <a:rPr lang="en-US" sz="1900" dirty="0">
+                <a:solidFill>
+                  <a:srgbClr val="33413F"/>
+                </a:solidFill>
+                <a:latin typeface="Calibri" pitchFamily="34" charset="0"/>
+                <a:ea typeface="Calibri" pitchFamily="34" charset="-122"/>
+                <a:cs typeface="Calibri" pitchFamily="34" charset="-120"/>
+              </a:rPr>
+              <a:t>Was soll sie jetzt tun? (ein Pfeil nach unten auf den Link)</a:t>
             </a:r>
             <a:endParaRPr lang="en-US" sz="1900" dirty="0"/>
           </a:p>
@@ -6080,6 +6490,155 @@
 <file path=ppt/slides/slide18.xml><?xml version="1.0" encoding="utf-8"?>
 <p:sld xmlns:a="http://schemas.openxmlformats.org/drawingml/2006/main" xmlns:r="http://schemas.openxmlformats.org/officeDocument/2006/relationships" xmlns:p="http://schemas.openxmlformats.org/presentationml/2006/main">
   <p:cSld name="Slide 18">
+    <p:bg>
+      <p:bgPr>
+        <a:solidFill>
+          <a:srgbClr val="FFFFFF"/>
+        </a:solidFill>
+      </p:bgPr>
+    </p:bg>
+    <p:spTree>
+      <p:nvGrpSpPr>
+        <p:cNvPr id="1" name=""/>
+        <p:cNvGrpSpPr/>
+        <p:nvPr/>
+      </p:nvGrpSpPr>
+      <p:grpSpPr>
+        <a:xfrm>
+          <a:off x="0" y="0"/>
+          <a:ext cx="0" cy="0"/>
+          <a:chOff x="0" y="0"/>
+          <a:chExt cx="0" cy="0"/>
+        </a:xfrm>
+      </p:grpSpPr>
+      <p:sp>
+        <p:nvSpPr>
+          <p:cNvPr id="2" name="Text 0"/>
+          <p:cNvSpPr txBox="1"/>
+          <p:nvPr/>
+        </p:nvSpPr>
+        <p:spPr>
+          <a:xfrm>
+            <a:off x="685800" y="777240"/>
+            <a:ext cx="10789920" cy="457200"/>
+          </a:xfrm>
+          <a:prstGeom prst="rect">
+            <a:avLst/>
+          </a:prstGeom>
+          <a:noFill/>
+          <a:ln/>
+        </p:spPr>
+        <p:txBody>
+          <a:bodyPr wrap="square" rtlCol="0" anchor="ctr"/>
+          <a:lstStyle/>
+          <a:p>
+            <a:pPr indent="0" marL="0">
+              <a:buNone/>
+            </a:pPr>
+            <a:r>
+              <a:rPr lang="en-US" sz="1600" b="1" spc="300" kern="0" dirty="0">
+                <a:solidFill>
+                  <a:srgbClr val="2F6F6F"/>
+                </a:solidFill>
+                <a:latin typeface="Calibri" pitchFamily="34" charset="0"/>
+                <a:ea typeface="Calibri" pitchFamily="34" charset="-122"/>
+                <a:cs typeface="Calibri" pitchFamily="34" charset="-120"/>
+              </a:rPr>
+              <a:t>DEIN PLATZHALTER-SATZ</a:t>
+            </a:r>
+            <a:endParaRPr lang="en-US" sz="1600" dirty="0"/>
+          </a:p>
+        </p:txBody>
+      </p:sp>
+      <p:sp>
+        <p:nvSpPr>
+          <p:cNvPr id="3" name="Text 1"/>
+          <p:cNvSpPr txBox="1"/>
+          <p:nvPr/>
+        </p:nvSpPr>
+        <p:spPr>
+          <a:xfrm>
+            <a:off x="685800" y="1920240"/>
+            <a:ext cx="10789920" cy="1828800"/>
+          </a:xfrm>
+          <a:prstGeom prst="rect">
+            <a:avLst/>
+          </a:prstGeom>
+          <a:noFill/>
+          <a:ln/>
+        </p:spPr>
+        <p:txBody>
+          <a:bodyPr wrap="square" rtlCol="0" anchor="t"/>
+          <a:lstStyle/>
+          <a:p>
+            <a:pPr indent="0" marL="0">
+              <a:buNone/>
+            </a:pPr>
+            <a:r>
+              <a:rPr lang="en-US" sz="3400" b="1" i="1" dirty="0">
+                <a:solidFill>
+                  <a:srgbClr val="1E3A4C"/>
+                </a:solidFill>
+                <a:latin typeface="Cambria" pitchFamily="34" charset="0"/>
+                <a:ea typeface="Cambria" pitchFamily="34" charset="-122"/>
+                <a:cs typeface="Cambria" pitchFamily="34" charset="-120"/>
+              </a:rPr>
+              <a:t>„Ich helfe [wem] dabei, [was], damit [welches Gefühl].“</a:t>
+            </a:r>
+            <a:endParaRPr lang="en-US" sz="3400" dirty="0"/>
+          </a:p>
+        </p:txBody>
+      </p:sp>
+      <p:sp>
+        <p:nvSpPr>
+          <p:cNvPr id="4" name="Text 2"/>
+          <p:cNvSpPr txBox="1"/>
+          <p:nvPr/>
+        </p:nvSpPr>
+        <p:spPr>
+          <a:xfrm>
+            <a:off x="685800" y="4206240"/>
+            <a:ext cx="10789920" cy="1097280"/>
+          </a:xfrm>
+          <a:prstGeom prst="rect">
+            <a:avLst/>
+          </a:prstGeom>
+          <a:noFill/>
+          <a:ln/>
+        </p:spPr>
+        <p:txBody>
+          <a:bodyPr wrap="square" rtlCol="0" anchor="t"/>
+          <a:lstStyle/>
+          <a:p>
+            <a:pPr indent="0" marL="0">
+              <a:buNone/>
+            </a:pPr>
+            <a:r>
+              <a:rPr lang="en-US" sz="1900" dirty="0">
+                <a:solidFill>
+                  <a:srgbClr val="33413F"/>
+                </a:solidFill>
+                <a:latin typeface="Calibri" pitchFamily="34" charset="0"/>
+                <a:ea typeface="Calibri" pitchFamily="34" charset="-122"/>
+                <a:cs typeface="Calibri" pitchFamily="34" charset="-120"/>
+              </a:rPr>
+              <a:t>Nimm die Version, die dir in zehn Minuten einfällt. Sie wird sich ändern. Das ist so vorgesehen.</a:t>
+            </a:r>
+            <a:endParaRPr lang="en-US" sz="1900" dirty="0"/>
+          </a:p>
+        </p:txBody>
+      </p:sp>
+    </p:spTree>
+  </p:cSld>
+  <p:clrMapOvr>
+    <a:masterClrMapping/>
+  </p:clrMapOvr>
+</p:sld>
+</file>
+
+<file path=ppt/slides/slide19.xml><?xml version="1.0" encoding="utf-8"?>
+<p:sld xmlns:a="http://schemas.openxmlformats.org/drawingml/2006/main" xmlns:r="http://schemas.openxmlformats.org/officeDocument/2006/relationships" xmlns:p="http://schemas.openxmlformats.org/presentationml/2006/main">
+  <p:cSld name="Slide 19">
     <p:bg>
       <p:bgPr>
         <a:solidFill>
@@ -6640,155 +7199,6 @@
               <a:t>Fertige Bio auf dem Profil anschauen</a:t>
             </a:r>
             <a:endParaRPr lang="en-US" sz="1650" dirty="0"/>
-          </a:p>
-        </p:txBody>
-      </p:sp>
-    </p:spTree>
-  </p:cSld>
-  <p:clrMapOvr>
-    <a:masterClrMapping/>
-  </p:clrMapOvr>
-</p:sld>
-</file>
-
-<file path=ppt/slides/slide19.xml><?xml version="1.0" encoding="utf-8"?>
-<p:sld xmlns:a="http://schemas.openxmlformats.org/drawingml/2006/main" xmlns:r="http://schemas.openxmlformats.org/officeDocument/2006/relationships" xmlns:p="http://schemas.openxmlformats.org/presentationml/2006/main">
-  <p:cSld name="Slide 19">
-    <p:bg>
-      <p:bgPr>
-        <a:solidFill>
-          <a:srgbClr val="FFFFFF"/>
-        </a:solidFill>
-      </p:bgPr>
-    </p:bg>
-    <p:spTree>
-      <p:nvGrpSpPr>
-        <p:cNvPr id="1" name=""/>
-        <p:cNvGrpSpPr/>
-        <p:nvPr/>
-      </p:nvGrpSpPr>
-      <p:grpSpPr>
-        <a:xfrm>
-          <a:off x="0" y="0"/>
-          <a:ext cx="0" cy="0"/>
-          <a:chOff x="0" y="0"/>
-          <a:chExt cx="0" cy="0"/>
-        </a:xfrm>
-      </p:grpSpPr>
-      <p:sp>
-        <p:nvSpPr>
-          <p:cNvPr id="2" name="Text 0"/>
-          <p:cNvSpPr txBox="1"/>
-          <p:nvPr/>
-        </p:nvSpPr>
-        <p:spPr>
-          <a:xfrm>
-            <a:off x="685800" y="685800"/>
-            <a:ext cx="10789920" cy="457200"/>
-          </a:xfrm>
-          <a:prstGeom prst="rect">
-            <a:avLst/>
-          </a:prstGeom>
-          <a:noFill/>
-          <a:ln/>
-        </p:spPr>
-        <p:txBody>
-          <a:bodyPr wrap="square" rtlCol="0" anchor="ctr"/>
-          <a:lstStyle/>
-          <a:p>
-            <a:pPr indent="0" marL="0">
-              <a:buNone/>
-            </a:pPr>
-            <a:r>
-              <a:rPr lang="en-US" sz="1600" b="1" spc="300" kern="0" dirty="0">
-                <a:solidFill>
-                  <a:srgbClr val="2F6F6F"/>
-                </a:solidFill>
-                <a:latin typeface="Calibri" pitchFamily="34" charset="0"/>
-                <a:ea typeface="Calibri" pitchFamily="34" charset="-122"/>
-                <a:cs typeface="Calibri" pitchFamily="34" charset="-120"/>
-              </a:rPr>
-              <a:t>DEIN BIO-CHECK</a:t>
-            </a:r>
-            <a:endParaRPr lang="en-US" sz="1600" dirty="0"/>
-          </a:p>
-        </p:txBody>
-      </p:sp>
-      <p:sp>
-        <p:nvSpPr>
-          <p:cNvPr id="3" name="Text 1"/>
-          <p:cNvSpPr txBox="1"/>
-          <p:nvPr/>
-        </p:nvSpPr>
-        <p:spPr>
-          <a:xfrm>
-            <a:off x="685800" y="1691640"/>
-            <a:ext cx="10789920" cy="777240"/>
-          </a:xfrm>
-          <a:prstGeom prst="rect">
-            <a:avLst/>
-          </a:prstGeom>
-          <a:noFill/>
-          <a:ln/>
-        </p:spPr>
-        <p:txBody>
-          <a:bodyPr wrap="square" rtlCol="0" anchor="ctr"/>
-          <a:lstStyle/>
-          <a:p>
-            <a:pPr indent="0" marL="0">
-              <a:buNone/>
-            </a:pPr>
-            <a:r>
-              <a:rPr lang="en-US" sz="1900" dirty="0">
-                <a:solidFill>
-                  <a:srgbClr val="33413F"/>
-                </a:solidFill>
-                <a:latin typeface="Calibri" pitchFamily="34" charset="0"/>
-                <a:ea typeface="Calibri" pitchFamily="34" charset="-122"/>
-                <a:cs typeface="Calibri" pitchFamily="34" charset="-120"/>
-              </a:rPr>
-              <a:t>Bio steht? Dann lass sie durch meinen Bio-Check laufen. Du bekommst zurück, was schon zieht und was noch schwammig ist.</a:t>
-            </a:r>
-            <a:endParaRPr lang="en-US" sz="1900" dirty="0"/>
-          </a:p>
-        </p:txBody>
-      </p:sp>
-      <p:sp>
-        <p:nvSpPr>
-          <p:cNvPr id="4" name="Text 2"/>
-          <p:cNvSpPr txBox="1"/>
-          <p:nvPr/>
-        </p:nvSpPr>
-        <p:spPr>
-          <a:xfrm>
-            <a:off x="685800" y="5852160"/>
-            <a:ext cx="10789920" cy="548640"/>
-          </a:xfrm>
-          <a:prstGeom prst="rect">
-            <a:avLst/>
-          </a:prstGeom>
-          <a:noFill/>
-          <a:ln/>
-        </p:spPr>
-        <p:txBody>
-          <a:bodyPr wrap="square" rtlCol="0" anchor="ctr"/>
-          <a:lstStyle/>
-          <a:p>
-            <a:pPr indent="0" marL="0">
-              <a:buNone/>
-            </a:pPr>
-            <a:r>
-              <a:rPr lang="en-US" sz="1500" i="1" dirty="0">
-                <a:solidFill>
-                  <a:srgbClr val="7A8B88"/>
-                </a:solidFill>
-                <a:latin typeface="Calibri" pitchFamily="34" charset="0"/>
-                <a:ea typeface="Calibri" pitchFamily="34" charset="-122"/>
-                <a:cs typeface="Calibri" pitchFamily="34" charset="-120"/>
-              </a:rPr>
-              <a:t>Link im Kursbereich · auch in der Werkstatt bei Station „Bio“</a:t>
-            </a:r>
-            <a:endParaRPr lang="en-US" sz="1500" dirty="0"/>
           </a:p>
         </p:txBody>
       </p:sp>
@@ -7018,36 +7428,14 @@
       </p:grpSpPr>
       <p:sp>
         <p:nvSpPr>
-          <p:cNvPr id="2" name="Shape 0"/>
-          <p:cNvSpPr/>
-          <p:nvPr/>
-        </p:nvSpPr>
-        <p:spPr>
-          <a:xfrm>
-            <a:off x="685800" y="1371600"/>
-            <a:ext cx="10789920" cy="3931920"/>
-          </a:xfrm>
-          <a:prstGeom prst="roundRect">
-            <a:avLst>
-              <a:gd name="adj" fmla="val 2791"/>
-            </a:avLst>
-          </a:prstGeom>
-          <a:solidFill>
-            <a:srgbClr val="EAF1F0"/>
-          </a:solidFill>
-          <a:ln/>
-        </p:spPr>
-      </p:sp>
-      <p:sp>
-        <p:nvSpPr>
-          <p:cNvPr id="3" name="Text 1"/>
-          <p:cNvSpPr txBox="1"/>
-          <p:nvPr/>
-        </p:nvSpPr>
-        <p:spPr>
-          <a:xfrm>
-            <a:off x="1234440" y="1828800"/>
-            <a:ext cx="9692640" cy="457200"/>
+          <p:cNvPr id="2" name="Text 0"/>
+          <p:cNvSpPr txBox="1"/>
+          <p:nvPr/>
+        </p:nvSpPr>
+        <p:spPr>
+          <a:xfrm>
+            <a:off x="685800" y="685800"/>
+            <a:ext cx="10789920" cy="457200"/>
           </a:xfrm>
           <a:prstGeom prst="rect">
             <a:avLst/>
@@ -7063,99 +7451,95 @@
               <a:buNone/>
             </a:pPr>
             <a:r>
-              <a:rPr lang="en-US" sz="1700" b="1" spc="300" kern="0" dirty="0">
-                <a:solidFill>
-                  <a:srgbClr val="D6832F"/>
+              <a:rPr lang="en-US" sz="1600" b="1" spc="300" kern="0" dirty="0">
+                <a:solidFill>
+                  <a:srgbClr val="2F6F6F"/>
                 </a:solidFill>
                 <a:latin typeface="Calibri" pitchFamily="34" charset="0"/>
                 <a:ea typeface="Calibri" pitchFamily="34" charset="-122"/>
                 <a:cs typeface="Calibri" pitchFamily="34" charset="-120"/>
               </a:rPr>
-              <a:t>DEINE AUFGABE</a:t>
-            </a:r>
-            <a:endParaRPr lang="en-US" sz="1700" dirty="0"/>
-          </a:p>
-        </p:txBody>
-      </p:sp>
-      <p:sp>
-        <p:nvSpPr>
-          <p:cNvPr id="4" name="Text 2"/>
-          <p:cNvSpPr txBox="1"/>
-          <p:nvPr/>
-        </p:nvSpPr>
-        <p:spPr>
-          <a:xfrm>
-            <a:off x="1234440" y="2377440"/>
-            <a:ext cx="9692640" cy="1645920"/>
-          </a:xfrm>
-          <a:prstGeom prst="rect">
-            <a:avLst/>
-          </a:prstGeom>
-          <a:noFill/>
-          <a:ln/>
-        </p:spPr>
-        <p:txBody>
-          <a:bodyPr wrap="square" rtlCol="0" anchor="t"/>
+              <a:t>DEIN BIO-CHECK</a:t>
+            </a:r>
+            <a:endParaRPr lang="en-US" sz="1600" dirty="0"/>
+          </a:p>
+        </p:txBody>
+      </p:sp>
+      <p:sp>
+        <p:nvSpPr>
+          <p:cNvPr id="3" name="Text 1"/>
+          <p:cNvSpPr txBox="1"/>
+          <p:nvPr/>
+        </p:nvSpPr>
+        <p:spPr>
+          <a:xfrm>
+            <a:off x="685800" y="1691640"/>
+            <a:ext cx="10789920" cy="777240"/>
+          </a:xfrm>
+          <a:prstGeom prst="rect">
+            <a:avLst/>
+          </a:prstGeom>
+          <a:noFill/>
+          <a:ln/>
+        </p:spPr>
+        <p:txBody>
+          <a:bodyPr wrap="square" rtlCol="0" anchor="ctr"/>
           <a:lstStyle/>
           <a:p>
             <a:pPr indent="0" marL="0">
               <a:buNone/>
             </a:pPr>
             <a:r>
-              <a:rPr lang="en-US" sz="2600" b="1" dirty="0">
-                <a:solidFill>
-                  <a:srgbClr val="1E3A4C"/>
-                </a:solidFill>
-                <a:latin typeface="Cambria" pitchFamily="34" charset="0"/>
-                <a:ea typeface="Cambria" pitchFamily="34" charset="-122"/>
-                <a:cs typeface="Cambria" pitchFamily="34" charset="-120"/>
-              </a:rPr>
-              <a:t>Bio steht auf deinem Profil. Vorher durch die Werkstatt.</a:t>
-            </a:r>
-            <a:endParaRPr lang="en-US" sz="2600" dirty="0"/>
-          </a:p>
-        </p:txBody>
-      </p:sp>
-      <p:sp>
-        <p:nvSpPr>
-          <p:cNvPr id="5" name="Text 3"/>
-          <p:cNvSpPr txBox="1"/>
-          <p:nvPr/>
-        </p:nvSpPr>
-        <p:spPr>
-          <a:xfrm>
-            <a:off x="1234440" y="4434840"/>
-            <a:ext cx="4206240" cy="384048"/>
-          </a:xfrm>
-          <a:prstGeom prst="roundRect">
-            <a:avLst>
-              <a:gd name="adj" fmla="val 21429"/>
-            </a:avLst>
-          </a:prstGeom>
-          <a:solidFill>
-            <a:srgbClr val="D6832F"/>
-          </a:solidFill>
-          <a:ln/>
-        </p:spPr>
-        <p:txBody>
-          <a:bodyPr wrap="square" lIns="0" tIns="0" rIns="0" bIns="0" rtlCol="0" anchor="ctr"/>
-          <a:lstStyle/>
-          <a:p>
-            <a:pPr algn="ctr" indent="0" marL="0">
-              <a:buNone/>
-            </a:pPr>
-            <a:r>
-              <a:rPr lang="en-US" sz="1200" b="1" spc="200" kern="0" dirty="0">
-                <a:solidFill>
-                  <a:srgbClr val="FFFFFF"/>
+              <a:rPr lang="en-US" sz="1900" dirty="0">
+                <a:solidFill>
+                  <a:srgbClr val="33413F"/>
                 </a:solidFill>
                 <a:latin typeface="Calibri" pitchFamily="34" charset="0"/>
                 <a:ea typeface="Calibri" pitchFamily="34" charset="-122"/>
                 <a:cs typeface="Calibri" pitchFamily="34" charset="-120"/>
               </a:rPr>
-              <a:t>WERKSTATT · Station „Bio“</a:t>
-            </a:r>
-            <a:endParaRPr lang="en-US" sz="1200" dirty="0"/>
+              <a:t>Bio steht? Dann lass sie durch meinen Bio-Check laufen. Du bekommst zurück, was schon zieht und was noch schwammig ist.</a:t>
+            </a:r>
+            <a:endParaRPr lang="en-US" sz="1900" dirty="0"/>
+          </a:p>
+        </p:txBody>
+      </p:sp>
+      <p:sp>
+        <p:nvSpPr>
+          <p:cNvPr id="4" name="Text 2"/>
+          <p:cNvSpPr txBox="1"/>
+          <p:nvPr/>
+        </p:nvSpPr>
+        <p:spPr>
+          <a:xfrm>
+            <a:off x="685800" y="5852160"/>
+            <a:ext cx="10789920" cy="548640"/>
+          </a:xfrm>
+          <a:prstGeom prst="rect">
+            <a:avLst/>
+          </a:prstGeom>
+          <a:noFill/>
+          <a:ln/>
+        </p:spPr>
+        <p:txBody>
+          <a:bodyPr wrap="square" rtlCol="0" anchor="ctr"/>
+          <a:lstStyle/>
+          <a:p>
+            <a:pPr indent="0" marL="0">
+              <a:buNone/>
+            </a:pPr>
+            <a:r>
+              <a:rPr lang="en-US" sz="1500" i="1" dirty="0">
+                <a:solidFill>
+                  <a:srgbClr val="7A8B88"/>
+                </a:solidFill>
+                <a:latin typeface="Calibri" pitchFamily="34" charset="0"/>
+                <a:ea typeface="Calibri" pitchFamily="34" charset="-122"/>
+                <a:cs typeface="Calibri" pitchFamily="34" charset="-120"/>
+              </a:rPr>
+              <a:t>Link im Kursbereich · auch in der Werkstatt bei Station „Bio“</a:t>
+            </a:r>
+            <a:endParaRPr lang="en-US" sz="1500" dirty="0"/>
           </a:p>
         </p:txBody>
       </p:sp>
@@ -7193,14 +7577,36 @@
       </p:grpSpPr>
       <p:sp>
         <p:nvSpPr>
-          <p:cNvPr id="2" name="Text 0"/>
-          <p:cNvSpPr txBox="1"/>
-          <p:nvPr/>
-        </p:nvSpPr>
-        <p:spPr>
-          <a:xfrm>
-            <a:off x="685800" y="2468880"/>
-            <a:ext cx="10789920" cy="457200"/>
+          <p:cNvPr id="2" name="Shape 0"/>
+          <p:cNvSpPr/>
+          <p:nvPr/>
+        </p:nvSpPr>
+        <p:spPr>
+          <a:xfrm>
+            <a:off x="685800" y="1371600"/>
+            <a:ext cx="10789920" cy="3931920"/>
+          </a:xfrm>
+          <a:prstGeom prst="roundRect">
+            <a:avLst>
+              <a:gd name="adj" fmla="val 2791"/>
+            </a:avLst>
+          </a:prstGeom>
+          <a:solidFill>
+            <a:srgbClr val="EAF1F0"/>
+          </a:solidFill>
+          <a:ln/>
+        </p:spPr>
+      </p:sp>
+      <p:sp>
+        <p:nvSpPr>
+          <p:cNvPr id="3" name="Text 1"/>
+          <p:cNvSpPr txBox="1"/>
+          <p:nvPr/>
+        </p:nvSpPr>
+        <p:spPr>
+          <a:xfrm>
+            <a:off x="1234440" y="1828800"/>
+            <a:ext cx="9692640" cy="457200"/>
           </a:xfrm>
           <a:prstGeom prst="rect">
             <a:avLst/>
@@ -7216,30 +7622,30 @@
               <a:buNone/>
             </a:pPr>
             <a:r>
-              <a:rPr lang="en-US" sz="1600" b="1" spc="300" kern="0" dirty="0">
-                <a:solidFill>
-                  <a:srgbClr val="2F6F6F"/>
+              <a:rPr lang="en-US" sz="1700" b="1" spc="300" kern="0" dirty="0">
+                <a:solidFill>
+                  <a:srgbClr val="D6832F"/>
                 </a:solidFill>
                 <a:latin typeface="Calibri" pitchFamily="34" charset="0"/>
                 <a:ea typeface="Calibri" pitchFamily="34" charset="-122"/>
                 <a:cs typeface="Calibri" pitchFamily="34" charset="-120"/>
               </a:rPr>
-              <a:t>ALS NÄCHSTES</a:t>
-            </a:r>
-            <a:endParaRPr lang="en-US" sz="1600" dirty="0"/>
-          </a:p>
-        </p:txBody>
-      </p:sp>
-      <p:sp>
-        <p:nvSpPr>
-          <p:cNvPr id="3" name="Text 1"/>
-          <p:cNvSpPr txBox="1"/>
-          <p:nvPr/>
-        </p:nvSpPr>
-        <p:spPr>
-          <a:xfrm>
-            <a:off x="685800" y="2971800"/>
-            <a:ext cx="10789920" cy="1463040"/>
+              <a:t>DEINE AUFGABE</a:t>
+            </a:r>
+            <a:endParaRPr lang="en-US" sz="1700" dirty="0"/>
+          </a:p>
+        </p:txBody>
+      </p:sp>
+      <p:sp>
+        <p:nvSpPr>
+          <p:cNvPr id="4" name="Text 2"/>
+          <p:cNvSpPr txBox="1"/>
+          <p:nvPr/>
+        </p:nvSpPr>
+        <p:spPr>
+          <a:xfrm>
+            <a:off x="1234440" y="2377440"/>
+            <a:ext cx="9692640" cy="1645920"/>
           </a:xfrm>
           <a:prstGeom prst="rect">
             <a:avLst/>
@@ -7255,7 +7661,7 @@
               <a:buNone/>
             </a:pPr>
             <a:r>
-              <a:rPr lang="en-US" sz="3000" b="1" dirty="0">
+              <a:rPr lang="en-US" sz="2600" b="1" dirty="0">
                 <a:solidFill>
                   <a:srgbClr val="1E3A4C"/>
                 </a:solidFill>
@@ -7263,9 +7669,52 @@
                 <a:ea typeface="Cambria" pitchFamily="34" charset="-122"/>
                 <a:cs typeface="Cambria" pitchFamily="34" charset="-120"/>
               </a:rPr>
-              <a:t>Als Nächstes bauen wir dein Schaufenster: Highlights und dein Link.</a:t>
-            </a:r>
-            <a:endParaRPr lang="en-US" sz="3000" dirty="0"/>
+              <a:t>Bio steht auf deinem Profil. Vorher durch die Werkstatt.</a:t>
+            </a:r>
+            <a:endParaRPr lang="en-US" sz="2600" dirty="0"/>
+          </a:p>
+        </p:txBody>
+      </p:sp>
+      <p:sp>
+        <p:nvSpPr>
+          <p:cNvPr id="5" name="Text 3"/>
+          <p:cNvSpPr txBox="1"/>
+          <p:nvPr/>
+        </p:nvSpPr>
+        <p:spPr>
+          <a:xfrm>
+            <a:off x="1234440" y="4434840"/>
+            <a:ext cx="4206240" cy="384048"/>
+          </a:xfrm>
+          <a:prstGeom prst="roundRect">
+            <a:avLst>
+              <a:gd name="adj" fmla="val 21429"/>
+            </a:avLst>
+          </a:prstGeom>
+          <a:solidFill>
+            <a:srgbClr val="D6832F"/>
+          </a:solidFill>
+          <a:ln/>
+        </p:spPr>
+        <p:txBody>
+          <a:bodyPr wrap="square" lIns="0" tIns="0" rIns="0" bIns="0" rtlCol="0" anchor="ctr"/>
+          <a:lstStyle/>
+          <a:p>
+            <a:pPr algn="ctr" indent="0" marL="0">
+              <a:buNone/>
+            </a:pPr>
+            <a:r>
+              <a:rPr lang="en-US" sz="1200" b="1" spc="200" kern="0" dirty="0">
+                <a:solidFill>
+                  <a:srgbClr val="FFFFFF"/>
+                </a:solidFill>
+                <a:latin typeface="Calibri" pitchFamily="34" charset="0"/>
+                <a:ea typeface="Calibri" pitchFamily="34" charset="-122"/>
+                <a:cs typeface="Calibri" pitchFamily="34" charset="-120"/>
+              </a:rPr>
+              <a:t>WERKSTATT · Station „Bio“</a:t>
+            </a:r>
+            <a:endParaRPr lang="en-US" sz="1200" dirty="0"/>
           </a:p>
         </p:txBody>
       </p:sp>
@@ -7309,116 +7758,73 @@
         </p:nvSpPr>
         <p:spPr>
           <a:xfrm>
-            <a:off x="8412480" y="365760"/>
-            <a:ext cx="3291840" cy="2926080"/>
-          </a:xfrm>
-          <a:prstGeom prst="rect">
-            <a:avLst/>
-          </a:prstGeom>
-          <a:noFill/>
-          <a:ln/>
-        </p:spPr>
-        <p:txBody>
-          <a:bodyPr wrap="square" lIns="0" tIns="0" rIns="0" bIns="0" rtlCol="0" anchor="t"/>
-          <a:lstStyle/>
-          <a:p>
-            <a:pPr algn="r" indent="0" marL="0">
-              <a:buNone/>
-            </a:pPr>
-            <a:r>
-              <a:rPr lang="en-US" sz="20000" b="1" dirty="0">
-                <a:solidFill>
-                  <a:srgbClr val="EAF1F0"/>
+            <a:off x="685800" y="2468880"/>
+            <a:ext cx="10789920" cy="457200"/>
+          </a:xfrm>
+          <a:prstGeom prst="rect">
+            <a:avLst/>
+          </a:prstGeom>
+          <a:noFill/>
+          <a:ln/>
+        </p:spPr>
+        <p:txBody>
+          <a:bodyPr wrap="square" rtlCol="0" anchor="ctr"/>
+          <a:lstStyle/>
+          <a:p>
+            <a:pPr indent="0" marL="0">
+              <a:buNone/>
+            </a:pPr>
+            <a:r>
+              <a:rPr lang="en-US" sz="1600" b="1" spc="300" kern="0" dirty="0">
+                <a:solidFill>
+                  <a:srgbClr val="2F6F6F"/>
+                </a:solidFill>
+                <a:latin typeface="Calibri" pitchFamily="34" charset="0"/>
+                <a:ea typeface="Calibri" pitchFamily="34" charset="-122"/>
+                <a:cs typeface="Calibri" pitchFamily="34" charset="-120"/>
+              </a:rPr>
+              <a:t>ALS NÄCHSTES</a:t>
+            </a:r>
+            <a:endParaRPr lang="en-US" sz="1600" dirty="0"/>
+          </a:p>
+        </p:txBody>
+      </p:sp>
+      <p:sp>
+        <p:nvSpPr>
+          <p:cNvPr id="3" name="Text 1"/>
+          <p:cNvSpPr txBox="1"/>
+          <p:nvPr/>
+        </p:nvSpPr>
+        <p:spPr>
+          <a:xfrm>
+            <a:off x="685800" y="2971800"/>
+            <a:ext cx="10789920" cy="1463040"/>
+          </a:xfrm>
+          <a:prstGeom prst="rect">
+            <a:avLst/>
+          </a:prstGeom>
+          <a:noFill/>
+          <a:ln/>
+        </p:spPr>
+        <p:txBody>
+          <a:bodyPr wrap="square" rtlCol="0" anchor="t"/>
+          <a:lstStyle/>
+          <a:p>
+            <a:pPr indent="0" marL="0">
+              <a:buNone/>
+            </a:pPr>
+            <a:r>
+              <a:rPr lang="en-US" sz="3000" b="1" dirty="0">
+                <a:solidFill>
+                  <a:srgbClr val="1E3A4C"/>
                 </a:solidFill>
                 <a:latin typeface="Cambria" pitchFamily="34" charset="0"/>
                 <a:ea typeface="Cambria" pitchFamily="34" charset="-122"/>
                 <a:cs typeface="Cambria" pitchFamily="34" charset="-120"/>
               </a:rPr>
-              <a:t>1.4</a:t>
-            </a:r>
-            <a:endParaRPr lang="en-US" sz="20000" dirty="0"/>
-          </a:p>
-        </p:txBody>
-      </p:sp>
-      <p:sp>
-        <p:nvSpPr>
-          <p:cNvPr id="3" name="Text 1"/>
-          <p:cNvSpPr txBox="1"/>
-          <p:nvPr/>
-        </p:nvSpPr>
-        <p:spPr>
-          <a:xfrm>
-            <a:off x="685800" y="777240"/>
-            <a:ext cx="1920240" cy="384048"/>
-          </a:xfrm>
-          <a:prstGeom prst="roundRect">
-            <a:avLst>
-              <a:gd name="adj" fmla="val 21429"/>
-            </a:avLst>
-          </a:prstGeom>
-          <a:solidFill>
-            <a:srgbClr val="2F6F6F"/>
-          </a:solidFill>
-          <a:ln/>
-        </p:spPr>
-        <p:txBody>
-          <a:bodyPr wrap="square" lIns="0" tIns="0" rIns="0" bIns="0" rtlCol="0" anchor="ctr"/>
-          <a:lstStyle/>
-          <a:p>
-            <a:pPr algn="ctr" indent="0" marL="0">
-              <a:buNone/>
-            </a:pPr>
-            <a:r>
-              <a:rPr lang="en-US" sz="1200" b="1" spc="200" kern="0" dirty="0">
-                <a:solidFill>
-                  <a:srgbClr val="FFFFFF"/>
-                </a:solidFill>
-                <a:latin typeface="Calibri" pitchFamily="34" charset="0"/>
-                <a:ea typeface="Calibri" pitchFamily="34" charset="-122"/>
-                <a:cs typeface="Calibri" pitchFamily="34" charset="-120"/>
-              </a:rPr>
-              <a:t>LEKTION 1.4</a:t>
-            </a:r>
-            <a:endParaRPr lang="en-US" sz="1200" dirty="0"/>
-          </a:p>
-        </p:txBody>
-      </p:sp>
-      <p:sp>
-        <p:nvSpPr>
-          <p:cNvPr id="4" name="Text 2"/>
-          <p:cNvSpPr txBox="1"/>
-          <p:nvPr/>
-        </p:nvSpPr>
-        <p:spPr>
-          <a:xfrm>
-            <a:off x="685800" y="1554480"/>
-            <a:ext cx="7863840" cy="2377440"/>
-          </a:xfrm>
-          <a:prstGeom prst="rect">
-            <a:avLst/>
-          </a:prstGeom>
-          <a:noFill/>
-          <a:ln/>
-        </p:spPr>
-        <p:txBody>
-          <a:bodyPr wrap="square" rtlCol="0" anchor="t"/>
-          <a:lstStyle/>
-          <a:p>
-            <a:pPr indent="0" marL="0">
-              <a:buNone/>
-            </a:pPr>
-            <a:r>
-              <a:rPr lang="en-US" sz="3800" b="1" dirty="0">
-                <a:solidFill>
-                  <a:srgbClr val="1E3A4C"/>
-                </a:solidFill>
-                <a:latin typeface="Cambria" pitchFamily="34" charset="0"/>
-                <a:ea typeface="Cambria" pitchFamily="34" charset="-122"/>
-                <a:cs typeface="Cambria" pitchFamily="34" charset="-120"/>
-              </a:rPr>
-              <a:t>Dein Schaufenster in zwanzig Minuten</a:t>
-            </a:r>
-            <a:endParaRPr lang="en-US" sz="3800" dirty="0"/>
+              <a:t>Als Nächstes bauen wir dein Schaufenster: Highlights und dein Link.</a:t>
+            </a:r>
+            <a:endParaRPr lang="en-US" sz="3000" dirty="0"/>
           </a:p>
         </p:txBody>
       </p:sp>
@@ -7462,56 +7868,79 @@
         </p:nvSpPr>
         <p:spPr>
           <a:xfrm>
-            <a:off x="685800" y="685800"/>
-            <a:ext cx="10789920" cy="457200"/>
-          </a:xfrm>
-          <a:prstGeom prst="rect">
-            <a:avLst/>
-          </a:prstGeom>
-          <a:noFill/>
-          <a:ln/>
-        </p:spPr>
-        <p:txBody>
-          <a:bodyPr wrap="square" rtlCol="0" anchor="ctr"/>
-          <a:lstStyle/>
-          <a:p>
-            <a:pPr indent="0" marL="0">
-              <a:buNone/>
-            </a:pPr>
-            <a:r>
-              <a:rPr lang="en-US" sz="1600" b="1" spc="300" kern="0" dirty="0">
-                <a:solidFill>
-                  <a:srgbClr val="2F6F6F"/>
+            <a:off x="8412480" y="365760"/>
+            <a:ext cx="3291840" cy="2926080"/>
+          </a:xfrm>
+          <a:prstGeom prst="rect">
+            <a:avLst/>
+          </a:prstGeom>
+          <a:noFill/>
+          <a:ln/>
+        </p:spPr>
+        <p:txBody>
+          <a:bodyPr wrap="square" lIns="0" tIns="0" rIns="0" bIns="0" rtlCol="0" anchor="t"/>
+          <a:lstStyle/>
+          <a:p>
+            <a:pPr algn="r" indent="0" marL="0">
+              <a:buNone/>
+            </a:pPr>
+            <a:r>
+              <a:rPr lang="en-US" sz="20000" b="1" dirty="0">
+                <a:solidFill>
+                  <a:srgbClr val="EAF1F0"/>
+                </a:solidFill>
+                <a:latin typeface="Cambria" pitchFamily="34" charset="0"/>
+                <a:ea typeface="Cambria" pitchFamily="34" charset="-122"/>
+                <a:cs typeface="Cambria" pitchFamily="34" charset="-120"/>
+              </a:rPr>
+              <a:t>1.4</a:t>
+            </a:r>
+            <a:endParaRPr lang="en-US" sz="20000" dirty="0"/>
+          </a:p>
+        </p:txBody>
+      </p:sp>
+      <p:sp>
+        <p:nvSpPr>
+          <p:cNvPr id="3" name="Text 1"/>
+          <p:cNvSpPr txBox="1"/>
+          <p:nvPr/>
+        </p:nvSpPr>
+        <p:spPr>
+          <a:xfrm>
+            <a:off x="685800" y="777240"/>
+            <a:ext cx="1920240" cy="384048"/>
+          </a:xfrm>
+          <a:prstGeom prst="roundRect">
+            <a:avLst>
+              <a:gd name="adj" fmla="val 21429"/>
+            </a:avLst>
+          </a:prstGeom>
+          <a:solidFill>
+            <a:srgbClr val="2F6F6F"/>
+          </a:solidFill>
+          <a:ln/>
+        </p:spPr>
+        <p:txBody>
+          <a:bodyPr wrap="square" lIns="0" tIns="0" rIns="0" bIns="0" rtlCol="0" anchor="ctr"/>
+          <a:lstStyle/>
+          <a:p>
+            <a:pPr algn="ctr" indent="0" marL="0">
+              <a:buNone/>
+            </a:pPr>
+            <a:r>
+              <a:rPr lang="en-US" sz="1200" b="1" spc="200" kern="0" dirty="0">
+                <a:solidFill>
+                  <a:srgbClr val="FFFFFF"/>
                 </a:solidFill>
                 <a:latin typeface="Calibri" pitchFamily="34" charset="0"/>
                 <a:ea typeface="Calibri" pitchFamily="34" charset="-122"/>
                 <a:cs typeface="Calibri" pitchFamily="34" charset="-120"/>
               </a:rPr>
-              <a:t>WAS DU LERNEN WIRST</a:t>
-            </a:r>
-            <a:endParaRPr lang="en-US" sz="1600" dirty="0"/>
-          </a:p>
-        </p:txBody>
-      </p:sp>
-      <p:sp>
-        <p:nvSpPr>
-          <p:cNvPr id="3" name="Shape 1"/>
-          <p:cNvSpPr/>
-          <p:nvPr/>
-        </p:nvSpPr>
-        <p:spPr>
-          <a:xfrm>
-            <a:off x="685800" y="1828800"/>
-            <a:ext cx="566928" cy="566928"/>
-          </a:xfrm>
-          <a:prstGeom prst="ellipse">
-            <a:avLst/>
-          </a:prstGeom>
-          <a:solidFill>
-            <a:srgbClr val="D6832F"/>
-          </a:solidFill>
-          <a:ln/>
-        </p:spPr>
+              <a:t>LEKTION 1.4</a:t>
+            </a:r>
+            <a:endParaRPr lang="en-US" sz="1200" dirty="0"/>
+          </a:p>
+        </p:txBody>
       </p:sp>
       <p:sp>
         <p:nvSpPr>
@@ -7521,269 +7950,34 @@
         </p:nvSpPr>
         <p:spPr>
           <a:xfrm>
-            <a:off x="685800" y="1828800"/>
-            <a:ext cx="566928" cy="566928"/>
-          </a:xfrm>
-          <a:prstGeom prst="rect">
-            <a:avLst/>
-          </a:prstGeom>
-          <a:noFill/>
-          <a:ln/>
-        </p:spPr>
-        <p:txBody>
-          <a:bodyPr wrap="square" lIns="0" tIns="0" rIns="0" bIns="0" rtlCol="0" anchor="ctr"/>
-          <a:lstStyle/>
-          <a:p>
-            <a:pPr algn="ctr" indent="0" marL="0">
-              <a:buNone/>
-            </a:pPr>
-            <a:r>
-              <a:rPr lang="en-US" sz="2200" b="1" dirty="0">
-                <a:solidFill>
-                  <a:srgbClr val="FFFFFF"/>
+            <a:off x="685800" y="1554480"/>
+            <a:ext cx="7863840" cy="2377440"/>
+          </a:xfrm>
+          <a:prstGeom prst="rect">
+            <a:avLst/>
+          </a:prstGeom>
+          <a:noFill/>
+          <a:ln/>
+        </p:spPr>
+        <p:txBody>
+          <a:bodyPr wrap="square" rtlCol="0" anchor="t"/>
+          <a:lstStyle/>
+          <a:p>
+            <a:pPr indent="0" marL="0">
+              <a:buNone/>
+            </a:pPr>
+            <a:r>
+              <a:rPr lang="en-US" sz="3800" b="1" dirty="0">
+                <a:solidFill>
+                  <a:srgbClr val="1E3A4C"/>
                 </a:solidFill>
                 <a:latin typeface="Cambria" pitchFamily="34" charset="0"/>
                 <a:ea typeface="Cambria" pitchFamily="34" charset="-122"/>
                 <a:cs typeface="Cambria" pitchFamily="34" charset="-120"/>
               </a:rPr>
-              <a:t>1</a:t>
-            </a:r>
-            <a:endParaRPr lang="en-US" sz="2200" dirty="0"/>
-          </a:p>
-        </p:txBody>
-      </p:sp>
-      <p:sp>
-        <p:nvSpPr>
-          <p:cNvPr id="5" name="Text 3"/>
-          <p:cNvSpPr txBox="1"/>
-          <p:nvPr/>
-        </p:nvSpPr>
-        <p:spPr>
-          <a:xfrm>
-            <a:off x="1554480" y="1783080"/>
-            <a:ext cx="9784080" cy="822960"/>
-          </a:xfrm>
-          <a:prstGeom prst="rect">
-            <a:avLst/>
-          </a:prstGeom>
-          <a:noFill/>
-          <a:ln/>
-        </p:spPr>
-        <p:txBody>
-          <a:bodyPr wrap="square" rtlCol="0" anchor="ctr"/>
-          <a:lstStyle/>
-          <a:p>
-            <a:pPr indent="0" marL="0">
-              <a:buNone/>
-            </a:pPr>
-            <a:r>
-              <a:rPr lang="en-US" sz="2000" dirty="0">
-                <a:solidFill>
-                  <a:srgbClr val="33413F"/>
-                </a:solidFill>
-                <a:latin typeface="Calibri" pitchFamily="34" charset="0"/>
-                <a:ea typeface="Calibri" pitchFamily="34" charset="-122"/>
-                <a:cs typeface="Calibri" pitchFamily="34" charset="-120"/>
-              </a:rPr>
-              <a:t>Die fünf Ordner, die reichen</a:t>
-            </a:r>
-            <a:endParaRPr lang="en-US" sz="2000" dirty="0"/>
-          </a:p>
-        </p:txBody>
-      </p:sp>
-      <p:sp>
-        <p:nvSpPr>
-          <p:cNvPr id="6" name="Shape 4"/>
-          <p:cNvSpPr/>
-          <p:nvPr/>
-        </p:nvSpPr>
-        <p:spPr>
-          <a:xfrm>
-            <a:off x="685800" y="2971800"/>
-            <a:ext cx="566928" cy="566928"/>
-          </a:xfrm>
-          <a:prstGeom prst="ellipse">
-            <a:avLst/>
-          </a:prstGeom>
-          <a:solidFill>
-            <a:srgbClr val="D6832F"/>
-          </a:solidFill>
-          <a:ln/>
-        </p:spPr>
-      </p:sp>
-      <p:sp>
-        <p:nvSpPr>
-          <p:cNvPr id="7" name="Text 5"/>
-          <p:cNvSpPr txBox="1"/>
-          <p:nvPr/>
-        </p:nvSpPr>
-        <p:spPr>
-          <a:xfrm>
-            <a:off x="685800" y="2971800"/>
-            <a:ext cx="566928" cy="566928"/>
-          </a:xfrm>
-          <a:prstGeom prst="rect">
-            <a:avLst/>
-          </a:prstGeom>
-          <a:noFill/>
-          <a:ln/>
-        </p:spPr>
-        <p:txBody>
-          <a:bodyPr wrap="square" lIns="0" tIns="0" rIns="0" bIns="0" rtlCol="0" anchor="ctr"/>
-          <a:lstStyle/>
-          <a:p>
-            <a:pPr algn="ctr" indent="0" marL="0">
-              <a:buNone/>
-            </a:pPr>
-            <a:r>
-              <a:rPr lang="en-US" sz="2200" b="1" dirty="0">
-                <a:solidFill>
-                  <a:srgbClr val="FFFFFF"/>
-                </a:solidFill>
-                <a:latin typeface="Cambria" pitchFamily="34" charset="0"/>
-                <a:ea typeface="Cambria" pitchFamily="34" charset="-122"/>
-                <a:cs typeface="Cambria" pitchFamily="34" charset="-120"/>
-              </a:rPr>
-              <a:t>2</a:t>
-            </a:r>
-            <a:endParaRPr lang="en-US" sz="2200" dirty="0"/>
-          </a:p>
-        </p:txBody>
-      </p:sp>
-      <p:sp>
-        <p:nvSpPr>
-          <p:cNvPr id="8" name="Text 6"/>
-          <p:cNvSpPr txBox="1"/>
-          <p:nvPr/>
-        </p:nvSpPr>
-        <p:spPr>
-          <a:xfrm>
-            <a:off x="1554480" y="2926080"/>
-            <a:ext cx="9784080" cy="822960"/>
-          </a:xfrm>
-          <a:prstGeom prst="rect">
-            <a:avLst/>
-          </a:prstGeom>
-          <a:noFill/>
-          <a:ln/>
-        </p:spPr>
-        <p:txBody>
-          <a:bodyPr wrap="square" rtlCol="0" anchor="ctr"/>
-          <a:lstStyle/>
-          <a:p>
-            <a:pPr indent="0" marL="0">
-              <a:buNone/>
-            </a:pPr>
-            <a:r>
-              <a:rPr lang="en-US" sz="2000" dirty="0">
-                <a:solidFill>
-                  <a:srgbClr val="33413F"/>
-                </a:solidFill>
-                <a:latin typeface="Calibri" pitchFamily="34" charset="0"/>
-                <a:ea typeface="Calibri" pitchFamily="34" charset="-122"/>
-                <a:cs typeface="Calibri" pitchFamily="34" charset="-120"/>
-              </a:rPr>
-              <a:t>Wie du sie füllst, wenn du noch nie eine Story gepostet hast</a:t>
-            </a:r>
-            <a:endParaRPr lang="en-US" sz="2000" dirty="0"/>
-          </a:p>
-        </p:txBody>
-      </p:sp>
-      <p:sp>
-        <p:nvSpPr>
-          <p:cNvPr id="9" name="Shape 7"/>
-          <p:cNvSpPr/>
-          <p:nvPr/>
-        </p:nvSpPr>
-        <p:spPr>
-          <a:xfrm>
-            <a:off x="685800" y="4114800"/>
-            <a:ext cx="566928" cy="566928"/>
-          </a:xfrm>
-          <a:prstGeom prst="ellipse">
-            <a:avLst/>
-          </a:prstGeom>
-          <a:solidFill>
-            <a:srgbClr val="D6832F"/>
-          </a:solidFill>
-          <a:ln/>
-        </p:spPr>
-      </p:sp>
-      <p:sp>
-        <p:nvSpPr>
-          <p:cNvPr id="10" name="Text 8"/>
-          <p:cNvSpPr txBox="1"/>
-          <p:nvPr/>
-        </p:nvSpPr>
-        <p:spPr>
-          <a:xfrm>
-            <a:off x="685800" y="4114800"/>
-            <a:ext cx="566928" cy="566928"/>
-          </a:xfrm>
-          <a:prstGeom prst="rect">
-            <a:avLst/>
-          </a:prstGeom>
-          <a:noFill/>
-          <a:ln/>
-        </p:spPr>
-        <p:txBody>
-          <a:bodyPr wrap="square" lIns="0" tIns="0" rIns="0" bIns="0" rtlCol="0" anchor="ctr"/>
-          <a:lstStyle/>
-          <a:p>
-            <a:pPr algn="ctr" indent="0" marL="0">
-              <a:buNone/>
-            </a:pPr>
-            <a:r>
-              <a:rPr lang="en-US" sz="2200" b="1" dirty="0">
-                <a:solidFill>
-                  <a:srgbClr val="FFFFFF"/>
-                </a:solidFill>
-                <a:latin typeface="Cambria" pitchFamily="34" charset="0"/>
-                <a:ea typeface="Cambria" pitchFamily="34" charset="-122"/>
-                <a:cs typeface="Cambria" pitchFamily="34" charset="-120"/>
-              </a:rPr>
-              <a:t>3</a:t>
-            </a:r>
-            <a:endParaRPr lang="en-US" sz="2200" dirty="0"/>
-          </a:p>
-        </p:txBody>
-      </p:sp>
-      <p:sp>
-        <p:nvSpPr>
-          <p:cNvPr id="11" name="Text 9"/>
-          <p:cNvSpPr txBox="1"/>
-          <p:nvPr/>
-        </p:nvSpPr>
-        <p:spPr>
-          <a:xfrm>
-            <a:off x="1554480" y="4069080"/>
-            <a:ext cx="9784080" cy="822960"/>
-          </a:xfrm>
-          <a:prstGeom prst="rect">
-            <a:avLst/>
-          </a:prstGeom>
-          <a:noFill/>
-          <a:ln/>
-        </p:spPr>
-        <p:txBody>
-          <a:bodyPr wrap="square" rtlCol="0" anchor="ctr"/>
-          <a:lstStyle/>
-          <a:p>
-            <a:pPr indent="0" marL="0">
-              <a:buNone/>
-            </a:pPr>
-            <a:r>
-              <a:rPr lang="en-US" sz="2000" dirty="0">
-                <a:solidFill>
-                  <a:srgbClr val="33413F"/>
-                </a:solidFill>
-                <a:latin typeface="Calibri" pitchFamily="34" charset="0"/>
-                <a:ea typeface="Calibri" pitchFamily="34" charset="-122"/>
-                <a:cs typeface="Calibri" pitchFamily="34" charset="-120"/>
-              </a:rPr>
-              <a:t>Ein Link oder mehrere — ohne Zusatztool</a:t>
-            </a:r>
-            <a:endParaRPr lang="en-US" sz="2000" dirty="0"/>
+              <a:t>Dein Schaufenster in zwanzig Minuten</a:t>
+            </a:r>
+            <a:endParaRPr lang="en-US" sz="3800" dirty="0"/>
           </a:p>
         </p:txBody>
       </p:sp>
@@ -7852,7 +8046,7 @@
                 <a:ea typeface="Calibri" pitchFamily="34" charset="-122"/>
                 <a:cs typeface="Calibri" pitchFamily="34" charset="-120"/>
               </a:rPr>
-              <a:t>DIE FÜNF ORDNER</a:t>
+              <a:t>WAS DU LERNEN WIRST</a:t>
             </a:r>
             <a:endParaRPr lang="en-US" sz="1600" dirty="0"/>
           </a:p>
@@ -7860,14 +8054,73 @@
       </p:sp>
       <p:sp>
         <p:nvSpPr>
-          <p:cNvPr id="3" name="Text 1"/>
-          <p:cNvSpPr txBox="1"/>
-          <p:nvPr/>
-        </p:nvSpPr>
-        <p:spPr>
-          <a:xfrm>
-            <a:off x="685800" y="1691640"/>
-            <a:ext cx="10789920" cy="777240"/>
+          <p:cNvPr id="3" name="Shape 1"/>
+          <p:cNvSpPr/>
+          <p:nvPr/>
+        </p:nvSpPr>
+        <p:spPr>
+          <a:xfrm>
+            <a:off x="685800" y="1828800"/>
+            <a:ext cx="566928" cy="566928"/>
+          </a:xfrm>
+          <a:prstGeom prst="ellipse">
+            <a:avLst/>
+          </a:prstGeom>
+          <a:solidFill>
+            <a:srgbClr val="D6832F"/>
+          </a:solidFill>
+          <a:ln/>
+        </p:spPr>
+      </p:sp>
+      <p:sp>
+        <p:nvSpPr>
+          <p:cNvPr id="4" name="Text 2"/>
+          <p:cNvSpPr txBox="1"/>
+          <p:nvPr/>
+        </p:nvSpPr>
+        <p:spPr>
+          <a:xfrm>
+            <a:off x="685800" y="1828800"/>
+            <a:ext cx="566928" cy="566928"/>
+          </a:xfrm>
+          <a:prstGeom prst="rect">
+            <a:avLst/>
+          </a:prstGeom>
+          <a:noFill/>
+          <a:ln/>
+        </p:spPr>
+        <p:txBody>
+          <a:bodyPr wrap="square" lIns="0" tIns="0" rIns="0" bIns="0" rtlCol="0" anchor="ctr"/>
+          <a:lstStyle/>
+          <a:p>
+            <a:pPr algn="ctr" indent="0" marL="0">
+              <a:buNone/>
+            </a:pPr>
+            <a:r>
+              <a:rPr lang="en-US" sz="2200" b="1" dirty="0">
+                <a:solidFill>
+                  <a:srgbClr val="FFFFFF"/>
+                </a:solidFill>
+                <a:latin typeface="Cambria" pitchFamily="34" charset="0"/>
+                <a:ea typeface="Cambria" pitchFamily="34" charset="-122"/>
+                <a:cs typeface="Cambria" pitchFamily="34" charset="-120"/>
+              </a:rPr>
+              <a:t>1</a:t>
+            </a:r>
+            <a:endParaRPr lang="en-US" sz="2200" dirty="0"/>
+          </a:p>
+        </p:txBody>
+      </p:sp>
+      <p:sp>
+        <p:nvSpPr>
+          <p:cNvPr id="5" name="Text 3"/>
+          <p:cNvSpPr txBox="1"/>
+          <p:nvPr/>
+        </p:nvSpPr>
+        <p:spPr>
+          <a:xfrm>
+            <a:off x="1554480" y="1783080"/>
+            <a:ext cx="9784080" cy="822960"/>
           </a:xfrm>
           <a:prstGeom prst="rect">
             <a:avLst/>
@@ -7883,21 +8136,105 @@
               <a:buNone/>
             </a:pPr>
             <a:r>
-              <a:rPr lang="en-US" sz="1900" b="1" dirty="0">
-                <a:solidFill>
-                  <a:srgbClr val="D6832F"/>
+              <a:rPr lang="en-US" sz="2000" dirty="0">
+                <a:solidFill>
+                  <a:srgbClr val="33413F"/>
                 </a:solidFill>
                 <a:latin typeface="Calibri" pitchFamily="34" charset="0"/>
                 <a:ea typeface="Calibri" pitchFamily="34" charset="-122"/>
                 <a:cs typeface="Calibri" pitchFamily="34" charset="-120"/>
               </a:rPr>
-              <a:t>•  </a:t>
-            </a:r>
+              <a:t>Die fünf Ordner, die reichen</a:t>
+            </a:r>
+            <a:endParaRPr lang="en-US" sz="2000" dirty="0"/>
+          </a:p>
+        </p:txBody>
+      </p:sp>
+      <p:sp>
+        <p:nvSpPr>
+          <p:cNvPr id="6" name="Shape 4"/>
+          <p:cNvSpPr/>
+          <p:nvPr/>
+        </p:nvSpPr>
+        <p:spPr>
+          <a:xfrm>
+            <a:off x="685800" y="2971800"/>
+            <a:ext cx="566928" cy="566928"/>
+          </a:xfrm>
+          <a:prstGeom prst="ellipse">
+            <a:avLst/>
+          </a:prstGeom>
+          <a:solidFill>
+            <a:srgbClr val="D6832F"/>
+          </a:solidFill>
+          <a:ln/>
+        </p:spPr>
+      </p:sp>
+      <p:sp>
+        <p:nvSpPr>
+          <p:cNvPr id="7" name="Text 5"/>
+          <p:cNvSpPr txBox="1"/>
+          <p:nvPr/>
+        </p:nvSpPr>
+        <p:spPr>
+          <a:xfrm>
+            <a:off x="685800" y="2971800"/>
+            <a:ext cx="566928" cy="566928"/>
+          </a:xfrm>
+          <a:prstGeom prst="rect">
+            <a:avLst/>
+          </a:prstGeom>
+          <a:noFill/>
+          <a:ln/>
+        </p:spPr>
+        <p:txBody>
+          <a:bodyPr wrap="square" lIns="0" tIns="0" rIns="0" bIns="0" rtlCol="0" anchor="ctr"/>
+          <a:lstStyle/>
+          <a:p>
+            <a:pPr algn="ctr" indent="0" marL="0">
+              <a:buNone/>
+            </a:pPr>
+            <a:r>
+              <a:rPr lang="en-US" sz="2200" b="1" dirty="0">
+                <a:solidFill>
+                  <a:srgbClr val="FFFFFF"/>
+                </a:solidFill>
+                <a:latin typeface="Cambria" pitchFamily="34" charset="0"/>
+                <a:ea typeface="Cambria" pitchFamily="34" charset="-122"/>
+                <a:cs typeface="Cambria" pitchFamily="34" charset="-120"/>
+              </a:rPr>
+              <a:t>2</a:t>
+            </a:r>
+            <a:endParaRPr lang="en-US" sz="2200" dirty="0"/>
+          </a:p>
+        </p:txBody>
+      </p:sp>
+      <p:sp>
+        <p:nvSpPr>
+          <p:cNvPr id="8" name="Text 6"/>
+          <p:cNvSpPr txBox="1"/>
+          <p:nvPr/>
+        </p:nvSpPr>
+        <p:spPr>
+          <a:xfrm>
+            <a:off x="1554480" y="2926080"/>
+            <a:ext cx="9784080" cy="822960"/>
+          </a:xfrm>
+          <a:prstGeom prst="rect">
+            <a:avLst/>
+          </a:prstGeom>
+          <a:noFill/>
+          <a:ln/>
+        </p:spPr>
+        <p:txBody>
+          <a:bodyPr wrap="square" rtlCol="0" anchor="ctr"/>
+          <a:lstStyle/>
+          <a:p>
             <a:pPr indent="0" marL="0">
               <a:buNone/>
             </a:pPr>
             <a:r>
-              <a:rPr lang="en-US" sz="1900" dirty="0">
+              <a:rPr lang="en-US" sz="2000" dirty="0">
                 <a:solidFill>
                   <a:srgbClr val="33413F"/>
                 </a:solidFill>
@@ -7905,22 +8242,81 @@
                 <a:ea typeface="Calibri" pitchFamily="34" charset="-122"/>
                 <a:cs typeface="Calibri" pitchFamily="34" charset="-120"/>
               </a:rPr>
-              <a:t>Über mich</a:t>
-            </a:r>
-            <a:endParaRPr lang="en-US" sz="1900" dirty="0"/>
-          </a:p>
-        </p:txBody>
-      </p:sp>
-      <p:sp>
-        <p:nvSpPr>
-          <p:cNvPr id="4" name="Text 2"/>
-          <p:cNvSpPr txBox="1"/>
-          <p:nvPr/>
-        </p:nvSpPr>
-        <p:spPr>
-          <a:xfrm>
-            <a:off x="685800" y="2606040"/>
-            <a:ext cx="10789920" cy="777240"/>
+              <a:t>Wie du sie füllst, wenn du noch nie eine Story gepostet hast</a:t>
+            </a:r>
+            <a:endParaRPr lang="en-US" sz="2000" dirty="0"/>
+          </a:p>
+        </p:txBody>
+      </p:sp>
+      <p:sp>
+        <p:nvSpPr>
+          <p:cNvPr id="9" name="Shape 7"/>
+          <p:cNvSpPr/>
+          <p:nvPr/>
+        </p:nvSpPr>
+        <p:spPr>
+          <a:xfrm>
+            <a:off x="685800" y="4114800"/>
+            <a:ext cx="566928" cy="566928"/>
+          </a:xfrm>
+          <a:prstGeom prst="ellipse">
+            <a:avLst/>
+          </a:prstGeom>
+          <a:solidFill>
+            <a:srgbClr val="D6832F"/>
+          </a:solidFill>
+          <a:ln/>
+        </p:spPr>
+      </p:sp>
+      <p:sp>
+        <p:nvSpPr>
+          <p:cNvPr id="10" name="Text 8"/>
+          <p:cNvSpPr txBox="1"/>
+          <p:nvPr/>
+        </p:nvSpPr>
+        <p:spPr>
+          <a:xfrm>
+            <a:off x="685800" y="4114800"/>
+            <a:ext cx="566928" cy="566928"/>
+          </a:xfrm>
+          <a:prstGeom prst="rect">
+            <a:avLst/>
+          </a:prstGeom>
+          <a:noFill/>
+          <a:ln/>
+        </p:spPr>
+        <p:txBody>
+          <a:bodyPr wrap="square" lIns="0" tIns="0" rIns="0" bIns="0" rtlCol="0" anchor="ctr"/>
+          <a:lstStyle/>
+          <a:p>
+            <a:pPr algn="ctr" indent="0" marL="0">
+              <a:buNone/>
+            </a:pPr>
+            <a:r>
+              <a:rPr lang="en-US" sz="2200" b="1" dirty="0">
+                <a:solidFill>
+                  <a:srgbClr val="FFFFFF"/>
+                </a:solidFill>
+                <a:latin typeface="Cambria" pitchFamily="34" charset="0"/>
+                <a:ea typeface="Cambria" pitchFamily="34" charset="-122"/>
+                <a:cs typeface="Cambria" pitchFamily="34" charset="-120"/>
+              </a:rPr>
+              <a:t>3</a:t>
+            </a:r>
+            <a:endParaRPr lang="en-US" sz="2200" dirty="0"/>
+          </a:p>
+        </p:txBody>
+      </p:sp>
+      <p:sp>
+        <p:nvSpPr>
+          <p:cNvPr id="11" name="Text 9"/>
+          <p:cNvSpPr txBox="1"/>
+          <p:nvPr/>
+        </p:nvSpPr>
+        <p:spPr>
+          <a:xfrm>
+            <a:off x="1554480" y="4069080"/>
+            <a:ext cx="9784080" cy="822960"/>
           </a:xfrm>
           <a:prstGeom prst="rect">
             <a:avLst/>
@@ -7936,229 +8332,17 @@
               <a:buNone/>
             </a:pPr>
             <a:r>
-              <a:rPr lang="en-US" sz="1900" b="1" dirty="0">
-                <a:solidFill>
-                  <a:srgbClr val="D6832F"/>
+              <a:rPr lang="en-US" sz="2000" dirty="0">
+                <a:solidFill>
+                  <a:srgbClr val="33413F"/>
                 </a:solidFill>
                 <a:latin typeface="Calibri" pitchFamily="34" charset="0"/>
                 <a:ea typeface="Calibri" pitchFamily="34" charset="-122"/>
                 <a:cs typeface="Calibri" pitchFamily="34" charset="-120"/>
               </a:rPr>
-              <a:t>•  </a:t>
-            </a:r>
-            <a:pPr indent="0" marL="0">
-              <a:buNone/>
-            </a:pPr>
-            <a:r>
-              <a:rPr lang="en-US" sz="1900" dirty="0">
-                <a:solidFill>
-                  <a:srgbClr val="33413F"/>
-                </a:solidFill>
-                <a:latin typeface="Calibri" pitchFamily="34" charset="0"/>
-                <a:ea typeface="Calibri" pitchFamily="34" charset="-122"/>
-                <a:cs typeface="Calibri" pitchFamily="34" charset="-120"/>
-              </a:rPr>
-              <a:t>Mein Thema</a:t>
-            </a:r>
-            <a:endParaRPr lang="en-US" sz="1900" dirty="0"/>
-          </a:p>
-        </p:txBody>
-      </p:sp>
-      <p:sp>
-        <p:nvSpPr>
-          <p:cNvPr id="5" name="Text 3"/>
-          <p:cNvSpPr txBox="1"/>
-          <p:nvPr/>
-        </p:nvSpPr>
-        <p:spPr>
-          <a:xfrm>
-            <a:off x="685800" y="3520440"/>
-            <a:ext cx="10789920" cy="777240"/>
-          </a:xfrm>
-          <a:prstGeom prst="rect">
-            <a:avLst/>
-          </a:prstGeom>
-          <a:noFill/>
-          <a:ln/>
-        </p:spPr>
-        <p:txBody>
-          <a:bodyPr wrap="square" rtlCol="0" anchor="ctr"/>
-          <a:lstStyle/>
-          <a:p>
-            <a:pPr indent="0" marL="0">
-              <a:buNone/>
-            </a:pPr>
-            <a:r>
-              <a:rPr lang="en-US" sz="1900" b="1" dirty="0">
-                <a:solidFill>
-                  <a:srgbClr val="D6832F"/>
-                </a:solidFill>
-                <a:latin typeface="Calibri" pitchFamily="34" charset="0"/>
-                <a:ea typeface="Calibri" pitchFamily="34" charset="-122"/>
-                <a:cs typeface="Calibri" pitchFamily="34" charset="-120"/>
-              </a:rPr>
-              <a:t>•  </a:t>
-            </a:r>
-            <a:pPr indent="0" marL="0">
-              <a:buNone/>
-            </a:pPr>
-            <a:r>
-              <a:rPr lang="en-US" sz="1900" dirty="0">
-                <a:solidFill>
-                  <a:srgbClr val="33413F"/>
-                </a:solidFill>
-                <a:latin typeface="Calibri" pitchFamily="34" charset="0"/>
-                <a:ea typeface="Calibri" pitchFamily="34" charset="-122"/>
-                <a:cs typeface="Calibri" pitchFamily="34" charset="-120"/>
-              </a:rPr>
-              <a:t>Feedback</a:t>
-            </a:r>
-            <a:endParaRPr lang="en-US" sz="1900" dirty="0"/>
-          </a:p>
-        </p:txBody>
-      </p:sp>
-      <p:sp>
-        <p:nvSpPr>
-          <p:cNvPr id="6" name="Text 4"/>
-          <p:cNvSpPr txBox="1"/>
-          <p:nvPr/>
-        </p:nvSpPr>
-        <p:spPr>
-          <a:xfrm>
-            <a:off x="685800" y="4434840"/>
-            <a:ext cx="10789920" cy="777240"/>
-          </a:xfrm>
-          <a:prstGeom prst="rect">
-            <a:avLst/>
-          </a:prstGeom>
-          <a:noFill/>
-          <a:ln/>
-        </p:spPr>
-        <p:txBody>
-          <a:bodyPr wrap="square" rtlCol="0" anchor="ctr"/>
-          <a:lstStyle/>
-          <a:p>
-            <a:pPr indent="0" marL="0">
-              <a:buNone/>
-            </a:pPr>
-            <a:r>
-              <a:rPr lang="en-US" sz="1900" b="1" dirty="0">
-                <a:solidFill>
-                  <a:srgbClr val="D6832F"/>
-                </a:solidFill>
-                <a:latin typeface="Calibri" pitchFamily="34" charset="0"/>
-                <a:ea typeface="Calibri" pitchFamily="34" charset="-122"/>
-                <a:cs typeface="Calibri" pitchFamily="34" charset="-120"/>
-              </a:rPr>
-              <a:t>•  </a:t>
-            </a:r>
-            <a:pPr indent="0" marL="0">
-              <a:buNone/>
-            </a:pPr>
-            <a:r>
-              <a:rPr lang="en-US" sz="1900" dirty="0">
-                <a:solidFill>
-                  <a:srgbClr val="33413F"/>
-                </a:solidFill>
-                <a:latin typeface="Calibri" pitchFamily="34" charset="0"/>
-                <a:ea typeface="Calibri" pitchFamily="34" charset="-122"/>
-                <a:cs typeface="Calibri" pitchFamily="34" charset="-120"/>
-              </a:rPr>
-              <a:t>Gratis für dich</a:t>
-            </a:r>
-            <a:endParaRPr lang="en-US" sz="1900" dirty="0"/>
-          </a:p>
-        </p:txBody>
-      </p:sp>
-      <p:sp>
-        <p:nvSpPr>
-          <p:cNvPr id="7" name="Text 5"/>
-          <p:cNvSpPr txBox="1"/>
-          <p:nvPr/>
-        </p:nvSpPr>
-        <p:spPr>
-          <a:xfrm>
-            <a:off x="685800" y="5349240"/>
-            <a:ext cx="10789920" cy="777240"/>
-          </a:xfrm>
-          <a:prstGeom prst="rect">
-            <a:avLst/>
-          </a:prstGeom>
-          <a:noFill/>
-          <a:ln/>
-        </p:spPr>
-        <p:txBody>
-          <a:bodyPr wrap="square" rtlCol="0" anchor="ctr"/>
-          <a:lstStyle/>
-          <a:p>
-            <a:pPr indent="0" marL="0">
-              <a:buNone/>
-            </a:pPr>
-            <a:r>
-              <a:rPr lang="en-US" sz="1900" b="1" dirty="0">
-                <a:solidFill>
-                  <a:srgbClr val="D6832F"/>
-                </a:solidFill>
-                <a:latin typeface="Calibri" pitchFamily="34" charset="0"/>
-                <a:ea typeface="Calibri" pitchFamily="34" charset="-122"/>
-                <a:cs typeface="Calibri" pitchFamily="34" charset="-120"/>
-              </a:rPr>
-              <a:t>•  </a:t>
-            </a:r>
-            <a:pPr indent="0" marL="0">
-              <a:buNone/>
-            </a:pPr>
-            <a:r>
-              <a:rPr lang="en-US" sz="1900" dirty="0">
-                <a:solidFill>
-                  <a:srgbClr val="33413F"/>
-                </a:solidFill>
-                <a:latin typeface="Calibri" pitchFamily="34" charset="0"/>
-                <a:ea typeface="Calibri" pitchFamily="34" charset="-122"/>
-                <a:cs typeface="Calibri" pitchFamily="34" charset="-120"/>
-              </a:rPr>
-              <a:t>Mein Angebot</a:t>
-            </a:r>
-            <a:endParaRPr lang="en-US" sz="1900" dirty="0"/>
-          </a:p>
-        </p:txBody>
-      </p:sp>
-      <p:sp>
-        <p:nvSpPr>
-          <p:cNvPr id="8" name="Text 6"/>
-          <p:cNvSpPr txBox="1"/>
-          <p:nvPr/>
-        </p:nvSpPr>
-        <p:spPr>
-          <a:xfrm>
-            <a:off x="685800" y="5852160"/>
-            <a:ext cx="10789920" cy="548640"/>
-          </a:xfrm>
-          <a:prstGeom prst="rect">
-            <a:avLst/>
-          </a:prstGeom>
-          <a:noFill/>
-          <a:ln/>
-        </p:spPr>
-        <p:txBody>
-          <a:bodyPr wrap="square" rtlCol="0" anchor="ctr"/>
-          <a:lstStyle/>
-          <a:p>
-            <a:pPr indent="0" marL="0">
-              <a:buNone/>
-            </a:pPr>
-            <a:r>
-              <a:rPr lang="en-US" sz="1500" i="1" dirty="0">
-                <a:solidFill>
-                  <a:srgbClr val="7A8B88"/>
-                </a:solidFill>
-                <a:latin typeface="Calibri" pitchFamily="34" charset="0"/>
-                <a:ea typeface="Calibri" pitchFamily="34" charset="-122"/>
-                <a:cs typeface="Calibri" pitchFamily="34" charset="-120"/>
-              </a:rPr>
-              <a:t>Mehr braucht am Anfang niemand. Wirklich niemand.</a:t>
-            </a:r>
-            <a:endParaRPr lang="en-US" sz="1500" dirty="0"/>
+              <a:t>Ein Link oder mehrere — ohne Zusatztool</a:t>
+            </a:r>
+            <a:endParaRPr lang="en-US" sz="2000" dirty="0"/>
           </a:p>
         </p:txBody>
       </p:sp>
@@ -8227,7 +8411,7 @@
                 <a:ea typeface="Calibri" pitchFamily="34" charset="-122"/>
                 <a:cs typeface="Calibri" pitchFamily="34" charset="-120"/>
               </a:rPr>
-              <a:t>DAS HENNE-EI-PROBLEM</a:t>
+              <a:t>DIE FÜNF ORDNER</a:t>
             </a:r>
             <a:endParaRPr lang="en-US" sz="1600" dirty="0"/>
           </a:p>
@@ -8258,70 +8442,282 @@
               <a:buNone/>
             </a:pPr>
             <a:r>
-              <a:rPr lang="en-US" sz="1900" dirty="0">
-                <a:solidFill>
-                  <a:srgbClr val="33413F"/>
+              <a:rPr lang="en-US" sz="1900" b="1" dirty="0">
+                <a:solidFill>
+                  <a:srgbClr val="D6832F"/>
                 </a:solidFill>
                 <a:latin typeface="Calibri" pitchFamily="34" charset="0"/>
                 <a:ea typeface="Calibri" pitchFamily="34" charset="-122"/>
                 <a:cs typeface="Calibri" pitchFamily="34" charset="-120"/>
               </a:rPr>
-              <a:t>Für ein Highlight brauchst du eine Story. Für eine Story brauchst du Mut.</a:t>
-            </a:r>
-            <a:endParaRPr lang="en-US" sz="1900" dirty="0"/>
-          </a:p>
-        </p:txBody>
-      </p:sp>
-      <p:sp>
-        <p:nvSpPr>
-          <p:cNvPr id="4" name="Text 2"/>
-          <p:cNvSpPr txBox="1"/>
-          <p:nvPr/>
-        </p:nvSpPr>
-        <p:spPr>
-          <a:xfrm>
-            <a:off x="685800" y="2606040"/>
-            <a:ext cx="10789920" cy="777240"/>
-          </a:xfrm>
-          <a:prstGeom prst="rect">
-            <a:avLst/>
-          </a:prstGeom>
-          <a:noFill/>
-          <a:ln/>
-        </p:spPr>
-        <p:txBody>
-          <a:bodyPr wrap="square" rtlCol="0" anchor="ctr"/>
-          <a:lstStyle/>
-          <a:p>
+              <a:t>•  </a:t>
+            </a:r>
             <a:pPr indent="0" marL="0">
               <a:buNone/>
             </a:pPr>
             <a:r>
-              <a:rPr lang="en-US" sz="1900" b="1" dirty="0">
-                <a:solidFill>
-                  <a:srgbClr val="D6832F"/>
+              <a:rPr lang="en-US" sz="1900" dirty="0">
+                <a:solidFill>
+                  <a:srgbClr val="33413F"/>
                 </a:solidFill>
                 <a:latin typeface="Calibri" pitchFamily="34" charset="0"/>
                 <a:ea typeface="Calibri" pitchFamily="34" charset="-122"/>
                 <a:cs typeface="Calibri" pitchFamily="34" charset="-120"/>
               </a:rPr>
-              <a:t>Lösung:  </a:t>
-            </a:r>
+              <a:t>Über mich</a:t>
+            </a:r>
+            <a:endParaRPr lang="en-US" sz="1900" dirty="0"/>
+          </a:p>
+        </p:txBody>
+      </p:sp>
+      <p:sp>
+        <p:nvSpPr>
+          <p:cNvPr id="4" name="Text 2"/>
+          <p:cNvSpPr txBox="1"/>
+          <p:nvPr/>
+        </p:nvSpPr>
+        <p:spPr>
+          <a:xfrm>
+            <a:off x="685800" y="2606040"/>
+            <a:ext cx="10789920" cy="777240"/>
+          </a:xfrm>
+          <a:prstGeom prst="rect">
+            <a:avLst/>
+          </a:prstGeom>
+          <a:noFill/>
+          <a:ln/>
+        </p:spPr>
+        <p:txBody>
+          <a:bodyPr wrap="square" rtlCol="0" anchor="ctr"/>
+          <a:lstStyle/>
+          <a:p>
             <a:pPr indent="0" marL="0">
               <a:buNone/>
             </a:pPr>
             <a:r>
-              <a:rPr lang="en-US" sz="1900" dirty="0">
-                <a:solidFill>
-                  <a:srgbClr val="33413F"/>
+              <a:rPr lang="en-US" sz="1900" b="1" dirty="0">
+                <a:solidFill>
+                  <a:srgbClr val="D6832F"/>
                 </a:solidFill>
                 <a:latin typeface="Calibri" pitchFamily="34" charset="0"/>
                 <a:ea typeface="Calibri" pitchFamily="34" charset="-122"/>
                 <a:cs typeface="Calibri" pitchFamily="34" charset="-120"/>
               </a:rPr>
-              <a:t>Du postest fünf einfache Stories hintereinander und packst sie sofort in die Ordner.</a:t>
+              <a:t>•  </a:t>
+            </a:r>
+            <a:pPr indent="0" marL="0">
+              <a:buNone/>
+            </a:pPr>
+            <a:r>
+              <a:rPr lang="en-US" sz="1900" dirty="0">
+                <a:solidFill>
+                  <a:srgbClr val="33413F"/>
+                </a:solidFill>
+                <a:latin typeface="Calibri" pitchFamily="34" charset="0"/>
+                <a:ea typeface="Calibri" pitchFamily="34" charset="-122"/>
+                <a:cs typeface="Calibri" pitchFamily="34" charset="-120"/>
+              </a:rPr>
+              <a:t>Mein Thema</a:t>
             </a:r>
             <a:endParaRPr lang="en-US" sz="1900" dirty="0"/>
+          </a:p>
+        </p:txBody>
+      </p:sp>
+      <p:sp>
+        <p:nvSpPr>
+          <p:cNvPr id="5" name="Text 3"/>
+          <p:cNvSpPr txBox="1"/>
+          <p:nvPr/>
+        </p:nvSpPr>
+        <p:spPr>
+          <a:xfrm>
+            <a:off x="685800" y="3520440"/>
+            <a:ext cx="10789920" cy="777240"/>
+          </a:xfrm>
+          <a:prstGeom prst="rect">
+            <a:avLst/>
+          </a:prstGeom>
+          <a:noFill/>
+          <a:ln/>
+        </p:spPr>
+        <p:txBody>
+          <a:bodyPr wrap="square" rtlCol="0" anchor="ctr"/>
+          <a:lstStyle/>
+          <a:p>
+            <a:pPr indent="0" marL="0">
+              <a:buNone/>
+            </a:pPr>
+            <a:r>
+              <a:rPr lang="en-US" sz="1900" b="1" dirty="0">
+                <a:solidFill>
+                  <a:srgbClr val="D6832F"/>
+                </a:solidFill>
+                <a:latin typeface="Calibri" pitchFamily="34" charset="0"/>
+                <a:ea typeface="Calibri" pitchFamily="34" charset="-122"/>
+                <a:cs typeface="Calibri" pitchFamily="34" charset="-120"/>
+              </a:rPr>
+              <a:t>•  </a:t>
+            </a:r>
+            <a:pPr indent="0" marL="0">
+              <a:buNone/>
+            </a:pPr>
+            <a:r>
+              <a:rPr lang="en-US" sz="1900" dirty="0">
+                <a:solidFill>
+                  <a:srgbClr val="33413F"/>
+                </a:solidFill>
+                <a:latin typeface="Calibri" pitchFamily="34" charset="0"/>
+                <a:ea typeface="Calibri" pitchFamily="34" charset="-122"/>
+                <a:cs typeface="Calibri" pitchFamily="34" charset="-120"/>
+              </a:rPr>
+              <a:t>Feedback</a:t>
+            </a:r>
+            <a:endParaRPr lang="en-US" sz="1900" dirty="0"/>
+          </a:p>
+        </p:txBody>
+      </p:sp>
+      <p:sp>
+        <p:nvSpPr>
+          <p:cNvPr id="6" name="Text 4"/>
+          <p:cNvSpPr txBox="1"/>
+          <p:nvPr/>
+        </p:nvSpPr>
+        <p:spPr>
+          <a:xfrm>
+            <a:off x="685800" y="4434840"/>
+            <a:ext cx="10789920" cy="777240"/>
+          </a:xfrm>
+          <a:prstGeom prst="rect">
+            <a:avLst/>
+          </a:prstGeom>
+          <a:noFill/>
+          <a:ln/>
+        </p:spPr>
+        <p:txBody>
+          <a:bodyPr wrap="square" rtlCol="0" anchor="ctr"/>
+          <a:lstStyle/>
+          <a:p>
+            <a:pPr indent="0" marL="0">
+              <a:buNone/>
+            </a:pPr>
+            <a:r>
+              <a:rPr lang="en-US" sz="1900" b="1" dirty="0">
+                <a:solidFill>
+                  <a:srgbClr val="D6832F"/>
+                </a:solidFill>
+                <a:latin typeface="Calibri" pitchFamily="34" charset="0"/>
+                <a:ea typeface="Calibri" pitchFamily="34" charset="-122"/>
+                <a:cs typeface="Calibri" pitchFamily="34" charset="-120"/>
+              </a:rPr>
+              <a:t>•  </a:t>
+            </a:r>
+            <a:pPr indent="0" marL="0">
+              <a:buNone/>
+            </a:pPr>
+            <a:r>
+              <a:rPr lang="en-US" sz="1900" dirty="0">
+                <a:solidFill>
+                  <a:srgbClr val="33413F"/>
+                </a:solidFill>
+                <a:latin typeface="Calibri" pitchFamily="34" charset="0"/>
+                <a:ea typeface="Calibri" pitchFamily="34" charset="-122"/>
+                <a:cs typeface="Calibri" pitchFamily="34" charset="-120"/>
+              </a:rPr>
+              <a:t>Gratis für dich</a:t>
+            </a:r>
+            <a:endParaRPr lang="en-US" sz="1900" dirty="0"/>
+          </a:p>
+        </p:txBody>
+      </p:sp>
+      <p:sp>
+        <p:nvSpPr>
+          <p:cNvPr id="7" name="Text 5"/>
+          <p:cNvSpPr txBox="1"/>
+          <p:nvPr/>
+        </p:nvSpPr>
+        <p:spPr>
+          <a:xfrm>
+            <a:off x="685800" y="5349240"/>
+            <a:ext cx="10789920" cy="777240"/>
+          </a:xfrm>
+          <a:prstGeom prst="rect">
+            <a:avLst/>
+          </a:prstGeom>
+          <a:noFill/>
+          <a:ln/>
+        </p:spPr>
+        <p:txBody>
+          <a:bodyPr wrap="square" rtlCol="0" anchor="ctr"/>
+          <a:lstStyle/>
+          <a:p>
+            <a:pPr indent="0" marL="0">
+              <a:buNone/>
+            </a:pPr>
+            <a:r>
+              <a:rPr lang="en-US" sz="1900" b="1" dirty="0">
+                <a:solidFill>
+                  <a:srgbClr val="D6832F"/>
+                </a:solidFill>
+                <a:latin typeface="Calibri" pitchFamily="34" charset="0"/>
+                <a:ea typeface="Calibri" pitchFamily="34" charset="-122"/>
+                <a:cs typeface="Calibri" pitchFamily="34" charset="-120"/>
+              </a:rPr>
+              <a:t>•  </a:t>
+            </a:r>
+            <a:pPr indent="0" marL="0">
+              <a:buNone/>
+            </a:pPr>
+            <a:r>
+              <a:rPr lang="en-US" sz="1900" dirty="0">
+                <a:solidFill>
+                  <a:srgbClr val="33413F"/>
+                </a:solidFill>
+                <a:latin typeface="Calibri" pitchFamily="34" charset="0"/>
+                <a:ea typeface="Calibri" pitchFamily="34" charset="-122"/>
+                <a:cs typeface="Calibri" pitchFamily="34" charset="-120"/>
+              </a:rPr>
+              <a:t>Mein Angebot</a:t>
+            </a:r>
+            <a:endParaRPr lang="en-US" sz="1900" dirty="0"/>
+          </a:p>
+        </p:txBody>
+      </p:sp>
+      <p:sp>
+        <p:nvSpPr>
+          <p:cNvPr id="8" name="Text 6"/>
+          <p:cNvSpPr txBox="1"/>
+          <p:nvPr/>
+        </p:nvSpPr>
+        <p:spPr>
+          <a:xfrm>
+            <a:off x="685800" y="5852160"/>
+            <a:ext cx="10789920" cy="548640"/>
+          </a:xfrm>
+          <a:prstGeom prst="rect">
+            <a:avLst/>
+          </a:prstGeom>
+          <a:noFill/>
+          <a:ln/>
+        </p:spPr>
+        <p:txBody>
+          <a:bodyPr wrap="square" rtlCol="0" anchor="ctr"/>
+          <a:lstStyle/>
+          <a:p>
+            <a:pPr indent="0" marL="0">
+              <a:buNone/>
+            </a:pPr>
+            <a:r>
+              <a:rPr lang="en-US" sz="1500" i="1" dirty="0">
+                <a:solidFill>
+                  <a:srgbClr val="7A8B88"/>
+                </a:solidFill>
+                <a:latin typeface="Calibri" pitchFamily="34" charset="0"/>
+                <a:ea typeface="Calibri" pitchFamily="34" charset="-122"/>
+                <a:cs typeface="Calibri" pitchFamily="34" charset="-120"/>
+              </a:rPr>
+              <a:t>Mehr braucht am Anfang niemand. Wirklich niemand.</a:t>
+            </a:r>
+            <a:endParaRPr lang="en-US" sz="1500" dirty="0"/>
           </a:p>
         </p:txBody>
       </p:sp>
@@ -8336,6 +8732,169 @@
 <file path=ppt/slides/slide26.xml><?xml version="1.0" encoding="utf-8"?>
 <p:sld xmlns:a="http://schemas.openxmlformats.org/drawingml/2006/main" xmlns:r="http://schemas.openxmlformats.org/officeDocument/2006/relationships" xmlns:p="http://schemas.openxmlformats.org/presentationml/2006/main">
   <p:cSld name="Slide 26">
+    <p:bg>
+      <p:bgPr>
+        <a:solidFill>
+          <a:srgbClr val="FFFFFF"/>
+        </a:solidFill>
+      </p:bgPr>
+    </p:bg>
+    <p:spTree>
+      <p:nvGrpSpPr>
+        <p:cNvPr id="1" name=""/>
+        <p:cNvGrpSpPr/>
+        <p:nvPr/>
+      </p:nvGrpSpPr>
+      <p:grpSpPr>
+        <a:xfrm>
+          <a:off x="0" y="0"/>
+          <a:ext cx="0" cy="0"/>
+          <a:chOff x="0" y="0"/>
+          <a:chExt cx="0" cy="0"/>
+        </a:xfrm>
+      </p:grpSpPr>
+      <p:sp>
+        <p:nvSpPr>
+          <p:cNvPr id="2" name="Text 0"/>
+          <p:cNvSpPr txBox="1"/>
+          <p:nvPr/>
+        </p:nvSpPr>
+        <p:spPr>
+          <a:xfrm>
+            <a:off x="685800" y="685800"/>
+            <a:ext cx="10789920" cy="457200"/>
+          </a:xfrm>
+          <a:prstGeom prst="rect">
+            <a:avLst/>
+          </a:prstGeom>
+          <a:noFill/>
+          <a:ln/>
+        </p:spPr>
+        <p:txBody>
+          <a:bodyPr wrap="square" rtlCol="0" anchor="ctr"/>
+          <a:lstStyle/>
+          <a:p>
+            <a:pPr indent="0" marL="0">
+              <a:buNone/>
+            </a:pPr>
+            <a:r>
+              <a:rPr lang="en-US" sz="1600" b="1" spc="300" kern="0" dirty="0">
+                <a:solidFill>
+                  <a:srgbClr val="2F6F6F"/>
+                </a:solidFill>
+                <a:latin typeface="Calibri" pitchFamily="34" charset="0"/>
+                <a:ea typeface="Calibri" pitchFamily="34" charset="-122"/>
+                <a:cs typeface="Calibri" pitchFamily="34" charset="-120"/>
+              </a:rPr>
+              <a:t>DAS HENNE-EI-PROBLEM</a:t>
+            </a:r>
+            <a:endParaRPr lang="en-US" sz="1600" dirty="0"/>
+          </a:p>
+        </p:txBody>
+      </p:sp>
+      <p:sp>
+        <p:nvSpPr>
+          <p:cNvPr id="3" name="Text 1"/>
+          <p:cNvSpPr txBox="1"/>
+          <p:nvPr/>
+        </p:nvSpPr>
+        <p:spPr>
+          <a:xfrm>
+            <a:off x="685800" y="1691640"/>
+            <a:ext cx="10789920" cy="777240"/>
+          </a:xfrm>
+          <a:prstGeom prst="rect">
+            <a:avLst/>
+          </a:prstGeom>
+          <a:noFill/>
+          <a:ln/>
+        </p:spPr>
+        <p:txBody>
+          <a:bodyPr wrap="square" rtlCol="0" anchor="ctr"/>
+          <a:lstStyle/>
+          <a:p>
+            <a:pPr indent="0" marL="0">
+              <a:buNone/>
+            </a:pPr>
+            <a:r>
+              <a:rPr lang="en-US" sz="1900" dirty="0">
+                <a:solidFill>
+                  <a:srgbClr val="33413F"/>
+                </a:solidFill>
+                <a:latin typeface="Calibri" pitchFamily="34" charset="0"/>
+                <a:ea typeface="Calibri" pitchFamily="34" charset="-122"/>
+                <a:cs typeface="Calibri" pitchFamily="34" charset="-120"/>
+              </a:rPr>
+              <a:t>Für ein Highlight brauchst du eine Story. Für eine Story brauchst du Mut.</a:t>
+            </a:r>
+            <a:endParaRPr lang="en-US" sz="1900" dirty="0"/>
+          </a:p>
+        </p:txBody>
+      </p:sp>
+      <p:sp>
+        <p:nvSpPr>
+          <p:cNvPr id="4" name="Text 2"/>
+          <p:cNvSpPr txBox="1"/>
+          <p:nvPr/>
+        </p:nvSpPr>
+        <p:spPr>
+          <a:xfrm>
+            <a:off x="685800" y="2606040"/>
+            <a:ext cx="10789920" cy="777240"/>
+          </a:xfrm>
+          <a:prstGeom prst="rect">
+            <a:avLst/>
+          </a:prstGeom>
+          <a:noFill/>
+          <a:ln/>
+        </p:spPr>
+        <p:txBody>
+          <a:bodyPr wrap="square" rtlCol="0" anchor="ctr"/>
+          <a:lstStyle/>
+          <a:p>
+            <a:pPr indent="0" marL="0">
+              <a:buNone/>
+            </a:pPr>
+            <a:r>
+              <a:rPr lang="en-US" sz="1900" b="1" dirty="0">
+                <a:solidFill>
+                  <a:srgbClr val="D6832F"/>
+                </a:solidFill>
+                <a:latin typeface="Calibri" pitchFamily="34" charset="0"/>
+                <a:ea typeface="Calibri" pitchFamily="34" charset="-122"/>
+                <a:cs typeface="Calibri" pitchFamily="34" charset="-120"/>
+              </a:rPr>
+              <a:t>Lösung:  </a:t>
+            </a:r>
+            <a:pPr indent="0" marL="0">
+              <a:buNone/>
+            </a:pPr>
+            <a:r>
+              <a:rPr lang="en-US" sz="1900" dirty="0">
+                <a:solidFill>
+                  <a:srgbClr val="33413F"/>
+                </a:solidFill>
+                <a:latin typeface="Calibri" pitchFamily="34" charset="0"/>
+                <a:ea typeface="Calibri" pitchFamily="34" charset="-122"/>
+                <a:cs typeface="Calibri" pitchFamily="34" charset="-120"/>
+              </a:rPr>
+              <a:t>Du postest fünf einfache Stories hintereinander und packst sie sofort in die Ordner.</a:t>
+            </a:r>
+            <a:endParaRPr lang="en-US" sz="1900" dirty="0"/>
+          </a:p>
+        </p:txBody>
+      </p:sp>
+    </p:spTree>
+  </p:cSld>
+  <p:clrMapOvr>
+    <a:masterClrMapping/>
+  </p:clrMapOvr>
+</p:sld>
+</file>
+
+<file path=ppt/slides/slide27.xml><?xml version="1.0" encoding="utf-8"?>
+<p:sld xmlns:a="http://schemas.openxmlformats.org/drawingml/2006/main" xmlns:r="http://schemas.openxmlformats.org/officeDocument/2006/relationships" xmlns:p="http://schemas.openxmlformats.org/presentationml/2006/main">
+  <p:cSld name="Slide 27">
     <p:bg>
       <p:bgPr>
         <a:solidFill>
@@ -8976,181 +9535,6 @@
               <a:t>Zeigen: Instagram lässt mehrere Links direkt zu — ohne Zusatztool</a:t>
             </a:r>
             <a:endParaRPr lang="en-US" sz="1650" dirty="0"/>
-          </a:p>
-        </p:txBody>
-      </p:sp>
-    </p:spTree>
-  </p:cSld>
-  <p:clrMapOvr>
-    <a:masterClrMapping/>
-  </p:clrMapOvr>
-</p:sld>
-</file>
-
-<file path=ppt/slides/slide27.xml><?xml version="1.0" encoding="utf-8"?>
-<p:sld xmlns:a="http://schemas.openxmlformats.org/drawingml/2006/main" xmlns:r="http://schemas.openxmlformats.org/officeDocument/2006/relationships" xmlns:p="http://schemas.openxmlformats.org/presentationml/2006/main">
-  <p:cSld name="Slide 27">
-    <p:bg>
-      <p:bgPr>
-        <a:solidFill>
-          <a:srgbClr val="FFFFFF"/>
-        </a:solidFill>
-      </p:bgPr>
-    </p:bg>
-    <p:spTree>
-      <p:nvGrpSpPr>
-        <p:cNvPr id="1" name=""/>
-        <p:cNvGrpSpPr/>
-        <p:nvPr/>
-      </p:nvGrpSpPr>
-      <p:grpSpPr>
-        <a:xfrm>
-          <a:off x="0" y="0"/>
-          <a:ext cx="0" cy="0"/>
-          <a:chOff x="0" y="0"/>
-          <a:chExt cx="0" cy="0"/>
-        </a:xfrm>
-      </p:grpSpPr>
-      <p:sp>
-        <p:nvSpPr>
-          <p:cNvPr id="2" name="Shape 0"/>
-          <p:cNvSpPr/>
-          <p:nvPr/>
-        </p:nvSpPr>
-        <p:spPr>
-          <a:xfrm>
-            <a:off x="685800" y="1371600"/>
-            <a:ext cx="10789920" cy="3931920"/>
-          </a:xfrm>
-          <a:prstGeom prst="roundRect">
-            <a:avLst>
-              <a:gd name="adj" fmla="val 2791"/>
-            </a:avLst>
-          </a:prstGeom>
-          <a:solidFill>
-            <a:srgbClr val="EAF1F0"/>
-          </a:solidFill>
-          <a:ln/>
-        </p:spPr>
-      </p:sp>
-      <p:sp>
-        <p:nvSpPr>
-          <p:cNvPr id="3" name="Text 1"/>
-          <p:cNvSpPr txBox="1"/>
-          <p:nvPr/>
-        </p:nvSpPr>
-        <p:spPr>
-          <a:xfrm>
-            <a:off x="1234440" y="1828800"/>
-            <a:ext cx="9692640" cy="457200"/>
-          </a:xfrm>
-          <a:prstGeom prst="rect">
-            <a:avLst/>
-          </a:prstGeom>
-          <a:noFill/>
-          <a:ln/>
-        </p:spPr>
-        <p:txBody>
-          <a:bodyPr wrap="square" rtlCol="0" anchor="ctr"/>
-          <a:lstStyle/>
-          <a:p>
-            <a:pPr indent="0" marL="0">
-              <a:buNone/>
-            </a:pPr>
-            <a:r>
-              <a:rPr lang="en-US" sz="1700" b="1" spc="300" kern="0" dirty="0">
-                <a:solidFill>
-                  <a:srgbClr val="D6832F"/>
-                </a:solidFill>
-                <a:latin typeface="Calibri" pitchFamily="34" charset="0"/>
-                <a:ea typeface="Calibri" pitchFamily="34" charset="-122"/>
-                <a:cs typeface="Calibri" pitchFamily="34" charset="-120"/>
-              </a:rPr>
-              <a:t>DEINE AUFGABE</a:t>
-            </a:r>
-            <a:endParaRPr lang="en-US" sz="1700" dirty="0"/>
-          </a:p>
-        </p:txBody>
-      </p:sp>
-      <p:sp>
-        <p:nvSpPr>
-          <p:cNvPr id="4" name="Text 2"/>
-          <p:cNvSpPr txBox="1"/>
-          <p:nvPr/>
-        </p:nvSpPr>
-        <p:spPr>
-          <a:xfrm>
-            <a:off x="1234440" y="2377440"/>
-            <a:ext cx="9692640" cy="1645920"/>
-          </a:xfrm>
-          <a:prstGeom prst="rect">
-            <a:avLst/>
-          </a:prstGeom>
-          <a:noFill/>
-          <a:ln/>
-        </p:spPr>
-        <p:txBody>
-          <a:bodyPr wrap="square" rtlCol="0" anchor="t"/>
-          <a:lstStyle/>
-          <a:p>
-            <a:pPr indent="0" marL="0">
-              <a:buNone/>
-            </a:pPr>
-            <a:r>
-              <a:rPr lang="en-US" sz="2600" b="1" dirty="0">
-                <a:solidFill>
-                  <a:srgbClr val="1E3A4C"/>
-                </a:solidFill>
-                <a:latin typeface="Cambria" pitchFamily="34" charset="0"/>
-                <a:ea typeface="Cambria" pitchFamily="34" charset="-122"/>
-                <a:cs typeface="Cambria" pitchFamily="34" charset="-120"/>
-              </a:rPr>
-              <a:t>Fünf Highlights angelegt, Link steht.</a:t>
-            </a:r>
-            <a:endParaRPr lang="en-US" sz="2600" dirty="0"/>
-          </a:p>
-        </p:txBody>
-      </p:sp>
-      <p:sp>
-        <p:nvSpPr>
-          <p:cNvPr id="5" name="Text 3"/>
-          <p:cNvSpPr txBox="1"/>
-          <p:nvPr/>
-        </p:nvSpPr>
-        <p:spPr>
-          <a:xfrm>
-            <a:off x="1234440" y="4434840"/>
-            <a:ext cx="4206240" cy="384048"/>
-          </a:xfrm>
-          <a:prstGeom prst="roundRect">
-            <a:avLst>
-              <a:gd name="adj" fmla="val 21429"/>
-            </a:avLst>
-          </a:prstGeom>
-          <a:solidFill>
-            <a:srgbClr val="D6832F"/>
-          </a:solidFill>
-          <a:ln/>
-        </p:spPr>
-        <p:txBody>
-          <a:bodyPr wrap="square" lIns="0" tIns="0" rIns="0" bIns="0" rtlCol="0" anchor="ctr"/>
-          <a:lstStyle/>
-          <a:p>
-            <a:pPr algn="ctr" indent="0" marL="0">
-              <a:buNone/>
-            </a:pPr>
-            <a:r>
-              <a:rPr lang="en-US" sz="1200" b="1" spc="200" kern="0" dirty="0">
-                <a:solidFill>
-                  <a:srgbClr val="FFFFFF"/>
-                </a:solidFill>
-                <a:latin typeface="Calibri" pitchFamily="34" charset="0"/>
-                <a:ea typeface="Calibri" pitchFamily="34" charset="-122"/>
-                <a:cs typeface="Calibri" pitchFamily="34" charset="-120"/>
-              </a:rPr>
-              <a:t>WERKSTATT · Station „Schaufenster“</a:t>
-            </a:r>
-            <a:endParaRPr lang="en-US" sz="1200" dirty="0"/>
           </a:p>
         </p:txBody>
       </p:sp>
@@ -9188,14 +9572,36 @@
       </p:grpSpPr>
       <p:sp>
         <p:nvSpPr>
-          <p:cNvPr id="2" name="Text 0"/>
-          <p:cNvSpPr txBox="1"/>
-          <p:nvPr/>
-        </p:nvSpPr>
-        <p:spPr>
-          <a:xfrm>
-            <a:off x="685800" y="2468880"/>
-            <a:ext cx="10789920" cy="457200"/>
+          <p:cNvPr id="2" name="Shape 0"/>
+          <p:cNvSpPr/>
+          <p:nvPr/>
+        </p:nvSpPr>
+        <p:spPr>
+          <a:xfrm>
+            <a:off x="685800" y="1371600"/>
+            <a:ext cx="10789920" cy="3931920"/>
+          </a:xfrm>
+          <a:prstGeom prst="roundRect">
+            <a:avLst>
+              <a:gd name="adj" fmla="val 2791"/>
+            </a:avLst>
+          </a:prstGeom>
+          <a:solidFill>
+            <a:srgbClr val="EAF1F0"/>
+          </a:solidFill>
+          <a:ln/>
+        </p:spPr>
+      </p:sp>
+      <p:sp>
+        <p:nvSpPr>
+          <p:cNvPr id="3" name="Text 1"/>
+          <p:cNvSpPr txBox="1"/>
+          <p:nvPr/>
+        </p:nvSpPr>
+        <p:spPr>
+          <a:xfrm>
+            <a:off x="1234440" y="1828800"/>
+            <a:ext cx="9692640" cy="457200"/>
           </a:xfrm>
           <a:prstGeom prst="rect">
             <a:avLst/>
@@ -9211,30 +9617,30 @@
               <a:buNone/>
             </a:pPr>
             <a:r>
-              <a:rPr lang="en-US" sz="1600" b="1" spc="300" kern="0" dirty="0">
-                <a:solidFill>
-                  <a:srgbClr val="2F6F6F"/>
+              <a:rPr lang="en-US" sz="1700" b="1" spc="300" kern="0" dirty="0">
+                <a:solidFill>
+                  <a:srgbClr val="D6832F"/>
                 </a:solidFill>
                 <a:latin typeface="Calibri" pitchFamily="34" charset="0"/>
                 <a:ea typeface="Calibri" pitchFamily="34" charset="-122"/>
                 <a:cs typeface="Calibri" pitchFamily="34" charset="-120"/>
               </a:rPr>
-              <a:t>ALS NÄCHSTES</a:t>
-            </a:r>
-            <a:endParaRPr lang="en-US" sz="1600" dirty="0"/>
-          </a:p>
-        </p:txBody>
-      </p:sp>
-      <p:sp>
-        <p:nvSpPr>
-          <p:cNvPr id="3" name="Text 1"/>
-          <p:cNvSpPr txBox="1"/>
-          <p:nvPr/>
-        </p:nvSpPr>
-        <p:spPr>
-          <a:xfrm>
-            <a:off x="685800" y="2971800"/>
-            <a:ext cx="10789920" cy="1463040"/>
+              <a:t>DEINE AUFGABE</a:t>
+            </a:r>
+            <a:endParaRPr lang="en-US" sz="1700" dirty="0"/>
+          </a:p>
+        </p:txBody>
+      </p:sp>
+      <p:sp>
+        <p:nvSpPr>
+          <p:cNvPr id="4" name="Text 2"/>
+          <p:cNvSpPr txBox="1"/>
+          <p:nvPr/>
+        </p:nvSpPr>
+        <p:spPr>
+          <a:xfrm>
+            <a:off x="1234440" y="2377440"/>
+            <a:ext cx="9692640" cy="1645920"/>
           </a:xfrm>
           <a:prstGeom prst="rect">
             <a:avLst/>
@@ -9250,7 +9656,7 @@
               <a:buNone/>
             </a:pPr>
             <a:r>
-              <a:rPr lang="en-US" sz="3000" b="1" dirty="0">
+              <a:rPr lang="en-US" sz="2600" b="1" dirty="0">
                 <a:solidFill>
                   <a:srgbClr val="1E3A4C"/>
                 </a:solidFill>
@@ -9258,9 +9664,52 @@
                 <a:ea typeface="Cambria" pitchFamily="34" charset="-122"/>
                 <a:cs typeface="Cambria" pitchFamily="34" charset="-120"/>
               </a:rPr>
-              <a:t>Eine letzte Sache, bevor wir posten: dein Konto absichern.</a:t>
-            </a:r>
-            <a:endParaRPr lang="en-US" sz="3000" dirty="0"/>
+              <a:t>Fünf Highlights angelegt, Link steht.</a:t>
+            </a:r>
+            <a:endParaRPr lang="en-US" sz="2600" dirty="0"/>
+          </a:p>
+        </p:txBody>
+      </p:sp>
+      <p:sp>
+        <p:nvSpPr>
+          <p:cNvPr id="5" name="Text 3"/>
+          <p:cNvSpPr txBox="1"/>
+          <p:nvPr/>
+        </p:nvSpPr>
+        <p:spPr>
+          <a:xfrm>
+            <a:off x="1234440" y="4434840"/>
+            <a:ext cx="4206240" cy="384048"/>
+          </a:xfrm>
+          <a:prstGeom prst="roundRect">
+            <a:avLst>
+              <a:gd name="adj" fmla="val 21429"/>
+            </a:avLst>
+          </a:prstGeom>
+          <a:solidFill>
+            <a:srgbClr val="D6832F"/>
+          </a:solidFill>
+          <a:ln/>
+        </p:spPr>
+        <p:txBody>
+          <a:bodyPr wrap="square" lIns="0" tIns="0" rIns="0" bIns="0" rtlCol="0" anchor="ctr"/>
+          <a:lstStyle/>
+          <a:p>
+            <a:pPr algn="ctr" indent="0" marL="0">
+              <a:buNone/>
+            </a:pPr>
+            <a:r>
+              <a:rPr lang="en-US" sz="1200" b="1" spc="200" kern="0" dirty="0">
+                <a:solidFill>
+                  <a:srgbClr val="FFFFFF"/>
+                </a:solidFill>
+                <a:latin typeface="Calibri" pitchFamily="34" charset="0"/>
+                <a:ea typeface="Calibri" pitchFamily="34" charset="-122"/>
+                <a:cs typeface="Calibri" pitchFamily="34" charset="-120"/>
+              </a:rPr>
+              <a:t>WERKSTATT · Station „Schaufenster“</a:t>
+            </a:r>
+            <a:endParaRPr lang="en-US" sz="1200" dirty="0"/>
           </a:p>
         </p:txBody>
       </p:sp>
@@ -9304,116 +9753,73 @@
         </p:nvSpPr>
         <p:spPr>
           <a:xfrm>
-            <a:off x="8412480" y="365760"/>
-            <a:ext cx="3291840" cy="2926080"/>
-          </a:xfrm>
-          <a:prstGeom prst="rect">
-            <a:avLst/>
-          </a:prstGeom>
-          <a:noFill/>
-          <a:ln/>
-        </p:spPr>
-        <p:txBody>
-          <a:bodyPr wrap="square" lIns="0" tIns="0" rIns="0" bIns="0" rtlCol="0" anchor="t"/>
-          <a:lstStyle/>
-          <a:p>
-            <a:pPr algn="r" indent="0" marL="0">
-              <a:buNone/>
-            </a:pPr>
-            <a:r>
-              <a:rPr lang="en-US" sz="20000" b="1" dirty="0">
-                <a:solidFill>
-                  <a:srgbClr val="EAF1F0"/>
+            <a:off x="685800" y="2468880"/>
+            <a:ext cx="10789920" cy="457200"/>
+          </a:xfrm>
+          <a:prstGeom prst="rect">
+            <a:avLst/>
+          </a:prstGeom>
+          <a:noFill/>
+          <a:ln/>
+        </p:spPr>
+        <p:txBody>
+          <a:bodyPr wrap="square" rtlCol="0" anchor="ctr"/>
+          <a:lstStyle/>
+          <a:p>
+            <a:pPr indent="0" marL="0">
+              <a:buNone/>
+            </a:pPr>
+            <a:r>
+              <a:rPr lang="en-US" sz="1600" b="1" spc="300" kern="0" dirty="0">
+                <a:solidFill>
+                  <a:srgbClr val="2F6F6F"/>
+                </a:solidFill>
+                <a:latin typeface="Calibri" pitchFamily="34" charset="0"/>
+                <a:ea typeface="Calibri" pitchFamily="34" charset="-122"/>
+                <a:cs typeface="Calibri" pitchFamily="34" charset="-120"/>
+              </a:rPr>
+              <a:t>ALS NÄCHSTES</a:t>
+            </a:r>
+            <a:endParaRPr lang="en-US" sz="1600" dirty="0"/>
+          </a:p>
+        </p:txBody>
+      </p:sp>
+      <p:sp>
+        <p:nvSpPr>
+          <p:cNvPr id="3" name="Text 1"/>
+          <p:cNvSpPr txBox="1"/>
+          <p:nvPr/>
+        </p:nvSpPr>
+        <p:spPr>
+          <a:xfrm>
+            <a:off x="685800" y="2971800"/>
+            <a:ext cx="10789920" cy="1463040"/>
+          </a:xfrm>
+          <a:prstGeom prst="rect">
+            <a:avLst/>
+          </a:prstGeom>
+          <a:noFill/>
+          <a:ln/>
+        </p:spPr>
+        <p:txBody>
+          <a:bodyPr wrap="square" rtlCol="0" anchor="t"/>
+          <a:lstStyle/>
+          <a:p>
+            <a:pPr indent="0" marL="0">
+              <a:buNone/>
+            </a:pPr>
+            <a:r>
+              <a:rPr lang="en-US" sz="3000" b="1" dirty="0">
+                <a:solidFill>
+                  <a:srgbClr val="1E3A4C"/>
                 </a:solidFill>
                 <a:latin typeface="Cambria" pitchFamily="34" charset="0"/>
                 <a:ea typeface="Cambria" pitchFamily="34" charset="-122"/>
                 <a:cs typeface="Cambria" pitchFamily="34" charset="-120"/>
               </a:rPr>
-              <a:t>1.5</a:t>
-            </a:r>
-            <a:endParaRPr lang="en-US" sz="20000" dirty="0"/>
-          </a:p>
-        </p:txBody>
-      </p:sp>
-      <p:sp>
-        <p:nvSpPr>
-          <p:cNvPr id="3" name="Text 1"/>
-          <p:cNvSpPr txBox="1"/>
-          <p:nvPr/>
-        </p:nvSpPr>
-        <p:spPr>
-          <a:xfrm>
-            <a:off x="685800" y="777240"/>
-            <a:ext cx="1920240" cy="384048"/>
-          </a:xfrm>
-          <a:prstGeom prst="roundRect">
-            <a:avLst>
-              <a:gd name="adj" fmla="val 21429"/>
-            </a:avLst>
-          </a:prstGeom>
-          <a:solidFill>
-            <a:srgbClr val="2F6F6F"/>
-          </a:solidFill>
-          <a:ln/>
-        </p:spPr>
-        <p:txBody>
-          <a:bodyPr wrap="square" lIns="0" tIns="0" rIns="0" bIns="0" rtlCol="0" anchor="ctr"/>
-          <a:lstStyle/>
-          <a:p>
-            <a:pPr algn="ctr" indent="0" marL="0">
-              <a:buNone/>
-            </a:pPr>
-            <a:r>
-              <a:rPr lang="en-US" sz="1200" b="1" spc="200" kern="0" dirty="0">
-                <a:solidFill>
-                  <a:srgbClr val="FFFFFF"/>
-                </a:solidFill>
-                <a:latin typeface="Calibri" pitchFamily="34" charset="0"/>
-                <a:ea typeface="Calibri" pitchFamily="34" charset="-122"/>
-                <a:cs typeface="Calibri" pitchFamily="34" charset="-120"/>
-              </a:rPr>
-              <a:t>LEKTION 1.5</a:t>
-            </a:r>
-            <a:endParaRPr lang="en-US" sz="1200" dirty="0"/>
-          </a:p>
-        </p:txBody>
-      </p:sp>
-      <p:sp>
-        <p:nvSpPr>
-          <p:cNvPr id="4" name="Text 2"/>
-          <p:cNvSpPr txBox="1"/>
-          <p:nvPr/>
-        </p:nvSpPr>
-        <p:spPr>
-          <a:xfrm>
-            <a:off x="685800" y="1554480"/>
-            <a:ext cx="7863840" cy="2377440"/>
-          </a:xfrm>
-          <a:prstGeom prst="rect">
-            <a:avLst/>
-          </a:prstGeom>
-          <a:noFill/>
-          <a:ln/>
-        </p:spPr>
-        <p:txBody>
-          <a:bodyPr wrap="square" rtlCol="0" anchor="t"/>
-          <a:lstStyle/>
-          <a:p>
-            <a:pPr indent="0" marL="0">
-              <a:buNone/>
-            </a:pPr>
-            <a:r>
-              <a:rPr lang="en-US" sz="3800" b="1" dirty="0">
-                <a:solidFill>
-                  <a:srgbClr val="1E3A4C"/>
-                </a:solidFill>
-                <a:latin typeface="Cambria" pitchFamily="34" charset="0"/>
-                <a:ea typeface="Cambria" pitchFamily="34" charset="-122"/>
-                <a:cs typeface="Cambria" pitchFamily="34" charset="-120"/>
-              </a:rPr>
-              <a:t>Fünf Minuten, damit dir dein Konto nicht abhandenkommt</a:t>
-            </a:r>
-            <a:endParaRPr lang="en-US" sz="3800" dirty="0"/>
+              <a:t>Eine letzte Sache, bevor wir posten: dein Konto absichern.</a:t>
+            </a:r>
+            <a:endParaRPr lang="en-US" sz="3000" dirty="0"/>
           </a:p>
         </p:txBody>
       </p:sp>
@@ -9822,56 +10228,79 @@
         </p:nvSpPr>
         <p:spPr>
           <a:xfrm>
-            <a:off x="685800" y="685800"/>
-            <a:ext cx="10789920" cy="457200"/>
-          </a:xfrm>
-          <a:prstGeom prst="rect">
-            <a:avLst/>
-          </a:prstGeom>
-          <a:noFill/>
-          <a:ln/>
-        </p:spPr>
-        <p:txBody>
-          <a:bodyPr wrap="square" rtlCol="0" anchor="ctr"/>
-          <a:lstStyle/>
-          <a:p>
-            <a:pPr indent="0" marL="0">
-              <a:buNone/>
-            </a:pPr>
-            <a:r>
-              <a:rPr lang="en-US" sz="1600" b="1" spc="300" kern="0" dirty="0">
-                <a:solidFill>
-                  <a:srgbClr val="2F6F6F"/>
+            <a:off x="8412480" y="365760"/>
+            <a:ext cx="3291840" cy="2926080"/>
+          </a:xfrm>
+          <a:prstGeom prst="rect">
+            <a:avLst/>
+          </a:prstGeom>
+          <a:noFill/>
+          <a:ln/>
+        </p:spPr>
+        <p:txBody>
+          <a:bodyPr wrap="square" lIns="0" tIns="0" rIns="0" bIns="0" rtlCol="0" anchor="t"/>
+          <a:lstStyle/>
+          <a:p>
+            <a:pPr algn="r" indent="0" marL="0">
+              <a:buNone/>
+            </a:pPr>
+            <a:r>
+              <a:rPr lang="en-US" sz="20000" b="1" dirty="0">
+                <a:solidFill>
+                  <a:srgbClr val="EAF1F0"/>
+                </a:solidFill>
+                <a:latin typeface="Cambria" pitchFamily="34" charset="0"/>
+                <a:ea typeface="Cambria" pitchFamily="34" charset="-122"/>
+                <a:cs typeface="Cambria" pitchFamily="34" charset="-120"/>
+              </a:rPr>
+              <a:t>1.5</a:t>
+            </a:r>
+            <a:endParaRPr lang="en-US" sz="20000" dirty="0"/>
+          </a:p>
+        </p:txBody>
+      </p:sp>
+      <p:sp>
+        <p:nvSpPr>
+          <p:cNvPr id="3" name="Text 1"/>
+          <p:cNvSpPr txBox="1"/>
+          <p:nvPr/>
+        </p:nvSpPr>
+        <p:spPr>
+          <a:xfrm>
+            <a:off x="685800" y="777240"/>
+            <a:ext cx="1920240" cy="384048"/>
+          </a:xfrm>
+          <a:prstGeom prst="roundRect">
+            <a:avLst>
+              <a:gd name="adj" fmla="val 21429"/>
+            </a:avLst>
+          </a:prstGeom>
+          <a:solidFill>
+            <a:srgbClr val="2F6F6F"/>
+          </a:solidFill>
+          <a:ln/>
+        </p:spPr>
+        <p:txBody>
+          <a:bodyPr wrap="square" lIns="0" tIns="0" rIns="0" bIns="0" rtlCol="0" anchor="ctr"/>
+          <a:lstStyle/>
+          <a:p>
+            <a:pPr algn="ctr" indent="0" marL="0">
+              <a:buNone/>
+            </a:pPr>
+            <a:r>
+              <a:rPr lang="en-US" sz="1200" b="1" spc="200" kern="0" dirty="0">
+                <a:solidFill>
+                  <a:srgbClr val="FFFFFF"/>
                 </a:solidFill>
                 <a:latin typeface="Calibri" pitchFamily="34" charset="0"/>
                 <a:ea typeface="Calibri" pitchFamily="34" charset="-122"/>
                 <a:cs typeface="Calibri" pitchFamily="34" charset="-120"/>
               </a:rPr>
-              <a:t>WAS DU LERNEN WIRST</a:t>
-            </a:r>
-            <a:endParaRPr lang="en-US" sz="1600" dirty="0"/>
-          </a:p>
-        </p:txBody>
-      </p:sp>
-      <p:sp>
-        <p:nvSpPr>
-          <p:cNvPr id="3" name="Shape 1"/>
-          <p:cNvSpPr/>
-          <p:nvPr/>
-        </p:nvSpPr>
-        <p:spPr>
-          <a:xfrm>
-            <a:off x="685800" y="1828800"/>
-            <a:ext cx="566928" cy="566928"/>
-          </a:xfrm>
-          <a:prstGeom prst="ellipse">
-            <a:avLst/>
-          </a:prstGeom>
-          <a:solidFill>
-            <a:srgbClr val="D6832F"/>
-          </a:solidFill>
-          <a:ln/>
-        </p:spPr>
+              <a:t>LEKTION 1.5</a:t>
+            </a:r>
+            <a:endParaRPr lang="en-US" sz="1200" dirty="0"/>
+          </a:p>
+        </p:txBody>
       </p:sp>
       <p:sp>
         <p:nvSpPr>
@@ -9881,269 +10310,34 @@
         </p:nvSpPr>
         <p:spPr>
           <a:xfrm>
-            <a:off x="685800" y="1828800"/>
-            <a:ext cx="566928" cy="566928"/>
-          </a:xfrm>
-          <a:prstGeom prst="rect">
-            <a:avLst/>
-          </a:prstGeom>
-          <a:noFill/>
-          <a:ln/>
-        </p:spPr>
-        <p:txBody>
-          <a:bodyPr wrap="square" lIns="0" tIns="0" rIns="0" bIns="0" rtlCol="0" anchor="ctr"/>
-          <a:lstStyle/>
-          <a:p>
-            <a:pPr algn="ctr" indent="0" marL="0">
-              <a:buNone/>
-            </a:pPr>
-            <a:r>
-              <a:rPr lang="en-US" sz="2200" b="1" dirty="0">
-                <a:solidFill>
-                  <a:srgbClr val="FFFFFF"/>
+            <a:off x="685800" y="1554480"/>
+            <a:ext cx="7863840" cy="2377440"/>
+          </a:xfrm>
+          <a:prstGeom prst="rect">
+            <a:avLst/>
+          </a:prstGeom>
+          <a:noFill/>
+          <a:ln/>
+        </p:spPr>
+        <p:txBody>
+          <a:bodyPr wrap="square" rtlCol="0" anchor="t"/>
+          <a:lstStyle/>
+          <a:p>
+            <a:pPr indent="0" marL="0">
+              <a:buNone/>
+            </a:pPr>
+            <a:r>
+              <a:rPr lang="en-US" sz="3800" b="1" dirty="0">
+                <a:solidFill>
+                  <a:srgbClr val="1E3A4C"/>
                 </a:solidFill>
                 <a:latin typeface="Cambria" pitchFamily="34" charset="0"/>
                 <a:ea typeface="Cambria" pitchFamily="34" charset="-122"/>
                 <a:cs typeface="Cambria" pitchFamily="34" charset="-120"/>
               </a:rPr>
-              <a:t>1</a:t>
-            </a:r>
-            <a:endParaRPr lang="en-US" sz="2200" dirty="0"/>
-          </a:p>
-        </p:txBody>
-      </p:sp>
-      <p:sp>
-        <p:nvSpPr>
-          <p:cNvPr id="5" name="Text 3"/>
-          <p:cNvSpPr txBox="1"/>
-          <p:nvPr/>
-        </p:nvSpPr>
-        <p:spPr>
-          <a:xfrm>
-            <a:off x="1554480" y="1783080"/>
-            <a:ext cx="9784080" cy="822960"/>
-          </a:xfrm>
-          <a:prstGeom prst="rect">
-            <a:avLst/>
-          </a:prstGeom>
-          <a:noFill/>
-          <a:ln/>
-        </p:spPr>
-        <p:txBody>
-          <a:bodyPr wrap="square" rtlCol="0" anchor="ctr"/>
-          <a:lstStyle/>
-          <a:p>
-            <a:pPr indent="0" marL="0">
-              <a:buNone/>
-            </a:pPr>
-            <a:r>
-              <a:rPr lang="en-US" sz="2000" dirty="0">
-                <a:solidFill>
-                  <a:srgbClr val="33413F"/>
-                </a:solidFill>
-                <a:latin typeface="Calibri" pitchFamily="34" charset="0"/>
-                <a:ea typeface="Calibri" pitchFamily="34" charset="-122"/>
-                <a:cs typeface="Calibri" pitchFamily="34" charset="-120"/>
-              </a:rPr>
-              <a:t>Zwei-Faktor einschalten</a:t>
-            </a:r>
-            <a:endParaRPr lang="en-US" sz="2000" dirty="0"/>
-          </a:p>
-        </p:txBody>
-      </p:sp>
-      <p:sp>
-        <p:nvSpPr>
-          <p:cNvPr id="6" name="Shape 4"/>
-          <p:cNvSpPr/>
-          <p:nvPr/>
-        </p:nvSpPr>
-        <p:spPr>
-          <a:xfrm>
-            <a:off x="685800" y="2971800"/>
-            <a:ext cx="566928" cy="566928"/>
-          </a:xfrm>
-          <a:prstGeom prst="ellipse">
-            <a:avLst/>
-          </a:prstGeom>
-          <a:solidFill>
-            <a:srgbClr val="D6832F"/>
-          </a:solidFill>
-          <a:ln/>
-        </p:spPr>
-      </p:sp>
-      <p:sp>
-        <p:nvSpPr>
-          <p:cNvPr id="7" name="Text 5"/>
-          <p:cNvSpPr txBox="1"/>
-          <p:nvPr/>
-        </p:nvSpPr>
-        <p:spPr>
-          <a:xfrm>
-            <a:off x="685800" y="2971800"/>
-            <a:ext cx="566928" cy="566928"/>
-          </a:xfrm>
-          <a:prstGeom prst="rect">
-            <a:avLst/>
-          </a:prstGeom>
-          <a:noFill/>
-          <a:ln/>
-        </p:spPr>
-        <p:txBody>
-          <a:bodyPr wrap="square" lIns="0" tIns="0" rIns="0" bIns="0" rtlCol="0" anchor="ctr"/>
-          <a:lstStyle/>
-          <a:p>
-            <a:pPr algn="ctr" indent="0" marL="0">
-              <a:buNone/>
-            </a:pPr>
-            <a:r>
-              <a:rPr lang="en-US" sz="2200" b="1" dirty="0">
-                <a:solidFill>
-                  <a:srgbClr val="FFFFFF"/>
-                </a:solidFill>
-                <a:latin typeface="Cambria" pitchFamily="34" charset="0"/>
-                <a:ea typeface="Cambria" pitchFamily="34" charset="-122"/>
-                <a:cs typeface="Cambria" pitchFamily="34" charset="-120"/>
-              </a:rPr>
-              <a:t>2</a:t>
-            </a:r>
-            <a:endParaRPr lang="en-US" sz="2200" dirty="0"/>
-          </a:p>
-        </p:txBody>
-      </p:sp>
-      <p:sp>
-        <p:nvSpPr>
-          <p:cNvPr id="8" name="Text 6"/>
-          <p:cNvSpPr txBox="1"/>
-          <p:nvPr/>
-        </p:nvSpPr>
-        <p:spPr>
-          <a:xfrm>
-            <a:off x="1554480" y="2926080"/>
-            <a:ext cx="9784080" cy="822960"/>
-          </a:xfrm>
-          <a:prstGeom prst="rect">
-            <a:avLst/>
-          </a:prstGeom>
-          <a:noFill/>
-          <a:ln/>
-        </p:spPr>
-        <p:txBody>
-          <a:bodyPr wrap="square" rtlCol="0" anchor="ctr"/>
-          <a:lstStyle/>
-          <a:p>
-            <a:pPr indent="0" marL="0">
-              <a:buNone/>
-            </a:pPr>
-            <a:r>
-              <a:rPr lang="en-US" sz="2000" dirty="0">
-                <a:solidFill>
-                  <a:srgbClr val="33413F"/>
-                </a:solidFill>
-                <a:latin typeface="Calibri" pitchFamily="34" charset="0"/>
-                <a:ea typeface="Calibri" pitchFamily="34" charset="-122"/>
-                <a:cs typeface="Calibri" pitchFamily="34" charset="-120"/>
-              </a:rPr>
-              <a:t>Wiederherstellungscodes sichern</a:t>
-            </a:r>
-            <a:endParaRPr lang="en-US" sz="2000" dirty="0"/>
-          </a:p>
-        </p:txBody>
-      </p:sp>
-      <p:sp>
-        <p:nvSpPr>
-          <p:cNvPr id="9" name="Shape 7"/>
-          <p:cNvSpPr/>
-          <p:nvPr/>
-        </p:nvSpPr>
-        <p:spPr>
-          <a:xfrm>
-            <a:off x="685800" y="4114800"/>
-            <a:ext cx="566928" cy="566928"/>
-          </a:xfrm>
-          <a:prstGeom prst="ellipse">
-            <a:avLst/>
-          </a:prstGeom>
-          <a:solidFill>
-            <a:srgbClr val="D6832F"/>
-          </a:solidFill>
-          <a:ln/>
-        </p:spPr>
-      </p:sp>
-      <p:sp>
-        <p:nvSpPr>
-          <p:cNvPr id="10" name="Text 8"/>
-          <p:cNvSpPr txBox="1"/>
-          <p:nvPr/>
-        </p:nvSpPr>
-        <p:spPr>
-          <a:xfrm>
-            <a:off x="685800" y="4114800"/>
-            <a:ext cx="566928" cy="566928"/>
-          </a:xfrm>
-          <a:prstGeom prst="rect">
-            <a:avLst/>
-          </a:prstGeom>
-          <a:noFill/>
-          <a:ln/>
-        </p:spPr>
-        <p:txBody>
-          <a:bodyPr wrap="square" lIns="0" tIns="0" rIns="0" bIns="0" rtlCol="0" anchor="ctr"/>
-          <a:lstStyle/>
-          <a:p>
-            <a:pPr algn="ctr" indent="0" marL="0">
-              <a:buNone/>
-            </a:pPr>
-            <a:r>
-              <a:rPr lang="en-US" sz="2200" b="1" dirty="0">
-                <a:solidFill>
-                  <a:srgbClr val="FFFFFF"/>
-                </a:solidFill>
-                <a:latin typeface="Cambria" pitchFamily="34" charset="0"/>
-                <a:ea typeface="Cambria" pitchFamily="34" charset="-122"/>
-                <a:cs typeface="Cambria" pitchFamily="34" charset="-120"/>
-              </a:rPr>
-              <a:t>3</a:t>
-            </a:r>
-            <a:endParaRPr lang="en-US" sz="2200" dirty="0"/>
-          </a:p>
-        </p:txBody>
-      </p:sp>
-      <p:sp>
-        <p:nvSpPr>
-          <p:cNvPr id="11" name="Text 9"/>
-          <p:cNvSpPr txBox="1"/>
-          <p:nvPr/>
-        </p:nvSpPr>
-        <p:spPr>
-          <a:xfrm>
-            <a:off x="1554480" y="4069080"/>
-            <a:ext cx="9784080" cy="822960"/>
-          </a:xfrm>
-          <a:prstGeom prst="rect">
-            <a:avLst/>
-          </a:prstGeom>
-          <a:noFill/>
-          <a:ln/>
-        </p:spPr>
-        <p:txBody>
-          <a:bodyPr wrap="square" rtlCol="0" anchor="ctr"/>
-          <a:lstStyle/>
-          <a:p>
-            <a:pPr indent="0" marL="0">
-              <a:buNone/>
-            </a:pPr>
-            <a:r>
-              <a:rPr lang="en-US" sz="2000" dirty="0">
-                <a:solidFill>
-                  <a:srgbClr val="33413F"/>
-                </a:solidFill>
-                <a:latin typeface="Calibri" pitchFamily="34" charset="0"/>
-                <a:ea typeface="Calibri" pitchFamily="34" charset="-122"/>
-                <a:cs typeface="Calibri" pitchFamily="34" charset="-120"/>
-              </a:rPr>
-              <a:t>Woran du eine gefälschte Nachricht von „Instagram“ erkennst</a:t>
-            </a:r>
-            <a:endParaRPr lang="en-US" sz="2000" dirty="0"/>
+              <a:t>Fünf Minuten, damit dir dein Konto nicht abhandenkommt</a:t>
+            </a:r>
+            <a:endParaRPr lang="en-US" sz="3800" dirty="0"/>
           </a:p>
         </p:txBody>
       </p:sp>
@@ -10212,7 +10406,7 @@
                 <a:ea typeface="Calibri" pitchFamily="34" charset="-122"/>
                 <a:cs typeface="Calibri" pitchFamily="34" charset="-120"/>
               </a:rPr>
-              <a:t>DIE DREI REGELN</a:t>
+              <a:t>WAS DU LERNEN WIRST</a:t>
             </a:r>
             <a:endParaRPr lang="en-US" sz="1600" dirty="0"/>
           </a:p>
@@ -10226,14 +10420,14 @@
         </p:nvSpPr>
         <p:spPr>
           <a:xfrm>
-            <a:off x="685800" y="1737360"/>
-            <a:ext cx="502920" cy="502920"/>
+            <a:off x="685800" y="1828800"/>
+            <a:ext cx="566928" cy="566928"/>
           </a:xfrm>
           <a:prstGeom prst="ellipse">
             <a:avLst/>
           </a:prstGeom>
           <a:solidFill>
-            <a:srgbClr val="2F6F6F"/>
+            <a:srgbClr val="D6832F"/>
           </a:solidFill>
           <a:ln/>
         </p:spPr>
@@ -10246,8 +10440,8 @@
         </p:nvSpPr>
         <p:spPr>
           <a:xfrm>
-            <a:off x="685800" y="1737360"/>
-            <a:ext cx="502920" cy="502920"/>
+            <a:off x="685800" y="1828800"/>
+            <a:ext cx="566928" cy="566928"/>
           </a:xfrm>
           <a:prstGeom prst="rect">
             <a:avLst/>
@@ -10263,7 +10457,7 @@
               <a:buNone/>
             </a:pPr>
             <a:r>
-              <a:rPr lang="en-US" sz="2000" b="1" dirty="0">
+              <a:rPr lang="en-US" sz="2200" b="1" dirty="0">
                 <a:solidFill>
                   <a:srgbClr val="FFFFFF"/>
                 </a:solidFill>
@@ -10273,7 +10467,7 @@
               </a:rPr>
               <a:t>1</a:t>
             </a:r>
-            <a:endParaRPr lang="en-US" sz="2000" dirty="0"/>
+            <a:endParaRPr lang="en-US" sz="2200" dirty="0"/>
           </a:p>
         </p:txBody>
       </p:sp>
@@ -10285,8 +10479,8 @@
         </p:nvSpPr>
         <p:spPr>
           <a:xfrm>
-            <a:off x="1508760" y="1691640"/>
-            <a:ext cx="9966960" cy="777240"/>
+            <a:off x="1554480" y="1783080"/>
+            <a:ext cx="9784080" cy="822960"/>
           </a:xfrm>
           <a:prstGeom prst="rect">
             <a:avLst/>
@@ -10302,7 +10496,7 @@
               <a:buNone/>
             </a:pPr>
             <a:r>
-              <a:rPr lang="en-US" sz="1900" dirty="0">
+              <a:rPr lang="en-US" sz="2000" dirty="0">
                 <a:solidFill>
                   <a:srgbClr val="33413F"/>
                 </a:solidFill>
@@ -10310,9 +10504,9 @@
                 <a:ea typeface="Calibri" pitchFamily="34" charset="-122"/>
                 <a:cs typeface="Calibri" pitchFamily="34" charset="-120"/>
               </a:rPr>
-              <a:t>Zwei-Faktor an, per App statt per SMS, wenn du die Wahl hast</a:t>
-            </a:r>
-            <a:endParaRPr lang="en-US" sz="1900" dirty="0"/>
+              <a:t>Zwei-Faktor einschalten</a:t>
+            </a:r>
+            <a:endParaRPr lang="en-US" sz="2000" dirty="0"/>
           </a:p>
         </p:txBody>
       </p:sp>
@@ -10324,14 +10518,14 @@
         </p:nvSpPr>
         <p:spPr>
           <a:xfrm>
-            <a:off x="685800" y="2651760"/>
-            <a:ext cx="502920" cy="502920"/>
+            <a:off x="685800" y="2971800"/>
+            <a:ext cx="566928" cy="566928"/>
           </a:xfrm>
           <a:prstGeom prst="ellipse">
             <a:avLst/>
           </a:prstGeom>
           <a:solidFill>
-            <a:srgbClr val="2F6F6F"/>
+            <a:srgbClr val="D6832F"/>
           </a:solidFill>
           <a:ln/>
         </p:spPr>
@@ -10344,8 +10538,8 @@
         </p:nvSpPr>
         <p:spPr>
           <a:xfrm>
-            <a:off x="685800" y="2651760"/>
-            <a:ext cx="502920" cy="502920"/>
+            <a:off x="685800" y="2971800"/>
+            <a:ext cx="566928" cy="566928"/>
           </a:xfrm>
           <a:prstGeom prst="rect">
             <a:avLst/>
@@ -10361,7 +10555,7 @@
               <a:buNone/>
             </a:pPr>
             <a:r>
-              <a:rPr lang="en-US" sz="2000" b="1" dirty="0">
+              <a:rPr lang="en-US" sz="2200" b="1" dirty="0">
                 <a:solidFill>
                   <a:srgbClr val="FFFFFF"/>
                 </a:solidFill>
@@ -10371,7 +10565,7 @@
               </a:rPr>
               <a:t>2</a:t>
             </a:r>
-            <a:endParaRPr lang="en-US" sz="2000" dirty="0"/>
+            <a:endParaRPr lang="en-US" sz="2200" dirty="0"/>
           </a:p>
         </p:txBody>
       </p:sp>
@@ -10383,8 +10577,8 @@
         </p:nvSpPr>
         <p:spPr>
           <a:xfrm>
-            <a:off x="1508760" y="2606040"/>
-            <a:ext cx="9966960" cy="777240"/>
+            <a:off x="1554480" y="2926080"/>
+            <a:ext cx="9784080" cy="822960"/>
           </a:xfrm>
           <a:prstGeom prst="rect">
             <a:avLst/>
@@ -10400,7 +10594,7 @@
               <a:buNone/>
             </a:pPr>
             <a:r>
-              <a:rPr lang="en-US" sz="1900" dirty="0">
+              <a:rPr lang="en-US" sz="2000" dirty="0">
                 <a:solidFill>
                   <a:srgbClr val="33413F"/>
                 </a:solidFill>
@@ -10408,9 +10602,9 @@
                 <a:ea typeface="Calibri" pitchFamily="34" charset="-122"/>
                 <a:cs typeface="Calibri" pitchFamily="34" charset="-120"/>
               </a:rPr>
-              <a:t>Codes ausdrucken oder in deinem Passwortmanager sichern</a:t>
-            </a:r>
-            <a:endParaRPr lang="en-US" sz="1900" dirty="0"/>
+              <a:t>Wiederherstellungscodes sichern</a:t>
+            </a:r>
+            <a:endParaRPr lang="en-US" sz="2000" dirty="0"/>
           </a:p>
         </p:txBody>
       </p:sp>
@@ -10422,14 +10616,14 @@
         </p:nvSpPr>
         <p:spPr>
           <a:xfrm>
-            <a:off x="685800" y="3566160"/>
-            <a:ext cx="502920" cy="502920"/>
+            <a:off x="685800" y="4114800"/>
+            <a:ext cx="566928" cy="566928"/>
           </a:xfrm>
           <a:prstGeom prst="ellipse">
             <a:avLst/>
           </a:prstGeom>
           <a:solidFill>
-            <a:srgbClr val="2F6F6F"/>
+            <a:srgbClr val="D6832F"/>
           </a:solidFill>
           <a:ln/>
         </p:spPr>
@@ -10442,8 +10636,8 @@
         </p:nvSpPr>
         <p:spPr>
           <a:xfrm>
-            <a:off x="685800" y="3566160"/>
-            <a:ext cx="502920" cy="502920"/>
+            <a:off x="685800" y="4114800"/>
+            <a:ext cx="566928" cy="566928"/>
           </a:xfrm>
           <a:prstGeom prst="rect">
             <a:avLst/>
@@ -10459,7 +10653,7 @@
               <a:buNone/>
             </a:pPr>
             <a:r>
-              <a:rPr lang="en-US" sz="2000" b="1" dirty="0">
+              <a:rPr lang="en-US" sz="2200" b="1" dirty="0">
                 <a:solidFill>
                   <a:srgbClr val="FFFFFF"/>
                 </a:solidFill>
@@ -10469,7 +10663,7 @@
               </a:rPr>
               <a:t>3</a:t>
             </a:r>
-            <a:endParaRPr lang="en-US" sz="2000" dirty="0"/>
+            <a:endParaRPr lang="en-US" sz="2200" dirty="0"/>
           </a:p>
         </p:txBody>
       </p:sp>
@@ -10481,8 +10675,8 @@
         </p:nvSpPr>
         <p:spPr>
           <a:xfrm>
-            <a:off x="1508760" y="3520440"/>
-            <a:ext cx="9966960" cy="777240"/>
+            <a:off x="1554480" y="4069080"/>
+            <a:ext cx="9784080" cy="822960"/>
           </a:xfrm>
           <a:prstGeom prst="rect">
             <a:avLst/>
@@ -10498,7 +10692,7 @@
               <a:buNone/>
             </a:pPr>
             <a:r>
-              <a:rPr lang="en-US" sz="1900" dirty="0">
+              <a:rPr lang="en-US" sz="2000" dirty="0">
                 <a:solidFill>
                   <a:srgbClr val="33413F"/>
                 </a:solidFill>
@@ -10506,9 +10700,9 @@
                 <a:ea typeface="Calibri" pitchFamily="34" charset="-122"/>
                 <a:cs typeface="Calibri" pitchFamily="34" charset="-120"/>
               </a:rPr>
-              <a:t>Instagram schreibt dir nie per DM, dass dein Konto gelöscht wird</a:t>
-            </a:r>
-            <a:endParaRPr lang="en-US" sz="1900" dirty="0"/>
+              <a:t>Woran du eine gefälschte Nachricht von „Instagram“ erkennst</a:t>
+            </a:r>
+            <a:endParaRPr lang="en-US" sz="2000" dirty="0"/>
           </a:p>
         </p:txBody>
       </p:sp>
@@ -10526,7 +10720,7 @@
     <p:bg>
       <p:bgPr>
         <a:solidFill>
-          <a:srgbClr val="1E3A4C"/>
+          <a:srgbClr val="FFFFFF"/>
         </a:solidFill>
       </p:bgPr>
     </p:bg>
@@ -10546,78 +10740,14 @@
       </p:grpSpPr>
       <p:sp>
         <p:nvSpPr>
-          <p:cNvPr id="2" name="Shape 0"/>
-          <p:cNvSpPr/>
-          <p:nvPr/>
-        </p:nvSpPr>
-        <p:spPr>
-          <a:xfrm>
-            <a:off x="685800" y="731520"/>
-            <a:ext cx="546811" cy="1051560"/>
-          </a:xfrm>
-          <a:prstGeom prst="roundRect">
-            <a:avLst>
-              <a:gd name="adj" fmla="val 10033"/>
-            </a:avLst>
-          </a:prstGeom>
-          <a:solidFill>
-            <a:srgbClr val="D6832F"/>
-          </a:solidFill>
-          <a:ln/>
-        </p:spPr>
-      </p:sp>
-      <p:sp>
-        <p:nvSpPr>
-          <p:cNvPr id="3" name="Shape 1"/>
-          <p:cNvSpPr/>
-          <p:nvPr/>
-        </p:nvSpPr>
-        <p:spPr>
-          <a:xfrm>
-            <a:off x="751417" y="868223"/>
-            <a:ext cx="415577" cy="651967"/>
-          </a:xfrm>
-          <a:prstGeom prst="roundRect">
-            <a:avLst>
-              <a:gd name="adj" fmla="val 4401"/>
-            </a:avLst>
-          </a:prstGeom>
-          <a:solidFill>
-            <a:srgbClr val="FFFFFF"/>
-          </a:solidFill>
-          <a:ln/>
-        </p:spPr>
-      </p:sp>
-      <p:sp>
-        <p:nvSpPr>
-          <p:cNvPr id="4" name="Shape 2"/>
-          <p:cNvSpPr/>
-          <p:nvPr/>
-        </p:nvSpPr>
-        <p:spPr>
-          <a:xfrm>
-            <a:off x="915461" y="1604315"/>
-            <a:ext cx="87490" cy="87490"/>
-          </a:xfrm>
-          <a:prstGeom prst="ellipse">
-            <a:avLst/>
-          </a:prstGeom>
-          <a:solidFill>
-            <a:srgbClr val="FFFFFF"/>
-          </a:solidFill>
-          <a:ln/>
-        </p:spPr>
-      </p:sp>
-      <p:sp>
-        <p:nvSpPr>
-          <p:cNvPr id="5" name="Text 3"/>
-          <p:cNvSpPr txBox="1"/>
-          <p:nvPr/>
-        </p:nvSpPr>
-        <p:spPr>
-          <a:xfrm>
-            <a:off x="1600200" y="731520"/>
-            <a:ext cx="9875520" cy="548640"/>
+          <p:cNvPr id="2" name="Text 0"/>
+          <p:cNvSpPr txBox="1"/>
+          <p:nvPr/>
+        </p:nvSpPr>
+        <p:spPr>
+          <a:xfrm>
+            <a:off x="685800" y="685800"/>
+            <a:ext cx="10789920" cy="457200"/>
           </a:xfrm>
           <a:prstGeom prst="rect">
             <a:avLst/>
@@ -10633,15 +10763,74 @@
               <a:buNone/>
             </a:pPr>
             <a:r>
-              <a:rPr lang="en-US" sz="2000" b="1" spc="300" kern="0" dirty="0">
-                <a:solidFill>
-                  <a:srgbClr val="D6832F"/>
+              <a:rPr lang="en-US" sz="1600" b="1" spc="300" kern="0" dirty="0">
+                <a:solidFill>
+                  <a:srgbClr val="2F6F6F"/>
                 </a:solidFill>
                 <a:latin typeface="Calibri" pitchFamily="34" charset="0"/>
                 <a:ea typeface="Calibri" pitchFamily="34" charset="-122"/>
                 <a:cs typeface="Calibri" pitchFamily="34" charset="-120"/>
               </a:rPr>
-              <a:t>JETZT AM HANDY MIT</a:t>
+              <a:t>DIE DREI REGELN</a:t>
+            </a:r>
+            <a:endParaRPr lang="en-US" sz="1600" dirty="0"/>
+          </a:p>
+        </p:txBody>
+      </p:sp>
+      <p:sp>
+        <p:nvSpPr>
+          <p:cNvPr id="3" name="Shape 1"/>
+          <p:cNvSpPr/>
+          <p:nvPr/>
+        </p:nvSpPr>
+        <p:spPr>
+          <a:xfrm>
+            <a:off x="685800" y="1737360"/>
+            <a:ext cx="502920" cy="502920"/>
+          </a:xfrm>
+          <a:prstGeom prst="ellipse">
+            <a:avLst/>
+          </a:prstGeom>
+          <a:solidFill>
+            <a:srgbClr val="2F6F6F"/>
+          </a:solidFill>
+          <a:ln/>
+        </p:spPr>
+      </p:sp>
+      <p:sp>
+        <p:nvSpPr>
+          <p:cNvPr id="4" name="Text 2"/>
+          <p:cNvSpPr txBox="1"/>
+          <p:nvPr/>
+        </p:nvSpPr>
+        <p:spPr>
+          <a:xfrm>
+            <a:off x="685800" y="1737360"/>
+            <a:ext cx="502920" cy="502920"/>
+          </a:xfrm>
+          <a:prstGeom prst="rect">
+            <a:avLst/>
+          </a:prstGeom>
+          <a:noFill/>
+          <a:ln/>
+        </p:spPr>
+        <p:txBody>
+          <a:bodyPr wrap="square" lIns="0" tIns="0" rIns="0" bIns="0" rtlCol="0" anchor="ctr"/>
+          <a:lstStyle/>
+          <a:p>
+            <a:pPr algn="ctr" indent="0" marL="0">
+              <a:buNone/>
+            </a:pPr>
+            <a:r>
+              <a:rPr lang="en-US" sz="2000" b="1" dirty="0">
+                <a:solidFill>
+                  <a:srgbClr val="FFFFFF"/>
+                </a:solidFill>
+                <a:latin typeface="Cambria" pitchFamily="34" charset="0"/>
+                <a:ea typeface="Cambria" pitchFamily="34" charset="-122"/>
+                <a:cs typeface="Cambria" pitchFamily="34" charset="-120"/>
+              </a:rPr>
+              <a:t>1</a:t>
             </a:r>
             <a:endParaRPr lang="en-US" sz="2000" dirty="0"/>
           </a:p>
@@ -10649,14 +10838,14 @@
       </p:sp>
       <p:sp>
         <p:nvSpPr>
-          <p:cNvPr id="6" name="Text 4"/>
-          <p:cNvSpPr txBox="1"/>
-          <p:nvPr/>
-        </p:nvSpPr>
-        <p:spPr>
-          <a:xfrm>
-            <a:off x="1600200" y="1234440"/>
-            <a:ext cx="9875520" cy="548640"/>
+          <p:cNvPr id="5" name="Text 3"/>
+          <p:cNvSpPr txBox="1"/>
+          <p:nvPr/>
+        </p:nvSpPr>
+        <p:spPr>
+          <a:xfrm>
+            <a:off x="1508760" y="1691640"/>
+            <a:ext cx="9966960" cy="777240"/>
           </a:xfrm>
           <a:prstGeom prst="rect">
             <a:avLst/>
@@ -10672,19 +10861,39 @@
               <a:buNone/>
             </a:pPr>
             <a:r>
-              <a:rPr lang="en-US" sz="1800" i="1" dirty="0">
-                <a:solidFill>
-                  <a:srgbClr val="F1ECDD"/>
+              <a:rPr lang="en-US" sz="1900" dirty="0">
+                <a:solidFill>
+                  <a:srgbClr val="33413F"/>
                 </a:solidFill>
                 <a:latin typeface="Calibri" pitchFamily="34" charset="0"/>
                 <a:ea typeface="Calibri" pitchFamily="34" charset="-122"/>
                 <a:cs typeface="Calibri" pitchFamily="34" charset="-120"/>
               </a:rPr>
-              <a:t>Zwei-Faktor-Authentifizierung einschalten</a:t>
-            </a:r>
-            <a:endParaRPr lang="en-US" sz="1800" dirty="0"/>
-          </a:p>
-        </p:txBody>
+              <a:t>Zwei-Faktor an, per App statt per SMS, wenn du die Wahl hast</a:t>
+            </a:r>
+            <a:endParaRPr lang="en-US" sz="1900" dirty="0"/>
+          </a:p>
+        </p:txBody>
+      </p:sp>
+      <p:sp>
+        <p:nvSpPr>
+          <p:cNvPr id="6" name="Shape 4"/>
+          <p:cNvSpPr/>
+          <p:nvPr/>
+        </p:nvSpPr>
+        <p:spPr>
+          <a:xfrm>
+            <a:off x="685800" y="2651760"/>
+            <a:ext cx="502920" cy="502920"/>
+          </a:xfrm>
+          <a:prstGeom prst="ellipse">
+            <a:avLst/>
+          </a:prstGeom>
+          <a:solidFill>
+            <a:srgbClr val="2F6F6F"/>
+          </a:solidFill>
+          <a:ln/>
+        </p:spPr>
       </p:sp>
       <p:sp>
         <p:nvSpPr>
@@ -10694,15 +10903,13 @@
         </p:nvSpPr>
         <p:spPr>
           <a:xfrm>
-            <a:off x="685800" y="2286000"/>
-            <a:ext cx="457200" cy="457200"/>
-          </a:xfrm>
-          <a:prstGeom prst="ellipse">
-            <a:avLst/>
-          </a:prstGeom>
-          <a:solidFill>
-            <a:srgbClr val="F1ECDD"/>
-          </a:solidFill>
+            <a:off x="685800" y="2651760"/>
+            <a:ext cx="502920" cy="502920"/>
+          </a:xfrm>
+          <a:prstGeom prst="rect">
+            <a:avLst/>
+          </a:prstGeom>
+          <a:noFill/>
           <a:ln/>
         </p:spPr>
         <p:txBody>
@@ -10713,17 +10920,17 @@
               <a:buNone/>
             </a:pPr>
             <a:r>
-              <a:rPr lang="en-US" sz="1600" b="1" dirty="0">
-                <a:solidFill>
-                  <a:srgbClr val="1E3A4C"/>
+              <a:rPr lang="en-US" sz="2000" b="1" dirty="0">
+                <a:solidFill>
+                  <a:srgbClr val="FFFFFF"/>
                 </a:solidFill>
                 <a:latin typeface="Cambria" pitchFamily="34" charset="0"/>
                 <a:ea typeface="Cambria" pitchFamily="34" charset="-122"/>
                 <a:cs typeface="Cambria" pitchFamily="34" charset="-120"/>
               </a:rPr>
-              <a:t>1</a:t>
-            </a:r>
-            <a:endParaRPr lang="en-US" sz="1600" dirty="0"/>
+              <a:t>2</a:t>
+            </a:r>
+            <a:endParaRPr lang="en-US" sz="2000" dirty="0"/>
           </a:p>
         </p:txBody>
       </p:sp>
@@ -10735,8 +10942,8 @@
         </p:nvSpPr>
         <p:spPr>
           <a:xfrm>
-            <a:off x="1417320" y="2240280"/>
-            <a:ext cx="10058400" cy="640080"/>
+            <a:off x="1508760" y="2606040"/>
+            <a:ext cx="9966960" cy="777240"/>
           </a:xfrm>
           <a:prstGeom prst="rect">
             <a:avLst/>
@@ -10752,39 +10959,57 @@
               <a:buNone/>
             </a:pPr>
             <a:r>
-              <a:rPr lang="en-US" sz="1650" dirty="0">
-                <a:solidFill>
-                  <a:srgbClr val="FFFFFF"/>
+              <a:rPr lang="en-US" sz="1900" dirty="0">
+                <a:solidFill>
+                  <a:srgbClr val="33413F"/>
                 </a:solidFill>
                 <a:latin typeface="Calibri" pitchFamily="34" charset="0"/>
                 <a:ea typeface="Calibri" pitchFamily="34" charset="-122"/>
                 <a:cs typeface="Calibri" pitchFamily="34" charset="-120"/>
               </a:rPr>
-              <a:t>Einstellungen → Kontenübersicht → Passwort und Sicherheit → Zwei-Faktor</a:t>
-            </a:r>
-            <a:endParaRPr lang="en-US" sz="1650" dirty="0"/>
-          </a:p>
-        </p:txBody>
-      </p:sp>
-      <p:sp>
-        <p:nvSpPr>
-          <p:cNvPr id="9" name="Text 7"/>
-          <p:cNvSpPr txBox="1"/>
-          <p:nvPr/>
-        </p:nvSpPr>
-        <p:spPr>
-          <a:xfrm>
-            <a:off x="685800" y="3063240"/>
-            <a:ext cx="457200" cy="457200"/>
+              <a:t>Codes ausdrucken oder in deinem Passwortmanager sichern</a:t>
+            </a:r>
+            <a:endParaRPr lang="en-US" sz="1900" dirty="0"/>
+          </a:p>
+        </p:txBody>
+      </p:sp>
+      <p:sp>
+        <p:nvSpPr>
+          <p:cNvPr id="9" name="Shape 7"/>
+          <p:cNvSpPr/>
+          <p:nvPr/>
+        </p:nvSpPr>
+        <p:spPr>
+          <a:xfrm>
+            <a:off x="685800" y="3566160"/>
+            <a:ext cx="502920" cy="502920"/>
           </a:xfrm>
           <a:prstGeom prst="ellipse">
             <a:avLst/>
           </a:prstGeom>
           <a:solidFill>
-            <a:srgbClr val="F1ECDD"/>
+            <a:srgbClr val="2F6F6F"/>
           </a:solidFill>
           <a:ln/>
         </p:spPr>
+      </p:sp>
+      <p:sp>
+        <p:nvSpPr>
+          <p:cNvPr id="10" name="Text 8"/>
+          <p:cNvSpPr txBox="1"/>
+          <p:nvPr/>
+        </p:nvSpPr>
+        <p:spPr>
+          <a:xfrm>
+            <a:off x="685800" y="3566160"/>
+            <a:ext cx="502920" cy="502920"/>
+          </a:xfrm>
+          <a:prstGeom prst="rect">
+            <a:avLst/>
+          </a:prstGeom>
+          <a:noFill/>
+          <a:ln/>
+        </p:spPr>
         <p:txBody>
           <a:bodyPr wrap="square" lIns="0" tIns="0" rIns="0" bIns="0" rtlCol="0" anchor="ctr"/>
           <a:lstStyle/>
@@ -10793,30 +11018,30 @@
               <a:buNone/>
             </a:pPr>
             <a:r>
-              <a:rPr lang="en-US" sz="1600" b="1" dirty="0">
-                <a:solidFill>
-                  <a:srgbClr val="1E3A4C"/>
+              <a:rPr lang="en-US" sz="2000" b="1" dirty="0">
+                <a:solidFill>
+                  <a:srgbClr val="FFFFFF"/>
                 </a:solidFill>
                 <a:latin typeface="Cambria" pitchFamily="34" charset="0"/>
                 <a:ea typeface="Cambria" pitchFamily="34" charset="-122"/>
                 <a:cs typeface="Cambria" pitchFamily="34" charset="-120"/>
               </a:rPr>
-              <a:t>2</a:t>
-            </a:r>
-            <a:endParaRPr lang="en-US" sz="1600" dirty="0"/>
-          </a:p>
-        </p:txBody>
-      </p:sp>
-      <p:sp>
-        <p:nvSpPr>
-          <p:cNvPr id="10" name="Text 8"/>
-          <p:cNvSpPr txBox="1"/>
-          <p:nvPr/>
-        </p:nvSpPr>
-        <p:spPr>
-          <a:xfrm>
-            <a:off x="1417320" y="3017520"/>
-            <a:ext cx="10058400" cy="640080"/>
+              <a:t>3</a:t>
+            </a:r>
+            <a:endParaRPr lang="en-US" sz="2000" dirty="0"/>
+          </a:p>
+        </p:txBody>
+      </p:sp>
+      <p:sp>
+        <p:nvSpPr>
+          <p:cNvPr id="11" name="Text 9"/>
+          <p:cNvSpPr txBox="1"/>
+          <p:nvPr/>
+        </p:nvSpPr>
+        <p:spPr>
+          <a:xfrm>
+            <a:off x="1508760" y="3520440"/>
+            <a:ext cx="9966960" cy="777240"/>
           </a:xfrm>
           <a:prstGeom prst="rect">
             <a:avLst/>
@@ -10832,17 +11057,17 @@
               <a:buNone/>
             </a:pPr>
             <a:r>
-              <a:rPr lang="en-US" sz="1650" dirty="0">
-                <a:solidFill>
-                  <a:srgbClr val="FFFFFF"/>
+              <a:rPr lang="en-US" sz="1900" dirty="0">
+                <a:solidFill>
+                  <a:srgbClr val="33413F"/>
                 </a:solidFill>
                 <a:latin typeface="Calibri" pitchFamily="34" charset="0"/>
                 <a:ea typeface="Calibri" pitchFamily="34" charset="-122"/>
                 <a:cs typeface="Calibri" pitchFamily="34" charset="-120"/>
               </a:rPr>
-              <a:t>Methode wählen (App bevorzugt), Codes sichern</a:t>
-            </a:r>
-            <a:endParaRPr lang="en-US" sz="1650" dirty="0"/>
+              <a:t>Instagram schreibt dir nie per DM, dass dein Konto gelöscht wird</a:t>
+            </a:r>
+            <a:endParaRPr lang="en-US" sz="1900" dirty="0"/>
           </a:p>
         </p:txBody>
       </p:sp>
@@ -10880,18 +11105,18 @@
       </p:grpSpPr>
       <p:sp>
         <p:nvSpPr>
-          <p:cNvPr id="2" name="Text 0"/>
-          <p:cNvSpPr txBox="1"/>
-          <p:nvPr/>
-        </p:nvSpPr>
-        <p:spPr>
-          <a:xfrm>
-            <a:off x="685800" y="822960"/>
-            <a:ext cx="3291840" cy="384048"/>
+          <p:cNvPr id="2" name="Shape 0"/>
+          <p:cNvSpPr/>
+          <p:nvPr/>
+        </p:nvSpPr>
+        <p:spPr>
+          <a:xfrm>
+            <a:off x="685800" y="731520"/>
+            <a:ext cx="546811" cy="1051560"/>
           </a:xfrm>
           <a:prstGeom prst="roundRect">
             <a:avLst>
-              <a:gd name="adj" fmla="val 21429"/>
+              <a:gd name="adj" fmla="val 10033"/>
             </a:avLst>
           </a:prstGeom>
           <a:solidFill>
@@ -10899,38 +11124,98 @@
           </a:solidFill>
           <a:ln/>
         </p:spPr>
-        <p:txBody>
-          <a:bodyPr wrap="square" lIns="0" tIns="0" rIns="0" bIns="0" rtlCol="0" anchor="ctr"/>
-          <a:lstStyle/>
-          <a:p>
-            <a:pPr algn="ctr" indent="0" marL="0">
-              <a:buNone/>
-            </a:pPr>
-            <a:r>
-              <a:rPr lang="en-US" sz="1200" b="1" spc="200" kern="0" dirty="0">
-                <a:solidFill>
-                  <a:srgbClr val="FFFFFF"/>
+      </p:sp>
+      <p:sp>
+        <p:nvSpPr>
+          <p:cNvPr id="3" name="Shape 1"/>
+          <p:cNvSpPr/>
+          <p:nvPr/>
+        </p:nvSpPr>
+        <p:spPr>
+          <a:xfrm>
+            <a:off x="751417" y="868223"/>
+            <a:ext cx="415577" cy="651967"/>
+          </a:xfrm>
+          <a:prstGeom prst="roundRect">
+            <a:avLst>
+              <a:gd name="adj" fmla="val 4401"/>
+            </a:avLst>
+          </a:prstGeom>
+          <a:solidFill>
+            <a:srgbClr val="FFFFFF"/>
+          </a:solidFill>
+          <a:ln/>
+        </p:spPr>
+      </p:sp>
+      <p:sp>
+        <p:nvSpPr>
+          <p:cNvPr id="4" name="Shape 2"/>
+          <p:cNvSpPr/>
+          <p:nvPr/>
+        </p:nvSpPr>
+        <p:spPr>
+          <a:xfrm>
+            <a:off x="915461" y="1604315"/>
+            <a:ext cx="87490" cy="87490"/>
+          </a:xfrm>
+          <a:prstGeom prst="ellipse">
+            <a:avLst/>
+          </a:prstGeom>
+          <a:solidFill>
+            <a:srgbClr val="FFFFFF"/>
+          </a:solidFill>
+          <a:ln/>
+        </p:spPr>
+      </p:sp>
+      <p:sp>
+        <p:nvSpPr>
+          <p:cNvPr id="5" name="Text 3"/>
+          <p:cNvSpPr txBox="1"/>
+          <p:nvPr/>
+        </p:nvSpPr>
+        <p:spPr>
+          <a:xfrm>
+            <a:off x="1600200" y="731520"/>
+            <a:ext cx="9875520" cy="548640"/>
+          </a:xfrm>
+          <a:prstGeom prst="rect">
+            <a:avLst/>
+          </a:prstGeom>
+          <a:noFill/>
+          <a:ln/>
+        </p:spPr>
+        <p:txBody>
+          <a:bodyPr wrap="square" rtlCol="0" anchor="ctr"/>
+          <a:lstStyle/>
+          <a:p>
+            <a:pPr indent="0" marL="0">
+              <a:buNone/>
+            </a:pPr>
+            <a:r>
+              <a:rPr lang="en-US" sz="2000" b="1" spc="300" kern="0" dirty="0">
+                <a:solidFill>
+                  <a:srgbClr val="D6832F"/>
                 </a:solidFill>
                 <a:latin typeface="Calibri" pitchFamily="34" charset="0"/>
                 <a:ea typeface="Calibri" pitchFamily="34" charset="-122"/>
                 <a:cs typeface="Calibri" pitchFamily="34" charset="-120"/>
               </a:rPr>
-              <a:t>MODUL 1 · ABGESCHLOSSEN</a:t>
-            </a:r>
-            <a:endParaRPr lang="en-US" sz="1200" dirty="0"/>
-          </a:p>
-        </p:txBody>
-      </p:sp>
-      <p:sp>
-        <p:nvSpPr>
-          <p:cNvPr id="3" name="Text 1"/>
-          <p:cNvSpPr txBox="1"/>
-          <p:nvPr/>
-        </p:nvSpPr>
-        <p:spPr>
-          <a:xfrm>
-            <a:off x="685800" y="1554480"/>
-            <a:ext cx="10789920" cy="1097280"/>
+              <a:t>JETZT AM HANDY MIT</a:t>
+            </a:r>
+            <a:endParaRPr lang="en-US" sz="2000" dirty="0"/>
+          </a:p>
+        </p:txBody>
+      </p:sp>
+      <p:sp>
+        <p:nvSpPr>
+          <p:cNvPr id="6" name="Text 4"/>
+          <p:cNvSpPr txBox="1"/>
+          <p:nvPr/>
+        </p:nvSpPr>
+        <p:spPr>
+          <a:xfrm>
+            <a:off x="1600200" y="1234440"/>
+            <a:ext cx="9875520" cy="548640"/>
           </a:xfrm>
           <a:prstGeom prst="rect">
             <a:avLst/>
@@ -10946,77 +11231,116 @@
               <a:buNone/>
             </a:pPr>
             <a:r>
-              <a:rPr lang="en-US" sz="4600" b="1" dirty="0">
-                <a:solidFill>
-                  <a:srgbClr val="FFFFFF"/>
+              <a:rPr lang="en-US" sz="1800" i="1" dirty="0">
+                <a:solidFill>
+                  <a:srgbClr val="F1ECDD"/>
+                </a:solidFill>
+                <a:latin typeface="Calibri" pitchFamily="34" charset="0"/>
+                <a:ea typeface="Calibri" pitchFamily="34" charset="-122"/>
+                <a:cs typeface="Calibri" pitchFamily="34" charset="-120"/>
+              </a:rPr>
+              <a:t>Zwei-Faktor-Authentifizierung einschalten</a:t>
+            </a:r>
+            <a:endParaRPr lang="en-US" sz="1800" dirty="0"/>
+          </a:p>
+        </p:txBody>
+      </p:sp>
+      <p:sp>
+        <p:nvSpPr>
+          <p:cNvPr id="7" name="Text 5"/>
+          <p:cNvSpPr txBox="1"/>
+          <p:nvPr/>
+        </p:nvSpPr>
+        <p:spPr>
+          <a:xfrm>
+            <a:off x="685800" y="2286000"/>
+            <a:ext cx="457200" cy="457200"/>
+          </a:xfrm>
+          <a:prstGeom prst="ellipse">
+            <a:avLst/>
+          </a:prstGeom>
+          <a:solidFill>
+            <a:srgbClr val="F1ECDD"/>
+          </a:solidFill>
+          <a:ln/>
+        </p:spPr>
+        <p:txBody>
+          <a:bodyPr wrap="square" lIns="0" tIns="0" rIns="0" bIns="0" rtlCol="0" anchor="ctr"/>
+          <a:lstStyle/>
+          <a:p>
+            <a:pPr algn="ctr" indent="0" marL="0">
+              <a:buNone/>
+            </a:pPr>
+            <a:r>
+              <a:rPr lang="en-US" sz="1600" b="1" dirty="0">
+                <a:solidFill>
+                  <a:srgbClr val="1E3A4C"/>
                 </a:solidFill>
                 <a:latin typeface="Cambria" pitchFamily="34" charset="0"/>
                 <a:ea typeface="Cambria" pitchFamily="34" charset="-122"/>
                 <a:cs typeface="Cambria" pitchFamily="34" charset="-120"/>
               </a:rPr>
-              <a:t>Dein Profil steht.</a:t>
-            </a:r>
-            <a:endParaRPr lang="en-US" sz="4600" dirty="0"/>
-          </a:p>
-        </p:txBody>
-      </p:sp>
-      <p:sp>
-        <p:nvSpPr>
-          <p:cNvPr id="4" name="Text 2"/>
-          <p:cNvSpPr txBox="1"/>
-          <p:nvPr/>
-        </p:nvSpPr>
-        <p:spPr>
-          <a:xfrm>
-            <a:off x="685800" y="2834640"/>
-            <a:ext cx="10789920" cy="1463040"/>
-          </a:xfrm>
-          <a:prstGeom prst="rect">
-            <a:avLst/>
-          </a:prstGeom>
-          <a:noFill/>
-          <a:ln/>
-        </p:spPr>
-        <p:txBody>
-          <a:bodyPr wrap="square" rtlCol="0" anchor="t"/>
+              <a:t>1</a:t>
+            </a:r>
+            <a:endParaRPr lang="en-US" sz="1600" dirty="0"/>
+          </a:p>
+        </p:txBody>
+      </p:sp>
+      <p:sp>
+        <p:nvSpPr>
+          <p:cNvPr id="8" name="Text 6"/>
+          <p:cNvSpPr txBox="1"/>
+          <p:nvPr/>
+        </p:nvSpPr>
+        <p:spPr>
+          <a:xfrm>
+            <a:off x="1417320" y="2240280"/>
+            <a:ext cx="10058400" cy="640080"/>
+          </a:xfrm>
+          <a:prstGeom prst="rect">
+            <a:avLst/>
+          </a:prstGeom>
+          <a:noFill/>
+          <a:ln/>
+        </p:spPr>
+        <p:txBody>
+          <a:bodyPr wrap="square" rtlCol="0" anchor="ctr"/>
           <a:lstStyle/>
           <a:p>
             <a:pPr indent="0" marL="0">
               <a:buNone/>
             </a:pPr>
             <a:r>
-              <a:rPr lang="en-US" sz="2000" dirty="0">
-                <a:solidFill>
-                  <a:srgbClr val="F1ECDD"/>
+              <a:rPr lang="en-US" sz="1650" dirty="0">
+                <a:solidFill>
+                  <a:srgbClr val="FFFFFF"/>
                 </a:solidFill>
                 <a:latin typeface="Calibri" pitchFamily="34" charset="0"/>
                 <a:ea typeface="Calibri" pitchFamily="34" charset="-122"/>
                 <a:cs typeface="Calibri" pitchFamily="34" charset="-120"/>
               </a:rPr>
-              <a:t>Name, Bio, Highlights, Link, Sicherheit. Schau es dir jetzt einmal so an, wie es eine Fremde sieht.</a:t>
-            </a:r>
-            <a:endParaRPr lang="en-US" sz="2000" dirty="0"/>
-          </a:p>
-        </p:txBody>
-      </p:sp>
-      <p:sp>
-        <p:nvSpPr>
-          <p:cNvPr id="5" name="Text 3"/>
-          <p:cNvSpPr txBox="1"/>
-          <p:nvPr/>
-        </p:nvSpPr>
-        <p:spPr>
-          <a:xfrm>
-            <a:off x="685800" y="4572000"/>
-            <a:ext cx="4206240" cy="384048"/>
-          </a:xfrm>
-          <a:prstGeom prst="roundRect">
-            <a:avLst>
-              <a:gd name="adj" fmla="val 21429"/>
-            </a:avLst>
+              <a:t>Einstellungen → Kontenübersicht → Passwort und Sicherheit → Zwei-Faktor</a:t>
+            </a:r>
+            <a:endParaRPr lang="en-US" sz="1650" dirty="0"/>
+          </a:p>
+        </p:txBody>
+      </p:sp>
+      <p:sp>
+        <p:nvSpPr>
+          <p:cNvPr id="9" name="Text 7"/>
+          <p:cNvSpPr txBox="1"/>
+          <p:nvPr/>
+        </p:nvSpPr>
+        <p:spPr>
+          <a:xfrm>
+            <a:off x="685800" y="3063240"/>
+            <a:ext cx="457200" cy="457200"/>
+          </a:xfrm>
+          <a:prstGeom prst="ellipse">
+            <a:avLst/>
           </a:prstGeom>
           <a:solidFill>
-            <a:srgbClr val="2F6F6F"/>
+            <a:srgbClr val="F1ECDD"/>
           </a:solidFill>
           <a:ln/>
         </p:spPr>
@@ -11028,7 +11352,46 @@
               <a:buNone/>
             </a:pPr>
             <a:r>
-              <a:rPr lang="en-US" sz="1200" b="1" spc="200" kern="0" dirty="0">
+              <a:rPr lang="en-US" sz="1600" b="1" dirty="0">
+                <a:solidFill>
+                  <a:srgbClr val="1E3A4C"/>
+                </a:solidFill>
+                <a:latin typeface="Cambria" pitchFamily="34" charset="0"/>
+                <a:ea typeface="Cambria" pitchFamily="34" charset="-122"/>
+                <a:cs typeface="Cambria" pitchFamily="34" charset="-120"/>
+              </a:rPr>
+              <a:t>2</a:t>
+            </a:r>
+            <a:endParaRPr lang="en-US" sz="1600" dirty="0"/>
+          </a:p>
+        </p:txBody>
+      </p:sp>
+      <p:sp>
+        <p:nvSpPr>
+          <p:cNvPr id="10" name="Text 8"/>
+          <p:cNvSpPr txBox="1"/>
+          <p:nvPr/>
+        </p:nvSpPr>
+        <p:spPr>
+          <a:xfrm>
+            <a:off x="1417320" y="3017520"/>
+            <a:ext cx="10058400" cy="640080"/>
+          </a:xfrm>
+          <a:prstGeom prst="rect">
+            <a:avLst/>
+          </a:prstGeom>
+          <a:noFill/>
+          <a:ln/>
+        </p:spPr>
+        <p:txBody>
+          <a:bodyPr wrap="square" rtlCol="0" anchor="ctr"/>
+          <a:lstStyle/>
+          <a:p>
+            <a:pPr indent="0" marL="0">
+              <a:buNone/>
+            </a:pPr>
+            <a:r>
+              <a:rPr lang="en-US" sz="1650" dirty="0">
                 <a:solidFill>
                   <a:srgbClr val="FFFFFF"/>
                 </a:solidFill>
@@ -11036,9 +11399,9 @@
                 <a:ea typeface="Calibri" pitchFamily="34" charset="-122"/>
                 <a:cs typeface="Calibri" pitchFamily="34" charset="-120"/>
               </a:rPr>
-              <a:t>WERKSTATT · Station „Profil-Check“</a:t>
-            </a:r>
-            <a:endParaRPr lang="en-US" sz="1200" dirty="0"/>
+              <a:t>Methode wählen (App bevorzugt), Codes sichern</a:t>
+            </a:r>
+            <a:endParaRPr lang="en-US" sz="1650" dirty="0"/>
           </a:p>
         </p:txBody>
       </p:sp>
@@ -11053,6 +11416,202 @@
 <file path=ppt/slides/slide34.xml><?xml version="1.0" encoding="utf-8"?>
 <p:sld xmlns:a="http://schemas.openxmlformats.org/drawingml/2006/main" xmlns:r="http://schemas.openxmlformats.org/officeDocument/2006/relationships" xmlns:p="http://schemas.openxmlformats.org/presentationml/2006/main">
   <p:cSld name="Slide 34">
+    <p:bg>
+      <p:bgPr>
+        <a:solidFill>
+          <a:srgbClr val="1E3A4C"/>
+        </a:solidFill>
+      </p:bgPr>
+    </p:bg>
+    <p:spTree>
+      <p:nvGrpSpPr>
+        <p:cNvPr id="1" name=""/>
+        <p:cNvGrpSpPr/>
+        <p:nvPr/>
+      </p:nvGrpSpPr>
+      <p:grpSpPr>
+        <a:xfrm>
+          <a:off x="0" y="0"/>
+          <a:ext cx="0" cy="0"/>
+          <a:chOff x="0" y="0"/>
+          <a:chExt cx="0" cy="0"/>
+        </a:xfrm>
+      </p:grpSpPr>
+      <p:sp>
+        <p:nvSpPr>
+          <p:cNvPr id="2" name="Text 0"/>
+          <p:cNvSpPr txBox="1"/>
+          <p:nvPr/>
+        </p:nvSpPr>
+        <p:spPr>
+          <a:xfrm>
+            <a:off x="685800" y="822960"/>
+            <a:ext cx="3291840" cy="384048"/>
+          </a:xfrm>
+          <a:prstGeom prst="roundRect">
+            <a:avLst>
+              <a:gd name="adj" fmla="val 21429"/>
+            </a:avLst>
+          </a:prstGeom>
+          <a:solidFill>
+            <a:srgbClr val="D6832F"/>
+          </a:solidFill>
+          <a:ln/>
+        </p:spPr>
+        <p:txBody>
+          <a:bodyPr wrap="square" lIns="0" tIns="0" rIns="0" bIns="0" rtlCol="0" anchor="ctr"/>
+          <a:lstStyle/>
+          <a:p>
+            <a:pPr algn="ctr" indent="0" marL="0">
+              <a:buNone/>
+            </a:pPr>
+            <a:r>
+              <a:rPr lang="en-US" sz="1200" b="1" spc="200" kern="0" dirty="0">
+                <a:solidFill>
+                  <a:srgbClr val="FFFFFF"/>
+                </a:solidFill>
+                <a:latin typeface="Calibri" pitchFamily="34" charset="0"/>
+                <a:ea typeface="Calibri" pitchFamily="34" charset="-122"/>
+                <a:cs typeface="Calibri" pitchFamily="34" charset="-120"/>
+              </a:rPr>
+              <a:t>MODUL 1 · ABGESCHLOSSEN</a:t>
+            </a:r>
+            <a:endParaRPr lang="en-US" sz="1200" dirty="0"/>
+          </a:p>
+        </p:txBody>
+      </p:sp>
+      <p:sp>
+        <p:nvSpPr>
+          <p:cNvPr id="3" name="Text 1"/>
+          <p:cNvSpPr txBox="1"/>
+          <p:nvPr/>
+        </p:nvSpPr>
+        <p:spPr>
+          <a:xfrm>
+            <a:off x="685800" y="1554480"/>
+            <a:ext cx="10789920" cy="1097280"/>
+          </a:xfrm>
+          <a:prstGeom prst="rect">
+            <a:avLst/>
+          </a:prstGeom>
+          <a:noFill/>
+          <a:ln/>
+        </p:spPr>
+        <p:txBody>
+          <a:bodyPr wrap="square" rtlCol="0" anchor="ctr"/>
+          <a:lstStyle/>
+          <a:p>
+            <a:pPr indent="0" marL="0">
+              <a:buNone/>
+            </a:pPr>
+            <a:r>
+              <a:rPr lang="en-US" sz="4600" b="1" dirty="0">
+                <a:solidFill>
+                  <a:srgbClr val="FFFFFF"/>
+                </a:solidFill>
+                <a:latin typeface="Cambria" pitchFamily="34" charset="0"/>
+                <a:ea typeface="Cambria" pitchFamily="34" charset="-122"/>
+                <a:cs typeface="Cambria" pitchFamily="34" charset="-120"/>
+              </a:rPr>
+              <a:t>Dein Profil steht.</a:t>
+            </a:r>
+            <a:endParaRPr lang="en-US" sz="4600" dirty="0"/>
+          </a:p>
+        </p:txBody>
+      </p:sp>
+      <p:sp>
+        <p:nvSpPr>
+          <p:cNvPr id="4" name="Text 2"/>
+          <p:cNvSpPr txBox="1"/>
+          <p:nvPr/>
+        </p:nvSpPr>
+        <p:spPr>
+          <a:xfrm>
+            <a:off x="685800" y="2834640"/>
+            <a:ext cx="10789920" cy="1463040"/>
+          </a:xfrm>
+          <a:prstGeom prst="rect">
+            <a:avLst/>
+          </a:prstGeom>
+          <a:noFill/>
+          <a:ln/>
+        </p:spPr>
+        <p:txBody>
+          <a:bodyPr wrap="square" rtlCol="0" anchor="t"/>
+          <a:lstStyle/>
+          <a:p>
+            <a:pPr indent="0" marL="0">
+              <a:buNone/>
+            </a:pPr>
+            <a:r>
+              <a:rPr lang="en-US" sz="2000" dirty="0">
+                <a:solidFill>
+                  <a:srgbClr val="F1ECDD"/>
+                </a:solidFill>
+                <a:latin typeface="Calibri" pitchFamily="34" charset="0"/>
+                <a:ea typeface="Calibri" pitchFamily="34" charset="-122"/>
+                <a:cs typeface="Calibri" pitchFamily="34" charset="-120"/>
+              </a:rPr>
+              <a:t>Name, Bio, Highlights, Link, Sicherheit. Schau es dir jetzt einmal so an, wie es eine Fremde sieht.</a:t>
+            </a:r>
+            <a:endParaRPr lang="en-US" sz="2000" dirty="0"/>
+          </a:p>
+        </p:txBody>
+      </p:sp>
+      <p:sp>
+        <p:nvSpPr>
+          <p:cNvPr id="5" name="Text 3"/>
+          <p:cNvSpPr txBox="1"/>
+          <p:nvPr/>
+        </p:nvSpPr>
+        <p:spPr>
+          <a:xfrm>
+            <a:off x="685800" y="4572000"/>
+            <a:ext cx="4206240" cy="384048"/>
+          </a:xfrm>
+          <a:prstGeom prst="roundRect">
+            <a:avLst>
+              <a:gd name="adj" fmla="val 21429"/>
+            </a:avLst>
+          </a:prstGeom>
+          <a:solidFill>
+            <a:srgbClr val="2F6F6F"/>
+          </a:solidFill>
+          <a:ln/>
+        </p:spPr>
+        <p:txBody>
+          <a:bodyPr wrap="square" lIns="0" tIns="0" rIns="0" bIns="0" rtlCol="0" anchor="ctr"/>
+          <a:lstStyle/>
+          <a:p>
+            <a:pPr algn="ctr" indent="0" marL="0">
+              <a:buNone/>
+            </a:pPr>
+            <a:r>
+              <a:rPr lang="en-US" sz="1200" b="1" spc="200" kern="0" dirty="0">
+                <a:solidFill>
+                  <a:srgbClr val="FFFFFF"/>
+                </a:solidFill>
+                <a:latin typeface="Calibri" pitchFamily="34" charset="0"/>
+                <a:ea typeface="Calibri" pitchFamily="34" charset="-122"/>
+                <a:cs typeface="Calibri" pitchFamily="34" charset="-120"/>
+              </a:rPr>
+              <a:t>WERKSTATT · Station „Profil-Check“</a:t>
+            </a:r>
+            <a:endParaRPr lang="en-US" sz="1200" dirty="0"/>
+          </a:p>
+        </p:txBody>
+      </p:sp>
+    </p:spTree>
+  </p:cSld>
+  <p:clrMapOvr>
+    <a:masterClrMapping/>
+  </p:clrMapOvr>
+</p:sld>
+</file>
+
+<file path=ppt/slides/slide35.xml><?xml version="1.0" encoding="utf-8"?>
+<p:sld xmlns:a="http://schemas.openxmlformats.org/drawingml/2006/main" xmlns:r="http://schemas.openxmlformats.org/officeDocument/2006/relationships" xmlns:p="http://schemas.openxmlformats.org/presentationml/2006/main">
+  <p:cSld name="Slide 35">
     <p:bg>
       <p:bgPr>
         <a:solidFill>
